--- a/public/wedding-mentor-files/S4_Reuniao_Venda.pptx
+++ b/public/wedding-mentor-files/S4_Reuniao_Venda.pptx
@@ -2548,7 +2548,7 @@
     <p:bg>
       <p:bgPr>
         <a:solidFill>
-          <a:srgbClr val="0B1D33"/>
+          <a:srgbClr val="F8F6F3"/>
         </a:solidFill>
       </p:bgPr>
     </p:bg>
@@ -2566,223 +2566,164 @@
           <a:chExt cx="0" cy="0"/>
         </a:xfrm>
       </p:grpSpPr>
-      <p:sp>
-        <p:nvSpPr>
-          <p:cNvPr id="2" name="Shape 0"/>
-          <p:cNvSpPr/>
-          <p:nvPr/>
-        </p:nvSpPr>
-        <p:spPr>
-          <a:xfrm>
-            <a:off x="8046720" y="-1645920"/>
-            <a:ext cx="5943600" cy="5943600"/>
-          </a:xfrm>
-          <a:prstGeom prst="ellipse">
-            <a:avLst/>
-          </a:prstGeom>
-          <a:solidFill>
-            <a:srgbClr val="4A9EFF">
-              <a:alpha val="14000"/>
-            </a:srgbClr>
-          </a:solidFill>
-          <a:ln/>
-        </p:spPr>
-      </p:sp>
-      <p:sp>
-        <p:nvSpPr>
-          <p:cNvPr id="3" name="Shape 1"/>
-          <p:cNvSpPr/>
-          <p:nvPr/>
-        </p:nvSpPr>
-        <p:spPr>
-          <a:xfrm>
-            <a:off x="-1828800" y="4389120"/>
-            <a:ext cx="5029200" cy="5029200"/>
-          </a:xfrm>
-          <a:prstGeom prst="ellipse">
-            <a:avLst/>
-          </a:prstGeom>
-          <a:solidFill>
-            <a:srgbClr val="C9A961">
-              <a:alpha val="10000"/>
-            </a:srgbClr>
-          </a:solidFill>
-          <a:ln/>
-        </p:spPr>
-      </p:sp>
-      <p:sp>
-        <p:nvSpPr>
-          <p:cNvPr id="4" name="Text 2"/>
-          <p:cNvSpPr/>
-          <p:nvPr/>
-        </p:nvSpPr>
-        <p:spPr>
-          <a:xfrm>
-            <a:off x="640080" y="548640"/>
-            <a:ext cx="7315200" cy="365760"/>
-          </a:xfrm>
-          <a:prstGeom prst="rect">
-            <a:avLst/>
-          </a:prstGeom>
-          <a:noFill/>
-          <a:ln/>
-        </p:spPr>
-        <p:txBody>
-          <a:bodyPr wrap="square" lIns="0" tIns="0" rIns="0" bIns="0" rtlCol="0" anchor="ctr"/>
-          <a:lstStyle/>
-          <a:p>
-            <a:pPr indent="0" marL="0">
-              <a:buNone/>
-            </a:pPr>
-            <a:r>
-              <a:rPr lang="en-US" sz="1300" b="1" spc="500" kern="0" dirty="0">
-                <a:solidFill>
-                  <a:srgbClr val="9FB2C9"/>
+      <p:pic>
+        <p:nvPicPr>
+          <p:cNvPr id="2" name="Image 0" descr="preencoded.png">    </p:cNvPr>
+          <p:cNvPicPr>
+            <a:picLocks noChangeAspect="1"/>
+          </p:cNvPicPr>
+          <p:nvPr/>
+        </p:nvPicPr>
+        <p:blipFill>
+          <a:blip r:embed="rId1"/>
+          <a:stretch>
+            <a:fillRect/>
+          </a:stretch>
+        </p:blipFill>
+        <p:spPr>
+          <a:xfrm>
+            <a:off x="603504" y="457200"/>
+            <a:ext cx="1371600" cy="1415143"/>
+          </a:xfrm>
+          <a:prstGeom prst="rect">
+            <a:avLst/>
+          </a:prstGeom>
+        </p:spPr>
+      </p:pic>
+      <p:sp>
+        <p:nvSpPr>
+          <p:cNvPr id="3" name="Text 0"/>
+          <p:cNvSpPr/>
+          <p:nvPr/>
+        </p:nvSpPr>
+        <p:spPr>
+          <a:xfrm>
+            <a:off x="640080" y="2286000"/>
+            <a:ext cx="5486400" cy="457200"/>
+          </a:xfrm>
+          <a:prstGeom prst="rect">
+            <a:avLst/>
+          </a:prstGeom>
+          <a:noFill/>
+          <a:ln/>
+        </p:spPr>
+        <p:txBody>
+          <a:bodyPr wrap="square" lIns="0" tIns="0" rIns="0" bIns="0" rtlCol="0" anchor="ctr"/>
+          <a:lstStyle/>
+          <a:p>
+            <a:pPr indent="0" marL="0">
+              <a:buNone/>
+            </a:pPr>
+            <a:r>
+              <a:rPr lang="en-US" sz="1500" b="1" spc="600" kern="0" dirty="0">
+                <a:solidFill>
+                  <a:srgbClr val="B1937E"/>
                 </a:solidFill>
                 <a:latin typeface="Calibri" pitchFamily="34" charset="0"/>
                 <a:ea typeface="Calibri" pitchFamily="34" charset="-122"/>
                 <a:cs typeface="Calibri" pitchFamily="34" charset="-120"/>
               </a:rPr>
-              <a:t>MENTORIA · RL</a:t>
-            </a:r>
-            <a:endParaRPr lang="en-US" sz="1300" dirty="0"/>
-          </a:p>
-        </p:txBody>
-      </p:sp>
-      <p:sp>
-        <p:nvSpPr>
-          <p:cNvPr id="5" name="Text 3"/>
-          <p:cNvSpPr/>
-          <p:nvPr/>
-        </p:nvSpPr>
-        <p:spPr>
-          <a:xfrm>
-            <a:off x="640080" y="2286000"/>
-            <a:ext cx="5486400" cy="457200"/>
-          </a:xfrm>
-          <a:prstGeom prst="rect">
-            <a:avLst/>
-          </a:prstGeom>
-          <a:noFill/>
-          <a:ln/>
-        </p:spPr>
-        <p:txBody>
-          <a:bodyPr wrap="square" lIns="0" tIns="0" rIns="0" bIns="0" rtlCol="0" anchor="ctr"/>
-          <a:lstStyle/>
-          <a:p>
-            <a:pPr indent="0" marL="0">
-              <a:buNone/>
-            </a:pPr>
-            <a:r>
-              <a:rPr lang="en-US" sz="1500" b="1" spc="600" kern="0" dirty="0">
-                <a:solidFill>
-                  <a:srgbClr val="C9A961"/>
+              <a:t>SESSÃO 04</a:t>
+            </a:r>
+            <a:endParaRPr lang="en-US" sz="1500" dirty="0"/>
+          </a:p>
+        </p:txBody>
+      </p:sp>
+      <p:sp>
+        <p:nvSpPr>
+          <p:cNvPr id="4" name="Text 1"/>
+          <p:cNvSpPr/>
+          <p:nvPr/>
+        </p:nvSpPr>
+        <p:spPr>
+          <a:xfrm>
+            <a:off x="603504" y="2724912"/>
+            <a:ext cx="10058400" cy="2011680"/>
+          </a:xfrm>
+          <a:prstGeom prst="rect">
+            <a:avLst/>
+          </a:prstGeom>
+          <a:noFill/>
+          <a:ln/>
+        </p:spPr>
+        <p:txBody>
+          <a:bodyPr wrap="square" lIns="0" tIns="0" rIns="0" bIns="0" rtlCol="0" anchor="ctr"/>
+          <a:lstStyle/>
+          <a:p>
+            <a:pPr indent="0" marL="0">
+              <a:lnSpc>
+                <a:spcPct val="100000"/>
+              </a:lnSpc>
+              <a:buNone/>
+            </a:pPr>
+            <a:r>
+              <a:rPr lang="en-US" sz="4400" b="1" dirty="0">
+                <a:solidFill>
+                  <a:srgbClr val="33302B"/>
+                </a:solidFill>
+                <a:latin typeface="Georgia" pitchFamily="34" charset="0"/>
+                <a:ea typeface="Georgia" pitchFamily="34" charset="-122"/>
+                <a:cs typeface="Georgia" pitchFamily="34" charset="-120"/>
+              </a:rPr>
+              <a:t>A Reunião</a:t>
+            </a:r>
+            <a:endParaRPr lang="en-US" sz="4400" dirty="0"/>
+          </a:p>
+          <a:p>
+            <a:pPr indent="0" marL="0">
+              <a:lnSpc>
+                <a:spcPct val="100000"/>
+              </a:lnSpc>
+              <a:buNone/>
+            </a:pPr>
+            <a:r>
+              <a:rPr lang="en-US" sz="4400" b="1" dirty="0">
+                <a:solidFill>
+                  <a:srgbClr val="33302B"/>
+                </a:solidFill>
+                <a:latin typeface="Georgia" pitchFamily="34" charset="0"/>
+                <a:ea typeface="Georgia" pitchFamily="34" charset="-122"/>
+                <a:cs typeface="Georgia" pitchFamily="34" charset="-120"/>
+              </a:rPr>
+              <a:t>de Venda</a:t>
+            </a:r>
+            <a:endParaRPr lang="en-US" sz="4400" dirty="0"/>
+          </a:p>
+        </p:txBody>
+      </p:sp>
+      <p:sp>
+        <p:nvSpPr>
+          <p:cNvPr id="5" name="Text 2"/>
+          <p:cNvSpPr/>
+          <p:nvPr/>
+        </p:nvSpPr>
+        <p:spPr>
+          <a:xfrm>
+            <a:off x="640080" y="4983480"/>
+            <a:ext cx="8229600" cy="822960"/>
+          </a:xfrm>
+          <a:prstGeom prst="rect">
+            <a:avLst/>
+          </a:prstGeom>
+          <a:noFill/>
+          <a:ln/>
+        </p:spPr>
+        <p:txBody>
+          <a:bodyPr wrap="square" lIns="0" tIns="0" rIns="0" bIns="0" rtlCol="0" anchor="ctr"/>
+          <a:lstStyle/>
+          <a:p>
+            <a:pPr indent="0" marL="0">
+              <a:buNone/>
+            </a:pPr>
+            <a:r>
+              <a:rPr lang="en-US" sz="1700" dirty="0">
+                <a:solidFill>
+                  <a:srgbClr val="8A7E72"/>
                 </a:solidFill>
                 <a:latin typeface="Calibri" pitchFamily="34" charset="0"/>
                 <a:ea typeface="Calibri" pitchFamily="34" charset="-122"/>
                 <a:cs typeface="Calibri" pitchFamily="34" charset="-120"/>
               </a:rPr>
-              <a:t>SESSÃO 04</a:t>
-            </a:r>
-            <a:endParaRPr lang="en-US" sz="1500" dirty="0"/>
-          </a:p>
-        </p:txBody>
-      </p:sp>
-      <p:sp>
-        <p:nvSpPr>
-          <p:cNvPr id="6" name="Text 4"/>
-          <p:cNvSpPr/>
-          <p:nvPr/>
-        </p:nvSpPr>
-        <p:spPr>
-          <a:xfrm>
-            <a:off x="603504" y="2724912"/>
-            <a:ext cx="10058400" cy="2011680"/>
-          </a:xfrm>
-          <a:prstGeom prst="rect">
-            <a:avLst/>
-          </a:prstGeom>
-          <a:noFill/>
-          <a:ln/>
-        </p:spPr>
-        <p:txBody>
-          <a:bodyPr wrap="square" lIns="0" tIns="0" rIns="0" bIns="0" rtlCol="0" anchor="ctr"/>
-          <a:lstStyle/>
-          <a:p>
-            <a:pPr indent="0" marL="0">
-              <a:lnSpc>
-                <a:spcPct val="100000"/>
-              </a:lnSpc>
-              <a:buNone/>
-            </a:pPr>
-            <a:r>
-              <a:rPr lang="en-US" sz="5000" b="1" dirty="0">
-                <a:solidFill>
-                  <a:srgbClr val="EAF1FA"/>
-                </a:solidFill>
-                <a:latin typeface="Bookman Old Style" pitchFamily="34" charset="0"/>
-                <a:ea typeface="Bookman Old Style" pitchFamily="34" charset="-122"/>
-                <a:cs typeface="Bookman Old Style" pitchFamily="34" charset="-120"/>
-              </a:rPr>
-              <a:t>A Reunião</a:t>
-            </a:r>
-            <a:endParaRPr lang="en-US" sz="5000" dirty="0"/>
-          </a:p>
-          <a:p>
-            <a:pPr indent="0" marL="0">
-              <a:lnSpc>
-                <a:spcPct val="100000"/>
-              </a:lnSpc>
-              <a:buNone/>
-            </a:pPr>
-            <a:r>
-              <a:rPr lang="en-US" sz="5000" b="1" dirty="0">
-                <a:solidFill>
-                  <a:srgbClr val="EAF1FA"/>
-                </a:solidFill>
-                <a:latin typeface="Bookman Old Style" pitchFamily="34" charset="0"/>
-                <a:ea typeface="Bookman Old Style" pitchFamily="34" charset="-122"/>
-                <a:cs typeface="Bookman Old Style" pitchFamily="34" charset="-120"/>
-              </a:rPr>
-              <a:t>de Venda</a:t>
-            </a:r>
-            <a:endParaRPr lang="en-US" sz="5000" dirty="0"/>
-          </a:p>
-        </p:txBody>
-      </p:sp>
-      <p:sp>
-        <p:nvSpPr>
-          <p:cNvPr id="7" name="Text 5"/>
-          <p:cNvSpPr/>
-          <p:nvPr/>
-        </p:nvSpPr>
-        <p:spPr>
-          <a:xfrm>
-            <a:off x="640080" y="4983480"/>
-            <a:ext cx="8229600" cy="822960"/>
-          </a:xfrm>
-          <a:prstGeom prst="rect">
-            <a:avLst/>
-          </a:prstGeom>
-          <a:noFill/>
-          <a:ln/>
-        </p:spPr>
-        <p:txBody>
-          <a:bodyPr wrap="square" lIns="0" tIns="0" rIns="0" bIns="0" rtlCol="0" anchor="ctr"/>
-          <a:lstStyle/>
-          <a:p>
-            <a:pPr indent="0" marL="0">
-              <a:buNone/>
-            </a:pPr>
-            <a:r>
-              <a:rPr lang="en-US" sz="1700" dirty="0">
-                <a:solidFill>
-                  <a:srgbClr val="9FB2C9"/>
-                </a:solidFill>
-                <a:latin typeface="Calibri" pitchFamily="34" charset="0"/>
-                <a:ea typeface="Calibri" pitchFamily="34" charset="-122"/>
-                <a:cs typeface="Calibri" pitchFamily="34" charset="-120"/>
-              </a:rPr>
               <a:t>A conversa que transforma um interessado em cliente, vendendo emoção, não uma lista de serviços.</a:t>
             </a:r>
             <a:endParaRPr lang="en-US" sz="1700" dirty="0"/>
@@ -2791,7 +2732,7 @@
       </p:sp>
       <p:sp>
         <p:nvSpPr>
-          <p:cNvPr id="8" name="Text 6"/>
+          <p:cNvPr id="6" name="Text 3"/>
           <p:cNvSpPr/>
           <p:nvPr/>
         </p:nvSpPr>
@@ -2816,11 +2757,11 @@
             <a:r>
               <a:rPr lang="en-US" sz="12000" b="1" dirty="0">
                 <a:solidFill>
-                  <a:srgbClr val="16314F"/>
-                </a:solidFill>
-                <a:latin typeface="Bookman Old Style" pitchFamily="34" charset="0"/>
-                <a:ea typeface="Bookman Old Style" pitchFamily="34" charset="-122"/>
-                <a:cs typeface="Bookman Old Style" pitchFamily="34" charset="-120"/>
+                  <a:srgbClr val="EADFD0"/>
+                </a:solidFill>
+                <a:latin typeface="Georgia" pitchFamily="34" charset="0"/>
+                <a:ea typeface="Georgia" pitchFamily="34" charset="-122"/>
+                <a:cs typeface="Georgia" pitchFamily="34" charset="-120"/>
               </a:rPr>
               <a:t>04</a:t>
             </a:r>
@@ -2830,7 +2771,7 @@
       </p:sp>
       <p:sp>
         <p:nvSpPr>
-          <p:cNvPr id="9" name="Shape 7"/>
+          <p:cNvPr id="7" name="Shape 4"/>
           <p:cNvSpPr/>
           <p:nvPr/>
         </p:nvSpPr>
@@ -2845,7 +2786,7 @@
           <a:noFill/>
           <a:ln w="31750">
             <a:solidFill>
-              <a:srgbClr val="C9A961"/>
+              <a:srgbClr val="B1937E"/>
             </a:solidFill>
             <a:prstDash val="solid"/>
           </a:ln>
@@ -2865,7 +2806,7 @@
     <p:bg>
       <p:bgPr>
         <a:solidFill>
-          <a:srgbClr val="102844"/>
+          <a:srgbClr val="EFE7DE"/>
         </a:solidFill>
       </p:bgPr>
     </p:bg>
@@ -2910,7 +2851,7 @@
             <a:r>
               <a:rPr lang="en-US" sz="1200" b="1" spc="300" kern="0" dirty="0">
                 <a:solidFill>
-                  <a:srgbClr val="C9A961"/>
+                  <a:srgbClr val="B1937E"/>
                 </a:solidFill>
                 <a:latin typeface="Calibri" pitchFamily="34" charset="0"/>
                 <a:ea typeface="Calibri" pitchFamily="34" charset="-122"/>
@@ -2952,11 +2893,11 @@
             <a:r>
               <a:rPr lang="en-US" sz="3400" b="1" dirty="0">
                 <a:solidFill>
-                  <a:srgbClr val="EAF1FA"/>
-                </a:solidFill>
-                <a:latin typeface="Bookman Old Style" pitchFamily="34" charset="0"/>
-                <a:ea typeface="Bookman Old Style" pitchFamily="34" charset="-122"/>
-                <a:cs typeface="Bookman Old Style" pitchFamily="34" charset="-120"/>
+                  <a:srgbClr val="33302B"/>
+                </a:solidFill>
+                <a:latin typeface="Georgia" pitchFamily="34" charset="0"/>
+                <a:ea typeface="Georgia" pitchFamily="34" charset="-122"/>
+                <a:cs typeface="Georgia" pitchFamily="34" charset="-120"/>
               </a:rPr>
               <a:t>Entregável vs. emoção</a:t>
             </a:r>
@@ -2981,20 +2922,20 @@
             </a:avLst>
           </a:prstGeom>
           <a:solidFill>
-            <a:srgbClr val="13283F"/>
+            <a:srgbClr val="FFFFFF"/>
           </a:solidFill>
           <a:ln w="9525">
             <a:solidFill>
-              <a:srgbClr val="9FB2C9">
+              <a:srgbClr val="8A7E72">
                 <a:alpha val="50000"/>
               </a:srgbClr>
             </a:solidFill>
             <a:prstDash val="solid"/>
           </a:ln>
           <a:effectLst>
-            <a:outerShdw sx="100000" sy="100000" kx="0" ky="0" algn="bl" rotWithShape="0" blurRad="127000" dist="38100" dir="5400000">
-              <a:srgbClr val="000000">
-                <a:alpha val="28000"/>
+            <a:outerShdw sx="100000" sy="100000" kx="0" ky="0" algn="bl" rotWithShape="0" blurRad="114300" dist="38100" dir="5400000">
+              <a:srgbClr val="7A6A55">
+                <a:alpha val="12000"/>
               </a:srgbClr>
             </a:outerShdw>
           </a:effectLst>
@@ -3027,7 +2968,7 @@
             <a:r>
               <a:rPr lang="en-US" sz="1300" b="1" spc="300" kern="0" dirty="0">
                 <a:solidFill>
-                  <a:srgbClr val="9FB2C9"/>
+                  <a:srgbClr val="8A7E72"/>
                 </a:solidFill>
                 <a:latin typeface="Calibri" pitchFamily="34" charset="0"/>
                 <a:ea typeface="Calibri" pitchFamily="34" charset="-122"/>
@@ -3069,7 +3010,7 @@
             <a:r>
               <a:rPr lang="en-US" sz="1600" b="1" i="1" dirty="0">
                 <a:solidFill>
-                  <a:srgbClr val="9FB2C9"/>
+                  <a:srgbClr val="8A7E72"/>
                 </a:solidFill>
                 <a:latin typeface="Calibri" pitchFamily="34" charset="0"/>
                 <a:ea typeface="Calibri" pitchFamily="34" charset="-122"/>
@@ -3089,7 +3030,7 @@
             <a:r>
               <a:rPr lang="en-US" sz="1500" dirty="0">
                 <a:solidFill>
-                  <a:srgbClr val="9FB2C9"/>
+                  <a:srgbClr val="8A7E72"/>
                 </a:solidFill>
                 <a:latin typeface="Calibri" pitchFamily="34" charset="0"/>
                 <a:ea typeface="Calibri" pitchFamily="34" charset="-122"/>
@@ -3109,7 +3050,7 @@
             <a:r>
               <a:rPr lang="en-US" sz="1500" dirty="0">
                 <a:solidFill>
-                  <a:srgbClr val="9FB2C9"/>
+                  <a:srgbClr val="8A7E72"/>
                 </a:solidFill>
                 <a:latin typeface="Calibri" pitchFamily="34" charset="0"/>
                 <a:ea typeface="Calibri" pitchFamily="34" charset="-122"/>
@@ -3126,7 +3067,7 @@
             <a:r>
               <a:rPr lang="en-US" sz="1400" i="1" dirty="0">
                 <a:solidFill>
-                  <a:srgbClr val="9FB2C9"/>
+                  <a:srgbClr val="8A7E72"/>
                 </a:solidFill>
                 <a:latin typeface="Calibri" pitchFamily="34" charset="0"/>
                 <a:ea typeface="Calibri" pitchFamily="34" charset="-122"/>
@@ -3155,18 +3096,18 @@
             </a:avLst>
           </a:prstGeom>
           <a:solidFill>
-            <a:srgbClr val="16314F"/>
+            <a:srgbClr val="EADFD0"/>
           </a:solidFill>
           <a:ln w="19050">
             <a:solidFill>
-              <a:srgbClr val="C9A961"/>
+              <a:srgbClr val="B1937E"/>
             </a:solidFill>
             <a:prstDash val="solid"/>
           </a:ln>
           <a:effectLst>
-            <a:outerShdw sx="100000" sy="100000" kx="0" ky="0" algn="bl" rotWithShape="0" blurRad="127000" dist="38100" dir="5400000">
-              <a:srgbClr val="000000">
-                <a:alpha val="28000"/>
+            <a:outerShdw sx="100000" sy="100000" kx="0" ky="0" algn="bl" rotWithShape="0" blurRad="114300" dist="38100" dir="5400000">
+              <a:srgbClr val="7A6A55">
+                <a:alpha val="12000"/>
               </a:srgbClr>
             </a:outerShdw>
           </a:effectLst>
@@ -3199,7 +3140,7 @@
             <a:r>
               <a:rPr lang="en-US" sz="1300" b="1" spc="300" kern="0" dirty="0">
                 <a:solidFill>
-                  <a:srgbClr val="C9A961"/>
+                  <a:srgbClr val="B1937E"/>
                 </a:solidFill>
                 <a:latin typeface="Calibri" pitchFamily="34" charset="0"/>
                 <a:ea typeface="Calibri" pitchFamily="34" charset="-122"/>
@@ -3241,7 +3182,7 @@
             <a:r>
               <a:rPr lang="en-US" sz="1600" b="1" dirty="0">
                 <a:solidFill>
-                  <a:srgbClr val="EAF1FA"/>
+                  <a:srgbClr val="33302B"/>
                 </a:solidFill>
                 <a:latin typeface="Calibri" pitchFamily="34" charset="0"/>
                 <a:ea typeface="Calibri" pitchFamily="34" charset="-122"/>
@@ -3261,7 +3202,7 @@
             <a:r>
               <a:rPr lang="en-US" sz="1500" dirty="0">
                 <a:solidFill>
-                  <a:srgbClr val="EAF1FA"/>
+                  <a:srgbClr val="33302B"/>
                 </a:solidFill>
                 <a:latin typeface="Calibri" pitchFamily="34" charset="0"/>
                 <a:ea typeface="Calibri" pitchFamily="34" charset="-122"/>
@@ -3281,7 +3222,7 @@
             <a:r>
               <a:rPr lang="en-US" sz="1500" dirty="0">
                 <a:solidFill>
-                  <a:srgbClr val="EAF1FA"/>
+                  <a:srgbClr val="33302B"/>
                 </a:solidFill>
                 <a:latin typeface="Calibri" pitchFamily="34" charset="0"/>
                 <a:ea typeface="Calibri" pitchFamily="34" charset="-122"/>
@@ -3298,7 +3239,7 @@
             <a:r>
               <a:rPr lang="en-US" sz="1400" i="1" dirty="0">
                 <a:solidFill>
-                  <a:srgbClr val="C9A961"/>
+                  <a:srgbClr val="B1937E"/>
                 </a:solidFill>
                 <a:latin typeface="Calibri" pitchFamily="34" charset="0"/>
                 <a:ea typeface="Calibri" pitchFamily="34" charset="-122"/>
@@ -3327,7 +3268,7 @@
           <a:noFill/>
           <a:ln w="9525">
             <a:solidFill>
-              <a:srgbClr val="5C708A">
+              <a:srgbClr val="A89A86">
                 <a:alpha val="60000"/>
               </a:srgbClr>
             </a:solidFill>
@@ -3362,7 +3303,7 @@
             <a:r>
               <a:rPr lang="en-US" sz="900" dirty="0">
                 <a:solidFill>
-                  <a:srgbClr val="5C708A"/>
+                  <a:srgbClr val="A89A86"/>
                 </a:solidFill>
                 <a:latin typeface="Calibri" pitchFamily="34" charset="0"/>
                 <a:ea typeface="Calibri" pitchFamily="34" charset="-122"/>
@@ -3401,7 +3342,7 @@
             <a:r>
               <a:rPr lang="en-US" sz="900" dirty="0">
                 <a:solidFill>
-                  <a:srgbClr val="5C708A"/>
+                  <a:srgbClr val="A89A86"/>
                 </a:solidFill>
                 <a:latin typeface="Calibri" pitchFamily="34" charset="0"/>
                 <a:ea typeface="Calibri" pitchFamily="34" charset="-122"/>
@@ -3427,7 +3368,7 @@
     <p:bg>
       <p:bgPr>
         <a:solidFill>
-          <a:srgbClr val="0B1D33"/>
+          <a:srgbClr val="F8F6F3"/>
         </a:solidFill>
       </p:bgPr>
     </p:bg>
@@ -3472,7 +3413,7 @@
             <a:r>
               <a:rPr lang="en-US" sz="1200" b="1" spc="300" kern="0" dirty="0">
                 <a:solidFill>
-                  <a:srgbClr val="4A9EFF"/>
+                  <a:srgbClr val="9A7B66"/>
                 </a:solidFill>
                 <a:latin typeface="Calibri" pitchFamily="34" charset="0"/>
                 <a:ea typeface="Calibri" pitchFamily="34" charset="-122"/>
@@ -3514,11 +3455,11 @@
             <a:r>
               <a:rPr lang="en-US" sz="3200" b="1" dirty="0">
                 <a:solidFill>
-                  <a:srgbClr val="EAF1FA"/>
-                </a:solidFill>
-                <a:latin typeface="Bookman Old Style" pitchFamily="34" charset="0"/>
-                <a:ea typeface="Bookman Old Style" pitchFamily="34" charset="-122"/>
-                <a:cs typeface="Bookman Old Style" pitchFamily="34" charset="-120"/>
+                  <a:srgbClr val="33302B"/>
+                </a:solidFill>
+                <a:latin typeface="Georgia" pitchFamily="34" charset="0"/>
+                <a:ea typeface="Georgia" pitchFamily="34" charset="-122"/>
+                <a:cs typeface="Georgia" pitchFamily="34" charset="-120"/>
               </a:rPr>
               <a:t>De entregável a memória</a:t>
             </a:r>
@@ -3543,13 +3484,18 @@
             </a:avLst>
           </a:prstGeom>
           <a:solidFill>
-            <a:srgbClr val="13283F"/>
+            <a:srgbClr val="FFFFFF"/>
           </a:solidFill>
-          <a:ln/>
+          <a:ln w="12700">
+            <a:solidFill>
+              <a:srgbClr val="E3D9CC"/>
+            </a:solidFill>
+            <a:prstDash val="solid"/>
+          </a:ln>
           <a:effectLst>
-            <a:outerShdw sx="100000" sy="100000" kx="0" ky="0" algn="bl" rotWithShape="0" blurRad="127000" dist="38100" dir="5400000">
-              <a:srgbClr val="000000">
-                <a:alpha val="28000"/>
+            <a:outerShdw sx="100000" sy="100000" kx="0" ky="0" algn="bl" rotWithShape="0" blurRad="114300" dist="38100" dir="5400000">
+              <a:srgbClr val="7A6A55">
+                <a:alpha val="12000"/>
               </a:srgbClr>
             </a:outerShdw>
           </a:effectLst>
@@ -3570,9 +3516,14 @@
             <a:avLst/>
           </a:prstGeom>
           <a:solidFill>
-            <a:srgbClr val="16314F"/>
+            <a:srgbClr val="EADFD0"/>
           </a:solidFill>
-          <a:ln/>
+          <a:ln w="9525">
+            <a:solidFill>
+              <a:srgbClr val="E3D9CC"/>
+            </a:solidFill>
+            <a:prstDash val="solid"/>
+          </a:ln>
         </p:spPr>
       </p:sp>
       <p:pic>
@@ -3626,11 +3577,11 @@
             <a:r>
               <a:rPr lang="en-US" sz="1800" b="1" dirty="0">
                 <a:solidFill>
-                  <a:srgbClr val="C9A961"/>
-                </a:solidFill>
-                <a:latin typeface="Bookman Old Style" pitchFamily="34" charset="0"/>
-                <a:ea typeface="Bookman Old Style" pitchFamily="34" charset="-122"/>
-                <a:cs typeface="Bookman Old Style" pitchFamily="34" charset="-120"/>
+                  <a:srgbClr val="B1937E"/>
+                </a:solidFill>
+                <a:latin typeface="Georgia" pitchFamily="34" charset="0"/>
+                <a:ea typeface="Georgia" pitchFamily="34" charset="-122"/>
+                <a:cs typeface="Georgia" pitchFamily="34" charset="-120"/>
               </a:rPr>
               <a:t>Same day edit</a:t>
             </a:r>
@@ -3665,7 +3616,7 @@
             <a:r>
               <a:rPr lang="en-US" sz="1350" dirty="0">
                 <a:solidFill>
-                  <a:srgbClr val="9FB2C9"/>
+                  <a:srgbClr val="8A7E72"/>
                 </a:solidFill>
                 <a:latin typeface="Calibri" pitchFamily="34" charset="0"/>
                 <a:ea typeface="Calibri" pitchFamily="34" charset="-122"/>
@@ -3694,13 +3645,18 @@
             </a:avLst>
           </a:prstGeom>
           <a:solidFill>
-            <a:srgbClr val="13283F"/>
+            <a:srgbClr val="FFFFFF"/>
           </a:solidFill>
-          <a:ln/>
+          <a:ln w="12700">
+            <a:solidFill>
+              <a:srgbClr val="E3D9CC"/>
+            </a:solidFill>
+            <a:prstDash val="solid"/>
+          </a:ln>
           <a:effectLst>
-            <a:outerShdw sx="100000" sy="100000" kx="0" ky="0" algn="bl" rotWithShape="0" blurRad="127000" dist="38100" dir="5400000">
-              <a:srgbClr val="000000">
-                <a:alpha val="28000"/>
+            <a:outerShdw sx="100000" sy="100000" kx="0" ky="0" algn="bl" rotWithShape="0" blurRad="114300" dist="38100" dir="5400000">
+              <a:srgbClr val="7A6A55">
+                <a:alpha val="12000"/>
               </a:srgbClr>
             </a:outerShdw>
           </a:effectLst>
@@ -3721,9 +3677,14 @@
             <a:avLst/>
           </a:prstGeom>
           <a:solidFill>
-            <a:srgbClr val="16314F"/>
+            <a:srgbClr val="EADFD0"/>
           </a:solidFill>
-          <a:ln/>
+          <a:ln w="9525">
+            <a:solidFill>
+              <a:srgbClr val="E3D9CC"/>
+            </a:solidFill>
+            <a:prstDash val="solid"/>
+          </a:ln>
         </p:spPr>
       </p:sp>
       <p:pic>
@@ -3777,11 +3738,11 @@
             <a:r>
               <a:rPr lang="en-US" sz="1800" b="1" dirty="0">
                 <a:solidFill>
-                  <a:srgbClr val="C9A961"/>
-                </a:solidFill>
-                <a:latin typeface="Bookman Old Style" pitchFamily="34" charset="0"/>
-                <a:ea typeface="Bookman Old Style" pitchFamily="34" charset="-122"/>
-                <a:cs typeface="Bookman Old Style" pitchFamily="34" charset="-120"/>
+                  <a:srgbClr val="B1937E"/>
+                </a:solidFill>
+                <a:latin typeface="Georgia" pitchFamily="34" charset="0"/>
+                <a:ea typeface="Georgia" pitchFamily="34" charset="-122"/>
+                <a:cs typeface="Georgia" pitchFamily="34" charset="-120"/>
               </a:rPr>
               <a:t>Álbum</a:t>
             </a:r>
@@ -3816,7 +3777,7 @@
             <a:r>
               <a:rPr lang="en-US" sz="1350" dirty="0">
                 <a:solidFill>
-                  <a:srgbClr val="9FB2C9"/>
+                  <a:srgbClr val="8A7E72"/>
                 </a:solidFill>
                 <a:latin typeface="Calibri" pitchFamily="34" charset="0"/>
                 <a:ea typeface="Calibri" pitchFamily="34" charset="-122"/>
@@ -3845,13 +3806,18 @@
             </a:avLst>
           </a:prstGeom>
           <a:solidFill>
-            <a:srgbClr val="13283F"/>
+            <a:srgbClr val="FFFFFF"/>
           </a:solidFill>
-          <a:ln/>
+          <a:ln w="12700">
+            <a:solidFill>
+              <a:srgbClr val="E3D9CC"/>
+            </a:solidFill>
+            <a:prstDash val="solid"/>
+          </a:ln>
           <a:effectLst>
-            <a:outerShdw sx="100000" sy="100000" kx="0" ky="0" algn="bl" rotWithShape="0" blurRad="127000" dist="38100" dir="5400000">
-              <a:srgbClr val="000000">
-                <a:alpha val="28000"/>
+            <a:outerShdw sx="100000" sy="100000" kx="0" ky="0" algn="bl" rotWithShape="0" blurRad="114300" dist="38100" dir="5400000">
+              <a:srgbClr val="7A6A55">
+                <a:alpha val="12000"/>
               </a:srgbClr>
             </a:outerShdw>
           </a:effectLst>
@@ -3872,9 +3838,14 @@
             <a:avLst/>
           </a:prstGeom>
           <a:solidFill>
-            <a:srgbClr val="16314F"/>
+            <a:srgbClr val="EADFD0"/>
           </a:solidFill>
-          <a:ln/>
+          <a:ln w="9525">
+            <a:solidFill>
+              <a:srgbClr val="E3D9CC"/>
+            </a:solidFill>
+            <a:prstDash val="solid"/>
+          </a:ln>
         </p:spPr>
       </p:sp>
       <p:pic>
@@ -3928,11 +3899,11 @@
             <a:r>
               <a:rPr lang="en-US" sz="1800" b="1" dirty="0">
                 <a:solidFill>
-                  <a:srgbClr val="C9A961"/>
-                </a:solidFill>
-                <a:latin typeface="Bookman Old Style" pitchFamily="34" charset="0"/>
-                <a:ea typeface="Bookman Old Style" pitchFamily="34" charset="-122"/>
-                <a:cs typeface="Bookman Old Style" pitchFamily="34" charset="-120"/>
+                  <a:srgbClr val="B1937E"/>
+                </a:solidFill>
+                <a:latin typeface="Georgia" pitchFamily="34" charset="0"/>
+                <a:ea typeface="Georgia" pitchFamily="34" charset="-122"/>
+                <a:cs typeface="Georgia" pitchFamily="34" charset="-120"/>
               </a:rPr>
               <a:t>Cobertura completa</a:t>
             </a:r>
@@ -3967,7 +3938,7 @@
             <a:r>
               <a:rPr lang="en-US" sz="1350" dirty="0">
                 <a:solidFill>
-                  <a:srgbClr val="9FB2C9"/>
+                  <a:srgbClr val="8A7E72"/>
                 </a:solidFill>
                 <a:latin typeface="Calibri" pitchFamily="34" charset="0"/>
                 <a:ea typeface="Calibri" pitchFamily="34" charset="-122"/>
@@ -3996,13 +3967,18 @@
             </a:avLst>
           </a:prstGeom>
           <a:solidFill>
-            <a:srgbClr val="13283F"/>
+            <a:srgbClr val="FFFFFF"/>
           </a:solidFill>
-          <a:ln/>
+          <a:ln w="12700">
+            <a:solidFill>
+              <a:srgbClr val="E3D9CC"/>
+            </a:solidFill>
+            <a:prstDash val="solid"/>
+          </a:ln>
           <a:effectLst>
-            <a:outerShdw sx="100000" sy="100000" kx="0" ky="0" algn="bl" rotWithShape="0" blurRad="127000" dist="38100" dir="5400000">
-              <a:srgbClr val="000000">
-                <a:alpha val="28000"/>
+            <a:outerShdw sx="100000" sy="100000" kx="0" ky="0" algn="bl" rotWithShape="0" blurRad="114300" dist="38100" dir="5400000">
+              <a:srgbClr val="7A6A55">
+                <a:alpha val="12000"/>
               </a:srgbClr>
             </a:outerShdw>
           </a:effectLst>
@@ -4023,9 +3999,14 @@
             <a:avLst/>
           </a:prstGeom>
           <a:solidFill>
-            <a:srgbClr val="16314F"/>
+            <a:srgbClr val="EADFD0"/>
           </a:solidFill>
-          <a:ln/>
+          <a:ln w="9525">
+            <a:solidFill>
+              <a:srgbClr val="E3D9CC"/>
+            </a:solidFill>
+            <a:prstDash val="solid"/>
+          </a:ln>
         </p:spPr>
       </p:sp>
       <p:pic>
@@ -4079,11 +4060,11 @@
             <a:r>
               <a:rPr lang="en-US" sz="1800" b="1" dirty="0">
                 <a:solidFill>
-                  <a:srgbClr val="C9A961"/>
-                </a:solidFill>
-                <a:latin typeface="Bookman Old Style" pitchFamily="34" charset="0"/>
-                <a:ea typeface="Bookman Old Style" pitchFamily="34" charset="-122"/>
-                <a:cs typeface="Bookman Old Style" pitchFamily="34" charset="-120"/>
+                  <a:srgbClr val="B1937E"/>
+                </a:solidFill>
+                <a:latin typeface="Georgia" pitchFamily="34" charset="0"/>
+                <a:ea typeface="Georgia" pitchFamily="34" charset="-122"/>
+                <a:cs typeface="Georgia" pitchFamily="34" charset="-120"/>
               </a:rPr>
               <a:t>Relive Wedding</a:t>
             </a:r>
@@ -4118,7 +4099,7 @@
             <a:r>
               <a:rPr lang="en-US" sz="1350" dirty="0">
                 <a:solidFill>
-                  <a:srgbClr val="9FB2C9"/>
+                  <a:srgbClr val="8A7E72"/>
                 </a:solidFill>
                 <a:latin typeface="Calibri" pitchFamily="34" charset="0"/>
                 <a:ea typeface="Calibri" pitchFamily="34" charset="-122"/>
@@ -4147,7 +4128,7 @@
           <a:noFill/>
           <a:ln w="9525">
             <a:solidFill>
-              <a:srgbClr val="5C708A">
+              <a:srgbClr val="A89A86">
                 <a:alpha val="60000"/>
               </a:srgbClr>
             </a:solidFill>
@@ -4182,7 +4163,7 @@
             <a:r>
               <a:rPr lang="en-US" sz="900" dirty="0">
                 <a:solidFill>
-                  <a:srgbClr val="5C708A"/>
+                  <a:srgbClr val="A89A86"/>
                 </a:solidFill>
                 <a:latin typeface="Calibri" pitchFamily="34" charset="0"/>
                 <a:ea typeface="Calibri" pitchFamily="34" charset="-122"/>
@@ -4221,7 +4202,7 @@
             <a:r>
               <a:rPr lang="en-US" sz="900" dirty="0">
                 <a:solidFill>
-                  <a:srgbClr val="5C708A"/>
+                  <a:srgbClr val="A89A86"/>
                 </a:solidFill>
                 <a:latin typeface="Calibri" pitchFamily="34" charset="0"/>
                 <a:ea typeface="Calibri" pitchFamily="34" charset="-122"/>
@@ -4247,7 +4228,7 @@
     <p:bg>
       <p:bgPr>
         <a:solidFill>
-          <a:srgbClr val="0B1D33"/>
+          <a:srgbClr val="F8F6F3"/>
         </a:solidFill>
       </p:bgPr>
     </p:bg>
@@ -4267,51 +4248,7 @@
       </p:grpSpPr>
       <p:sp>
         <p:nvSpPr>
-          <p:cNvPr id="2" name="Shape 0"/>
-          <p:cNvSpPr/>
-          <p:nvPr/>
-        </p:nvSpPr>
-        <p:spPr>
-          <a:xfrm>
-            <a:off x="8229600" y="-1463040"/>
-            <a:ext cx="5486400" cy="5486400"/>
-          </a:xfrm>
-          <a:prstGeom prst="ellipse">
-            <a:avLst/>
-          </a:prstGeom>
-          <a:solidFill>
-            <a:srgbClr val="4A9EFF">
-              <a:alpha val="10000"/>
-            </a:srgbClr>
-          </a:solidFill>
-          <a:ln/>
-        </p:spPr>
-      </p:sp>
-      <p:sp>
-        <p:nvSpPr>
-          <p:cNvPr id="3" name="Shape 1"/>
-          <p:cNvSpPr/>
-          <p:nvPr/>
-        </p:nvSpPr>
-        <p:spPr>
-          <a:xfrm>
-            <a:off x="-1463040" y="4206240"/>
-            <a:ext cx="4572000" cy="4572000"/>
-          </a:xfrm>
-          <a:prstGeom prst="ellipse">
-            <a:avLst/>
-          </a:prstGeom>
-          <a:solidFill>
-            <a:srgbClr val="C9A961">
-              <a:alpha val="8000"/>
-            </a:srgbClr>
-          </a:solidFill>
-          <a:ln/>
-        </p:spPr>
-      </p:sp>
-      <p:sp>
-        <p:nvSpPr>
-          <p:cNvPr id="4" name="Text 2"/>
+          <p:cNvPr id="2" name="Text 0"/>
           <p:cNvSpPr/>
           <p:nvPr/>
         </p:nvSpPr>
@@ -4336,7 +4273,7 @@
             <a:r>
               <a:rPr lang="en-US" sz="1200" b="1" spc="300" kern="0" dirty="0">
                 <a:solidFill>
-                  <a:srgbClr val="4A9EFF"/>
+                  <a:srgbClr val="9A7B66"/>
                 </a:solidFill>
                 <a:latin typeface="Calibri" pitchFamily="34" charset="0"/>
                 <a:ea typeface="Calibri" pitchFamily="34" charset="-122"/>
@@ -4350,7 +4287,7 @@
       </p:sp>
       <p:sp>
         <p:nvSpPr>
-          <p:cNvPr id="5" name="Shape 3"/>
+          <p:cNvPr id="3" name="Shape 1"/>
           <p:cNvSpPr/>
           <p:nvPr/>
         </p:nvSpPr>
@@ -4363,14 +4300,19 @@
             <a:avLst/>
           </a:prstGeom>
           <a:solidFill>
-            <a:srgbClr val="16314F"/>
+            <a:srgbClr val="EADFD0"/>
           </a:solidFill>
-          <a:ln/>
+          <a:ln w="9525">
+            <a:solidFill>
+              <a:srgbClr val="E3D9CC"/>
+            </a:solidFill>
+            <a:prstDash val="solid"/>
+          </a:ln>
         </p:spPr>
       </p:sp>
       <p:pic>
         <p:nvPicPr>
-          <p:cNvPr id="6" name="Image 0" descr="preencoded.png">    </p:cNvPr>
+          <p:cNvPr id="4" name="Image 0" descr="preencoded.png">    </p:cNvPr>
           <p:cNvPicPr>
             <a:picLocks noChangeAspect="1"/>
           </p:cNvPicPr>
@@ -4394,7 +4336,7 @@
       </p:pic>
       <p:sp>
         <p:nvSpPr>
-          <p:cNvPr id="7" name="Text 4"/>
+          <p:cNvPr id="5" name="Text 2"/>
           <p:cNvSpPr/>
           <p:nvPr/>
         </p:nvSpPr>
@@ -4422,11 +4364,11 @@
             <a:r>
               <a:rPr lang="en-US" sz="3000" b="1" i="1" dirty="0">
                 <a:solidFill>
-                  <a:srgbClr val="EAF1FA"/>
-                </a:solidFill>
-                <a:latin typeface="Bookman Old Style" pitchFamily="34" charset="0"/>
-                <a:ea typeface="Bookman Old Style" pitchFamily="34" charset="-122"/>
-                <a:cs typeface="Bookman Old Style" pitchFamily="34" charset="-120"/>
+                  <a:srgbClr val="33302B"/>
+                </a:solidFill>
+                <a:latin typeface="Georgia" pitchFamily="34" charset="0"/>
+                <a:ea typeface="Georgia" pitchFamily="34" charset="-122"/>
+                <a:cs typeface="Georgia" pitchFamily="34" charset="-120"/>
               </a:rPr>
               <a:t>A proposta que parece feita à medida vence sempre a genérica.</a:t>
             </a:r>
@@ -4436,7 +4378,7 @@
       </p:sp>
       <p:sp>
         <p:nvSpPr>
-          <p:cNvPr id="8" name="Text 5"/>
+          <p:cNvPr id="6" name="Text 3"/>
           <p:cNvSpPr/>
           <p:nvPr/>
         </p:nvSpPr>
@@ -4461,7 +4403,7 @@
             <a:r>
               <a:rPr lang="en-US" sz="1600" dirty="0">
                 <a:solidFill>
-                  <a:srgbClr val="9FB2C9"/>
+                  <a:srgbClr val="8A7E72"/>
                 </a:solidFill>
                 <a:latin typeface="Calibri" pitchFamily="34" charset="0"/>
                 <a:ea typeface="Calibri" pitchFamily="34" charset="-122"/>
@@ -4475,7 +4417,7 @@
       </p:sp>
       <p:sp>
         <p:nvSpPr>
-          <p:cNvPr id="9" name="Shape 6"/>
+          <p:cNvPr id="7" name="Shape 4"/>
           <p:cNvSpPr/>
           <p:nvPr/>
         </p:nvSpPr>
@@ -4490,7 +4432,7 @@
           <a:noFill/>
           <a:ln w="9525">
             <a:solidFill>
-              <a:srgbClr val="5C708A">
+              <a:srgbClr val="A89A86">
                 <a:alpha val="60000"/>
               </a:srgbClr>
             </a:solidFill>
@@ -4500,7 +4442,7 @@
       </p:sp>
       <p:sp>
         <p:nvSpPr>
-          <p:cNvPr id="10" name="Text 7"/>
+          <p:cNvPr id="8" name="Text 5"/>
           <p:cNvSpPr/>
           <p:nvPr/>
         </p:nvSpPr>
@@ -4525,7 +4467,7 @@
             <a:r>
               <a:rPr lang="en-US" sz="900" dirty="0">
                 <a:solidFill>
-                  <a:srgbClr val="5C708A"/>
+                  <a:srgbClr val="A89A86"/>
                 </a:solidFill>
                 <a:latin typeface="Calibri" pitchFamily="34" charset="0"/>
                 <a:ea typeface="Calibri" pitchFamily="34" charset="-122"/>
@@ -4539,7 +4481,7 @@
       </p:sp>
       <p:sp>
         <p:nvSpPr>
-          <p:cNvPr id="11" name="Text 8"/>
+          <p:cNvPr id="9" name="Text 6"/>
           <p:cNvSpPr/>
           <p:nvPr/>
         </p:nvSpPr>
@@ -4564,7 +4506,7 @@
             <a:r>
               <a:rPr lang="en-US" sz="900" dirty="0">
                 <a:solidFill>
-                  <a:srgbClr val="5C708A"/>
+                  <a:srgbClr val="A89A86"/>
                 </a:solidFill>
                 <a:latin typeface="Calibri" pitchFamily="34" charset="0"/>
                 <a:ea typeface="Calibri" pitchFamily="34" charset="-122"/>
@@ -4590,7 +4532,7 @@
     <p:bg>
       <p:bgPr>
         <a:solidFill>
-          <a:srgbClr val="0B1D33"/>
+          <a:srgbClr val="F8F6F3"/>
         </a:solidFill>
       </p:bgPr>
     </p:bg>
@@ -4635,7 +4577,7 @@
             <a:r>
               <a:rPr lang="en-US" sz="1200" b="1" spc="300" kern="0" dirty="0">
                 <a:solidFill>
-                  <a:srgbClr val="4A9EFF"/>
+                  <a:srgbClr val="9A7B66"/>
                 </a:solidFill>
                 <a:latin typeface="Calibri" pitchFamily="34" charset="0"/>
                 <a:ea typeface="Calibri" pitchFamily="34" charset="-122"/>
@@ -4677,11 +4619,11 @@
             <a:r>
               <a:rPr lang="en-US" sz="3200" b="1" dirty="0">
                 <a:solidFill>
-                  <a:srgbClr val="EAF1FA"/>
-                </a:solidFill>
-                <a:latin typeface="Bookman Old Style" pitchFamily="34" charset="0"/>
-                <a:ea typeface="Bookman Old Style" pitchFamily="34" charset="-122"/>
-                <a:cs typeface="Bookman Old Style" pitchFamily="34" charset="-120"/>
+                  <a:srgbClr val="33302B"/>
+                </a:solidFill>
+                <a:latin typeface="Georgia" pitchFamily="34" charset="0"/>
+                <a:ea typeface="Georgia" pitchFamily="34" charset="-122"/>
+                <a:cs typeface="Georgia" pitchFamily="34" charset="-120"/>
               </a:rPr>
               <a:t>Apresentar ligado às dores</a:t>
             </a:r>
@@ -4706,13 +4648,18 @@
             </a:avLst>
           </a:prstGeom>
           <a:solidFill>
-            <a:srgbClr val="13283F"/>
+            <a:srgbClr val="FFFFFF"/>
           </a:solidFill>
-          <a:ln/>
+          <a:ln w="12700">
+            <a:solidFill>
+              <a:srgbClr val="E3D9CC"/>
+            </a:solidFill>
+            <a:prstDash val="solid"/>
+          </a:ln>
           <a:effectLst>
-            <a:outerShdw sx="100000" sy="100000" kx="0" ky="0" algn="bl" rotWithShape="0" blurRad="127000" dist="38100" dir="5400000">
-              <a:srgbClr val="000000">
-                <a:alpha val="28000"/>
+            <a:outerShdw sx="100000" sy="100000" kx="0" ky="0" algn="bl" rotWithShape="0" blurRad="114300" dist="38100" dir="5400000">
+              <a:srgbClr val="7A6A55">
+                <a:alpha val="12000"/>
               </a:srgbClr>
             </a:outerShdw>
           </a:effectLst>
@@ -4733,9 +4680,14 @@
             <a:avLst/>
           </a:prstGeom>
           <a:solidFill>
-            <a:srgbClr val="16314F"/>
+            <a:srgbClr val="EADFD0"/>
           </a:solidFill>
-          <a:ln/>
+          <a:ln w="9525">
+            <a:solidFill>
+              <a:srgbClr val="E3D9CC"/>
+            </a:solidFill>
+            <a:prstDash val="solid"/>
+          </a:ln>
         </p:spPr>
       </p:sp>
       <p:pic>
@@ -4789,11 +4741,11 @@
             <a:r>
               <a:rPr lang="en-US" sz="1900" b="1" dirty="0">
                 <a:solidFill>
-                  <a:srgbClr val="C9A961"/>
-                </a:solidFill>
-                <a:latin typeface="Bookman Old Style" pitchFamily="34" charset="0"/>
-                <a:ea typeface="Bookman Old Style" pitchFamily="34" charset="-122"/>
-                <a:cs typeface="Bookman Old Style" pitchFamily="34" charset="-120"/>
+                  <a:srgbClr val="B1937E"/>
+                </a:solidFill>
+                <a:latin typeface="Georgia" pitchFamily="34" charset="0"/>
+                <a:ea typeface="Georgia" pitchFamily="34" charset="-122"/>
+                <a:cs typeface="Georgia" pitchFamily="34" charset="-120"/>
               </a:rPr>
               <a:t>Só o relevante</a:t>
             </a:r>
@@ -4828,7 +4780,7 @@
             <a:r>
               <a:rPr lang="en-US" sz="1400" dirty="0">
                 <a:solidFill>
-                  <a:srgbClr val="9FB2C9"/>
+                  <a:srgbClr val="8A7E72"/>
                 </a:solidFill>
                 <a:latin typeface="Calibri" pitchFamily="34" charset="0"/>
                 <a:ea typeface="Calibri" pitchFamily="34" charset="-122"/>
@@ -4857,13 +4809,18 @@
             </a:avLst>
           </a:prstGeom>
           <a:solidFill>
-            <a:srgbClr val="13283F"/>
+            <a:srgbClr val="FFFFFF"/>
           </a:solidFill>
-          <a:ln/>
+          <a:ln w="12700">
+            <a:solidFill>
+              <a:srgbClr val="E3D9CC"/>
+            </a:solidFill>
+            <a:prstDash val="solid"/>
+          </a:ln>
           <a:effectLst>
-            <a:outerShdw sx="100000" sy="100000" kx="0" ky="0" algn="bl" rotWithShape="0" blurRad="127000" dist="38100" dir="5400000">
-              <a:srgbClr val="000000">
-                <a:alpha val="28000"/>
+            <a:outerShdw sx="100000" sy="100000" kx="0" ky="0" algn="bl" rotWithShape="0" blurRad="114300" dist="38100" dir="5400000">
+              <a:srgbClr val="7A6A55">
+                <a:alpha val="12000"/>
               </a:srgbClr>
             </a:outerShdw>
           </a:effectLst>
@@ -4884,9 +4841,14 @@
             <a:avLst/>
           </a:prstGeom>
           <a:solidFill>
-            <a:srgbClr val="16314F"/>
+            <a:srgbClr val="EADFD0"/>
           </a:solidFill>
-          <a:ln/>
+          <a:ln w="9525">
+            <a:solidFill>
+              <a:srgbClr val="E3D9CC"/>
+            </a:solidFill>
+            <a:prstDash val="solid"/>
+          </a:ln>
         </p:spPr>
       </p:sp>
       <p:pic>
@@ -4940,11 +4902,11 @@
             <a:r>
               <a:rPr lang="en-US" sz="1900" b="1" dirty="0">
                 <a:solidFill>
-                  <a:srgbClr val="C9A961"/>
-                </a:solidFill>
-                <a:latin typeface="Bookman Old Style" pitchFamily="34" charset="0"/>
-                <a:ea typeface="Bookman Old Style" pitchFamily="34" charset="-122"/>
-                <a:cs typeface="Bookman Old Style" pitchFamily="34" charset="-120"/>
+                  <a:srgbClr val="B1937E"/>
+                </a:solidFill>
+                <a:latin typeface="Georgia" pitchFamily="34" charset="0"/>
+                <a:ea typeface="Georgia" pitchFamily="34" charset="-122"/>
+                <a:cs typeface="Georgia" pitchFamily="34" charset="-120"/>
               </a:rPr>
               <a:t>Vender tranquilidade</a:t>
             </a:r>
@@ -4979,7 +4941,7 @@
             <a:r>
               <a:rPr lang="en-US" sz="1400" dirty="0">
                 <a:solidFill>
-                  <a:srgbClr val="9FB2C9"/>
+                  <a:srgbClr val="8A7E72"/>
                 </a:solidFill>
                 <a:latin typeface="Calibri" pitchFamily="34" charset="0"/>
                 <a:ea typeface="Calibri" pitchFamily="34" charset="-122"/>
@@ -5008,13 +4970,18 @@
             </a:avLst>
           </a:prstGeom>
           <a:solidFill>
-            <a:srgbClr val="13283F"/>
+            <a:srgbClr val="FFFFFF"/>
           </a:solidFill>
-          <a:ln/>
+          <a:ln w="12700">
+            <a:solidFill>
+              <a:srgbClr val="E3D9CC"/>
+            </a:solidFill>
+            <a:prstDash val="solid"/>
+          </a:ln>
           <a:effectLst>
-            <a:outerShdw sx="100000" sy="100000" kx="0" ky="0" algn="bl" rotWithShape="0" blurRad="127000" dist="38100" dir="5400000">
-              <a:srgbClr val="000000">
-                <a:alpha val="28000"/>
+            <a:outerShdw sx="100000" sy="100000" kx="0" ky="0" algn="bl" rotWithShape="0" blurRad="114300" dist="38100" dir="5400000">
+              <a:srgbClr val="7A6A55">
+                <a:alpha val="12000"/>
               </a:srgbClr>
             </a:outerShdw>
           </a:effectLst>
@@ -5035,9 +5002,14 @@
             <a:avLst/>
           </a:prstGeom>
           <a:solidFill>
-            <a:srgbClr val="16314F"/>
+            <a:srgbClr val="EADFD0"/>
           </a:solidFill>
-          <a:ln/>
+          <a:ln w="9525">
+            <a:solidFill>
+              <a:srgbClr val="E3D9CC"/>
+            </a:solidFill>
+            <a:prstDash val="solid"/>
+          </a:ln>
         </p:spPr>
       </p:sp>
       <p:pic>
@@ -5091,11 +5063,11 @@
             <a:r>
               <a:rPr lang="en-US" sz="1900" b="1" dirty="0">
                 <a:solidFill>
-                  <a:srgbClr val="C9A961"/>
-                </a:solidFill>
-                <a:latin typeface="Bookman Old Style" pitchFamily="34" charset="0"/>
-                <a:ea typeface="Bookman Old Style" pitchFamily="34" charset="-122"/>
-                <a:cs typeface="Bookman Old Style" pitchFamily="34" charset="-120"/>
+                  <a:srgbClr val="B1937E"/>
+                </a:solidFill>
+                <a:latin typeface="Georgia" pitchFamily="34" charset="0"/>
+                <a:ea typeface="Georgia" pitchFamily="34" charset="-122"/>
+                <a:cs typeface="Georgia" pitchFamily="34" charset="-120"/>
               </a:rPr>
               <a:t>À medida</a:t>
             </a:r>
@@ -5130,7 +5102,7 @@
             <a:r>
               <a:rPr lang="en-US" sz="1400" dirty="0">
                 <a:solidFill>
-                  <a:srgbClr val="9FB2C9"/>
+                  <a:srgbClr val="8A7E72"/>
                 </a:solidFill>
                 <a:latin typeface="Calibri" pitchFamily="34" charset="0"/>
                 <a:ea typeface="Calibri" pitchFamily="34" charset="-122"/>
@@ -5159,7 +5131,7 @@
           <a:noFill/>
           <a:ln w="9525">
             <a:solidFill>
-              <a:srgbClr val="5C708A">
+              <a:srgbClr val="A89A86">
                 <a:alpha val="60000"/>
               </a:srgbClr>
             </a:solidFill>
@@ -5194,7 +5166,7 @@
             <a:r>
               <a:rPr lang="en-US" sz="900" dirty="0">
                 <a:solidFill>
-                  <a:srgbClr val="5C708A"/>
+                  <a:srgbClr val="A89A86"/>
                 </a:solidFill>
                 <a:latin typeface="Calibri" pitchFamily="34" charset="0"/>
                 <a:ea typeface="Calibri" pitchFamily="34" charset="-122"/>
@@ -5233,7 +5205,7 @@
             <a:r>
               <a:rPr lang="en-US" sz="900" dirty="0">
                 <a:solidFill>
-                  <a:srgbClr val="5C708A"/>
+                  <a:srgbClr val="A89A86"/>
                 </a:solidFill>
                 <a:latin typeface="Calibri" pitchFamily="34" charset="0"/>
                 <a:ea typeface="Calibri" pitchFamily="34" charset="-122"/>
@@ -5259,7 +5231,7 @@
     <p:bg>
       <p:bgPr>
         <a:solidFill>
-          <a:srgbClr val="0B1D33"/>
+          <a:srgbClr val="F8F6F3"/>
         </a:solidFill>
       </p:bgPr>
     </p:bg>
@@ -5304,7 +5276,7 @@
             <a:r>
               <a:rPr lang="en-US" sz="1200" b="1" spc="300" kern="0" dirty="0">
                 <a:solidFill>
-                  <a:srgbClr val="4A9EFF"/>
+                  <a:srgbClr val="9A7B66"/>
                 </a:solidFill>
                 <a:latin typeface="Calibri" pitchFamily="34" charset="0"/>
                 <a:ea typeface="Calibri" pitchFamily="34" charset="-122"/>
@@ -5346,11 +5318,11 @@
             <a:r>
               <a:rPr lang="en-US" sz="3200" b="1" dirty="0">
                 <a:solidFill>
-                  <a:srgbClr val="EAF1FA"/>
-                </a:solidFill>
-                <a:latin typeface="Bookman Old Style" pitchFamily="34" charset="0"/>
-                <a:ea typeface="Bookman Old Style" pitchFamily="34" charset="-122"/>
-                <a:cs typeface="Bookman Old Style" pitchFamily="34" charset="-120"/>
+                  <a:srgbClr val="33302B"/>
+                </a:solidFill>
+                <a:latin typeface="Georgia" pitchFamily="34" charset="0"/>
+                <a:ea typeface="Georgia" pitchFamily="34" charset="-122"/>
+                <a:cs typeface="Georgia" pitchFamily="34" charset="-120"/>
               </a:rPr>
               <a:t>Fechar é remover atrito</a:t>
             </a:r>
@@ -5375,13 +5347,18 @@
             </a:avLst>
           </a:prstGeom>
           <a:solidFill>
-            <a:srgbClr val="13283F"/>
+            <a:srgbClr val="FFFFFF"/>
           </a:solidFill>
-          <a:ln/>
+          <a:ln w="12700">
+            <a:solidFill>
+              <a:srgbClr val="E3D9CC"/>
+            </a:solidFill>
+            <a:prstDash val="solid"/>
+          </a:ln>
           <a:effectLst>
-            <a:outerShdw sx="100000" sy="100000" kx="0" ky="0" algn="bl" rotWithShape="0" blurRad="127000" dist="38100" dir="5400000">
-              <a:srgbClr val="000000">
-                <a:alpha val="28000"/>
+            <a:outerShdw sx="100000" sy="100000" kx="0" ky="0" algn="bl" rotWithShape="0" blurRad="114300" dist="38100" dir="5400000">
+              <a:srgbClr val="7A6A55">
+                <a:alpha val="12000"/>
               </a:srgbClr>
             </a:outerShdw>
           </a:effectLst>
@@ -5402,9 +5379,14 @@
             <a:avLst/>
           </a:prstGeom>
           <a:solidFill>
-            <a:srgbClr val="16314F"/>
+            <a:srgbClr val="EADFD0"/>
           </a:solidFill>
-          <a:ln/>
+          <a:ln w="9525">
+            <a:solidFill>
+              <a:srgbClr val="E3D9CC"/>
+            </a:solidFill>
+            <a:prstDash val="solid"/>
+          </a:ln>
         </p:spPr>
       </p:sp>
       <p:pic>
@@ -5458,11 +5440,11 @@
             <a:r>
               <a:rPr lang="en-US" sz="1900" b="1" dirty="0">
                 <a:solidFill>
-                  <a:srgbClr val="C9A961"/>
-                </a:solidFill>
-                <a:latin typeface="Bookman Old Style" pitchFamily="34" charset="0"/>
-                <a:ea typeface="Bookman Old Style" pitchFamily="34" charset="-122"/>
-                <a:cs typeface="Bookman Old Style" pitchFamily="34" charset="-120"/>
+                  <a:srgbClr val="B1937E"/>
+                </a:solidFill>
+                <a:latin typeface="Georgia" pitchFamily="34" charset="0"/>
+                <a:ea typeface="Georgia" pitchFamily="34" charset="-122"/>
+                <a:cs typeface="Georgia" pitchFamily="34" charset="-120"/>
               </a:rPr>
               <a:t>Assume o próximo passo</a:t>
             </a:r>
@@ -5497,7 +5479,7 @@
             <a:r>
               <a:rPr lang="en-US" sz="1400" dirty="0">
                 <a:solidFill>
-                  <a:srgbClr val="9FB2C9"/>
+                  <a:srgbClr val="8A7E72"/>
                 </a:solidFill>
                 <a:latin typeface="Calibri" pitchFamily="34" charset="0"/>
                 <a:ea typeface="Calibri" pitchFamily="34" charset="-122"/>
@@ -5526,13 +5508,18 @@
             </a:avLst>
           </a:prstGeom>
           <a:solidFill>
-            <a:srgbClr val="13283F"/>
+            <a:srgbClr val="FFFFFF"/>
           </a:solidFill>
-          <a:ln/>
+          <a:ln w="12700">
+            <a:solidFill>
+              <a:srgbClr val="E3D9CC"/>
+            </a:solidFill>
+            <a:prstDash val="solid"/>
+          </a:ln>
           <a:effectLst>
-            <a:outerShdw sx="100000" sy="100000" kx="0" ky="0" algn="bl" rotWithShape="0" blurRad="127000" dist="38100" dir="5400000">
-              <a:srgbClr val="000000">
-                <a:alpha val="28000"/>
+            <a:outerShdw sx="100000" sy="100000" kx="0" ky="0" algn="bl" rotWithShape="0" blurRad="114300" dist="38100" dir="5400000">
+              <a:srgbClr val="7A6A55">
+                <a:alpha val="12000"/>
               </a:srgbClr>
             </a:outerShdw>
           </a:effectLst>
@@ -5553,9 +5540,14 @@
             <a:avLst/>
           </a:prstGeom>
           <a:solidFill>
-            <a:srgbClr val="16314F"/>
+            <a:srgbClr val="EADFD0"/>
           </a:solidFill>
-          <a:ln/>
+          <a:ln w="9525">
+            <a:solidFill>
+              <a:srgbClr val="E3D9CC"/>
+            </a:solidFill>
+            <a:prstDash val="solid"/>
+          </a:ln>
         </p:spPr>
       </p:sp>
       <p:pic>
@@ -5609,11 +5601,11 @@
             <a:r>
               <a:rPr lang="en-US" sz="1900" b="1" dirty="0">
                 <a:solidFill>
-                  <a:srgbClr val="C9A961"/>
-                </a:solidFill>
-                <a:latin typeface="Bookman Old Style" pitchFamily="34" charset="0"/>
-                <a:ea typeface="Bookman Old Style" pitchFamily="34" charset="-122"/>
-                <a:cs typeface="Bookman Old Style" pitchFamily="34" charset="-120"/>
+                  <a:srgbClr val="B1937E"/>
+                </a:solidFill>
+                <a:latin typeface="Georgia" pitchFamily="34" charset="0"/>
+                <a:ea typeface="Georgia" pitchFamily="34" charset="-122"/>
+                <a:cs typeface="Georgia" pitchFamily="34" charset="-120"/>
               </a:rPr>
               <a:t>Cria segurança</a:t>
             </a:r>
@@ -5648,7 +5640,7 @@
             <a:r>
               <a:rPr lang="en-US" sz="1400" dirty="0">
                 <a:solidFill>
-                  <a:srgbClr val="9FB2C9"/>
+                  <a:srgbClr val="8A7E72"/>
                 </a:solidFill>
                 <a:latin typeface="Calibri" pitchFamily="34" charset="0"/>
                 <a:ea typeface="Calibri" pitchFamily="34" charset="-122"/>
@@ -5677,13 +5669,18 @@
             </a:avLst>
           </a:prstGeom>
           <a:solidFill>
-            <a:srgbClr val="13283F"/>
+            <a:srgbClr val="FFFFFF"/>
           </a:solidFill>
-          <a:ln/>
+          <a:ln w="12700">
+            <a:solidFill>
+              <a:srgbClr val="E3D9CC"/>
+            </a:solidFill>
+            <a:prstDash val="solid"/>
+          </a:ln>
           <a:effectLst>
-            <a:outerShdw sx="100000" sy="100000" kx="0" ky="0" algn="bl" rotWithShape="0" blurRad="127000" dist="38100" dir="5400000">
-              <a:srgbClr val="000000">
-                <a:alpha val="28000"/>
+            <a:outerShdw sx="100000" sy="100000" kx="0" ky="0" algn="bl" rotWithShape="0" blurRad="114300" dist="38100" dir="5400000">
+              <a:srgbClr val="7A6A55">
+                <a:alpha val="12000"/>
               </a:srgbClr>
             </a:outerShdw>
           </a:effectLst>
@@ -5704,9 +5701,14 @@
             <a:avLst/>
           </a:prstGeom>
           <a:solidFill>
-            <a:srgbClr val="16314F"/>
+            <a:srgbClr val="EADFD0"/>
           </a:solidFill>
-          <a:ln/>
+          <a:ln w="9525">
+            <a:solidFill>
+              <a:srgbClr val="E3D9CC"/>
+            </a:solidFill>
+            <a:prstDash val="solid"/>
+          </a:ln>
         </p:spPr>
       </p:sp>
       <p:pic>
@@ -5760,11 +5762,11 @@
             <a:r>
               <a:rPr lang="en-US" sz="1900" b="1" dirty="0">
                 <a:solidFill>
-                  <a:srgbClr val="C9A961"/>
-                </a:solidFill>
-                <a:latin typeface="Bookman Old Style" pitchFamily="34" charset="0"/>
-                <a:ea typeface="Bookman Old Style" pitchFamily="34" charset="-122"/>
-                <a:cs typeface="Bookman Old Style" pitchFamily="34" charset="-120"/>
+                  <a:srgbClr val="B1937E"/>
+                </a:solidFill>
+                <a:latin typeface="Georgia" pitchFamily="34" charset="0"/>
+                <a:ea typeface="Georgia" pitchFamily="34" charset="-122"/>
+                <a:cs typeface="Georgia" pitchFamily="34" charset="-120"/>
               </a:rPr>
               <a:t>Dá um motivo para já</a:t>
             </a:r>
@@ -5799,7 +5801,7 @@
             <a:r>
               <a:rPr lang="en-US" sz="1400" dirty="0">
                 <a:solidFill>
-                  <a:srgbClr val="9FB2C9"/>
+                  <a:srgbClr val="8A7E72"/>
                 </a:solidFill>
                 <a:latin typeface="Calibri" pitchFamily="34" charset="0"/>
                 <a:ea typeface="Calibri" pitchFamily="34" charset="-122"/>
@@ -5828,7 +5830,7 @@
           <a:noFill/>
           <a:ln w="9525">
             <a:solidFill>
-              <a:srgbClr val="5C708A">
+              <a:srgbClr val="A89A86">
                 <a:alpha val="60000"/>
               </a:srgbClr>
             </a:solidFill>
@@ -5863,7 +5865,7 @@
             <a:r>
               <a:rPr lang="en-US" sz="900" dirty="0">
                 <a:solidFill>
-                  <a:srgbClr val="5C708A"/>
+                  <a:srgbClr val="A89A86"/>
                 </a:solidFill>
                 <a:latin typeface="Calibri" pitchFamily="34" charset="0"/>
                 <a:ea typeface="Calibri" pitchFamily="34" charset="-122"/>
@@ -5902,7 +5904,7 @@
             <a:r>
               <a:rPr lang="en-US" sz="900" dirty="0">
                 <a:solidFill>
-                  <a:srgbClr val="5C708A"/>
+                  <a:srgbClr val="A89A86"/>
                 </a:solidFill>
                 <a:latin typeface="Calibri" pitchFamily="34" charset="0"/>
                 <a:ea typeface="Calibri" pitchFamily="34" charset="-122"/>
@@ -5928,7 +5930,7 @@
     <p:bg>
       <p:bgPr>
         <a:solidFill>
-          <a:srgbClr val="102844"/>
+          <a:srgbClr val="EFE7DE"/>
         </a:solidFill>
       </p:bgPr>
     </p:bg>
@@ -5973,7 +5975,7 @@
             <a:r>
               <a:rPr lang="en-US" sz="1200" b="1" spc="300" kern="0" dirty="0">
                 <a:solidFill>
-                  <a:srgbClr val="C9A961"/>
+                  <a:srgbClr val="B1937E"/>
                 </a:solidFill>
                 <a:latin typeface="Calibri" pitchFamily="34" charset="0"/>
                 <a:ea typeface="Calibri" pitchFamily="34" charset="-122"/>
@@ -6015,11 +6017,11 @@
             <a:r>
               <a:rPr lang="en-US" sz="3400" b="1" dirty="0">
                 <a:solidFill>
-                  <a:srgbClr val="EAF1FA"/>
-                </a:solidFill>
-                <a:latin typeface="Bookman Old Style" pitchFamily="34" charset="0"/>
-                <a:ea typeface="Bookman Old Style" pitchFamily="34" charset="-122"/>
-                <a:cs typeface="Bookman Old Style" pitchFamily="34" charset="-120"/>
+                  <a:srgbClr val="33302B"/>
+                </a:solidFill>
+                <a:latin typeface="Georgia" pitchFamily="34" charset="0"/>
+                <a:ea typeface="Georgia" pitchFamily="34" charset="-122"/>
+                <a:cs typeface="Georgia" pitchFamily="34" charset="-120"/>
               </a:rPr>
               <a:t>Quando dizem 'vamos pensar'</a:t>
             </a:r>
@@ -6044,20 +6046,20 @@
             </a:avLst>
           </a:prstGeom>
           <a:solidFill>
-            <a:srgbClr val="13283F"/>
+            <a:srgbClr val="FFFFFF"/>
           </a:solidFill>
           <a:ln w="9525">
             <a:solidFill>
-              <a:srgbClr val="9FB2C9">
+              <a:srgbClr val="8A7E72">
                 <a:alpha val="50000"/>
               </a:srgbClr>
             </a:solidFill>
             <a:prstDash val="solid"/>
           </a:ln>
           <a:effectLst>
-            <a:outerShdw sx="100000" sy="100000" kx="0" ky="0" algn="bl" rotWithShape="0" blurRad="127000" dist="38100" dir="5400000">
-              <a:srgbClr val="000000">
-                <a:alpha val="28000"/>
+            <a:outerShdw sx="100000" sy="100000" kx="0" ky="0" algn="bl" rotWithShape="0" blurRad="114300" dist="38100" dir="5400000">
+              <a:srgbClr val="7A6A55">
+                <a:alpha val="12000"/>
               </a:srgbClr>
             </a:outerShdw>
           </a:effectLst>
@@ -6090,7 +6092,7 @@
             <a:r>
               <a:rPr lang="en-US" sz="1300" b="1" spc="300" kern="0" dirty="0">
                 <a:solidFill>
-                  <a:srgbClr val="9FB2C9"/>
+                  <a:srgbClr val="8A7E72"/>
                 </a:solidFill>
                 <a:latin typeface="Calibri" pitchFamily="34" charset="0"/>
                 <a:ea typeface="Calibri" pitchFamily="34" charset="-122"/>
@@ -6132,7 +6134,7 @@
             <a:r>
               <a:rPr lang="en-US" sz="1600" b="1" i="1" dirty="0">
                 <a:solidFill>
-                  <a:srgbClr val="9FB2C9"/>
+                  <a:srgbClr val="8A7E72"/>
                 </a:solidFill>
                 <a:latin typeface="Calibri" pitchFamily="34" charset="0"/>
                 <a:ea typeface="Calibri" pitchFamily="34" charset="-122"/>
@@ -6152,7 +6154,7 @@
             <a:r>
               <a:rPr lang="en-US" sz="1500" dirty="0">
                 <a:solidFill>
-                  <a:srgbClr val="9FB2C9"/>
+                  <a:srgbClr val="8A7E72"/>
                 </a:solidFill>
                 <a:latin typeface="Calibri" pitchFamily="34" charset="0"/>
                 <a:ea typeface="Calibri" pitchFamily="34" charset="-122"/>
@@ -6172,7 +6174,7 @@
             <a:r>
               <a:rPr lang="en-US" sz="1500" dirty="0">
                 <a:solidFill>
-                  <a:srgbClr val="9FB2C9"/>
+                  <a:srgbClr val="8A7E72"/>
                 </a:solidFill>
                 <a:latin typeface="Calibri" pitchFamily="34" charset="0"/>
                 <a:ea typeface="Calibri" pitchFamily="34" charset="-122"/>
@@ -6189,7 +6191,7 @@
             <a:r>
               <a:rPr lang="en-US" sz="1400" i="1" dirty="0">
                 <a:solidFill>
-                  <a:srgbClr val="9FB2C9"/>
+                  <a:srgbClr val="8A7E72"/>
                 </a:solidFill>
                 <a:latin typeface="Calibri" pitchFamily="34" charset="0"/>
                 <a:ea typeface="Calibri" pitchFamily="34" charset="-122"/>
@@ -6218,18 +6220,18 @@
             </a:avLst>
           </a:prstGeom>
           <a:solidFill>
-            <a:srgbClr val="16314F"/>
+            <a:srgbClr val="EADFD0"/>
           </a:solidFill>
           <a:ln w="19050">
             <a:solidFill>
-              <a:srgbClr val="C9A961"/>
+              <a:srgbClr val="B1937E"/>
             </a:solidFill>
             <a:prstDash val="solid"/>
           </a:ln>
           <a:effectLst>
-            <a:outerShdw sx="100000" sy="100000" kx="0" ky="0" algn="bl" rotWithShape="0" blurRad="127000" dist="38100" dir="5400000">
-              <a:srgbClr val="000000">
-                <a:alpha val="28000"/>
+            <a:outerShdw sx="100000" sy="100000" kx="0" ky="0" algn="bl" rotWithShape="0" blurRad="114300" dist="38100" dir="5400000">
+              <a:srgbClr val="7A6A55">
+                <a:alpha val="12000"/>
               </a:srgbClr>
             </a:outerShdw>
           </a:effectLst>
@@ -6262,7 +6264,7 @@
             <a:r>
               <a:rPr lang="en-US" sz="1300" b="1" spc="300" kern="0" dirty="0">
                 <a:solidFill>
-                  <a:srgbClr val="C9A961"/>
+                  <a:srgbClr val="B1937E"/>
                 </a:solidFill>
                 <a:latin typeface="Calibri" pitchFamily="34" charset="0"/>
                 <a:ea typeface="Calibri" pitchFamily="34" charset="-122"/>
@@ -6304,7 +6306,7 @@
             <a:r>
               <a:rPr lang="en-US" sz="1600" b="1" dirty="0">
                 <a:solidFill>
-                  <a:srgbClr val="EAF1FA"/>
+                  <a:srgbClr val="33302B"/>
                 </a:solidFill>
                 <a:latin typeface="Calibri" pitchFamily="34" charset="0"/>
                 <a:ea typeface="Calibri" pitchFamily="34" charset="-122"/>
@@ -6324,7 +6326,7 @@
             <a:r>
               <a:rPr lang="en-US" sz="1500" dirty="0">
                 <a:solidFill>
-                  <a:srgbClr val="EAF1FA"/>
+                  <a:srgbClr val="33302B"/>
                 </a:solidFill>
                 <a:latin typeface="Calibri" pitchFamily="34" charset="0"/>
                 <a:ea typeface="Calibri" pitchFamily="34" charset="-122"/>
@@ -6344,7 +6346,7 @@
             <a:r>
               <a:rPr lang="en-US" sz="1500" dirty="0">
                 <a:solidFill>
-                  <a:srgbClr val="EAF1FA"/>
+                  <a:srgbClr val="33302B"/>
                 </a:solidFill>
                 <a:latin typeface="Calibri" pitchFamily="34" charset="0"/>
                 <a:ea typeface="Calibri" pitchFamily="34" charset="-122"/>
@@ -6361,7 +6363,7 @@
             <a:r>
               <a:rPr lang="en-US" sz="1400" i="1" dirty="0">
                 <a:solidFill>
-                  <a:srgbClr val="C9A961"/>
+                  <a:srgbClr val="B1937E"/>
                 </a:solidFill>
                 <a:latin typeface="Calibri" pitchFamily="34" charset="0"/>
                 <a:ea typeface="Calibri" pitchFamily="34" charset="-122"/>
@@ -6390,7 +6392,7 @@
           <a:noFill/>
           <a:ln w="9525">
             <a:solidFill>
-              <a:srgbClr val="5C708A">
+              <a:srgbClr val="A89A86">
                 <a:alpha val="60000"/>
               </a:srgbClr>
             </a:solidFill>
@@ -6425,7 +6427,7 @@
             <a:r>
               <a:rPr lang="en-US" sz="900" dirty="0">
                 <a:solidFill>
-                  <a:srgbClr val="5C708A"/>
+                  <a:srgbClr val="A89A86"/>
                 </a:solidFill>
                 <a:latin typeface="Calibri" pitchFamily="34" charset="0"/>
                 <a:ea typeface="Calibri" pitchFamily="34" charset="-122"/>
@@ -6464,7 +6466,7 @@
             <a:r>
               <a:rPr lang="en-US" sz="900" dirty="0">
                 <a:solidFill>
-                  <a:srgbClr val="5C708A"/>
+                  <a:srgbClr val="A89A86"/>
                 </a:solidFill>
                 <a:latin typeface="Calibri" pitchFamily="34" charset="0"/>
                 <a:ea typeface="Calibri" pitchFamily="34" charset="-122"/>
@@ -6490,7 +6492,7 @@
     <p:bg>
       <p:bgPr>
         <a:solidFill>
-          <a:srgbClr val="0B1D33"/>
+          <a:srgbClr val="F8F6F3"/>
         </a:solidFill>
       </p:bgPr>
     </p:bg>
@@ -6535,7 +6537,7 @@
             <a:r>
               <a:rPr lang="en-US" sz="1200" b="1" spc="300" kern="0" dirty="0">
                 <a:solidFill>
-                  <a:srgbClr val="4A9EFF"/>
+                  <a:srgbClr val="9A7B66"/>
                 </a:solidFill>
                 <a:latin typeface="Calibri" pitchFamily="34" charset="0"/>
                 <a:ea typeface="Calibri" pitchFamily="34" charset="-122"/>
@@ -6577,11 +6579,11 @@
             <a:r>
               <a:rPr lang="en-US" sz="3200" b="1" dirty="0">
                 <a:solidFill>
-                  <a:srgbClr val="EAF1FA"/>
-                </a:solidFill>
-                <a:latin typeface="Bookman Old Style" pitchFamily="34" charset="0"/>
-                <a:ea typeface="Bookman Old Style" pitchFamily="34" charset="-122"/>
-                <a:cs typeface="Bookman Old Style" pitchFamily="34" charset="-120"/>
+                  <a:srgbClr val="33302B"/>
+                </a:solidFill>
+                <a:latin typeface="Georgia" pitchFamily="34" charset="0"/>
+                <a:ea typeface="Georgia" pitchFamily="34" charset="-122"/>
+                <a:cs typeface="Georgia" pitchFamily="34" charset="-120"/>
               </a:rPr>
               <a:t>Erros comuns na reunião</a:t>
             </a:r>
@@ -6606,13 +6608,18 @@
             </a:avLst>
           </a:prstGeom>
           <a:solidFill>
-            <a:srgbClr val="13283F"/>
+            <a:srgbClr val="FFFFFF"/>
           </a:solidFill>
-          <a:ln/>
+          <a:ln w="12700">
+            <a:solidFill>
+              <a:srgbClr val="E3D9CC"/>
+            </a:solidFill>
+            <a:prstDash val="solid"/>
+          </a:ln>
           <a:effectLst>
-            <a:outerShdw sx="100000" sy="100000" kx="0" ky="0" algn="bl" rotWithShape="0" blurRad="127000" dist="38100" dir="5400000">
-              <a:srgbClr val="000000">
-                <a:alpha val="28000"/>
+            <a:outerShdw sx="100000" sy="100000" kx="0" ky="0" algn="bl" rotWithShape="0" blurRad="114300" dist="38100" dir="5400000">
+              <a:srgbClr val="7A6A55">
+                <a:alpha val="12000"/>
               </a:srgbClr>
             </a:outerShdw>
           </a:effectLst>
@@ -6633,9 +6640,14 @@
             <a:avLst/>
           </a:prstGeom>
           <a:solidFill>
-            <a:srgbClr val="16314F"/>
+            <a:srgbClr val="EADFD0"/>
           </a:solidFill>
-          <a:ln/>
+          <a:ln w="9525">
+            <a:solidFill>
+              <a:srgbClr val="E3D9CC"/>
+            </a:solidFill>
+            <a:prstDash val="solid"/>
+          </a:ln>
         </p:spPr>
       </p:sp>
       <p:pic>
@@ -6689,11 +6701,11 @@
             <a:r>
               <a:rPr lang="en-US" sz="1800" b="1" dirty="0">
                 <a:solidFill>
-                  <a:srgbClr val="C9A961"/>
-                </a:solidFill>
-                <a:latin typeface="Bookman Old Style" pitchFamily="34" charset="0"/>
-                <a:ea typeface="Bookman Old Style" pitchFamily="34" charset="-122"/>
-                <a:cs typeface="Bookman Old Style" pitchFamily="34" charset="-120"/>
+                  <a:srgbClr val="B1937E"/>
+                </a:solidFill>
+                <a:latin typeface="Georgia" pitchFamily="34" charset="0"/>
+                <a:ea typeface="Georgia" pitchFamily="34" charset="-122"/>
+                <a:cs typeface="Georgia" pitchFamily="34" charset="-120"/>
               </a:rPr>
               <a:t>Falar mais que ouvir</a:t>
             </a:r>
@@ -6728,7 +6740,7 @@
             <a:r>
               <a:rPr lang="en-US" sz="1350" dirty="0">
                 <a:solidFill>
-                  <a:srgbClr val="9FB2C9"/>
+                  <a:srgbClr val="8A7E72"/>
                 </a:solidFill>
                 <a:latin typeface="Calibri" pitchFamily="34" charset="0"/>
                 <a:ea typeface="Calibri" pitchFamily="34" charset="-122"/>
@@ -6757,13 +6769,18 @@
             </a:avLst>
           </a:prstGeom>
           <a:solidFill>
-            <a:srgbClr val="13283F"/>
+            <a:srgbClr val="FFFFFF"/>
           </a:solidFill>
-          <a:ln/>
+          <a:ln w="12700">
+            <a:solidFill>
+              <a:srgbClr val="E3D9CC"/>
+            </a:solidFill>
+            <a:prstDash val="solid"/>
+          </a:ln>
           <a:effectLst>
-            <a:outerShdw sx="100000" sy="100000" kx="0" ky="0" algn="bl" rotWithShape="0" blurRad="127000" dist="38100" dir="5400000">
-              <a:srgbClr val="000000">
-                <a:alpha val="28000"/>
+            <a:outerShdw sx="100000" sy="100000" kx="0" ky="0" algn="bl" rotWithShape="0" blurRad="114300" dist="38100" dir="5400000">
+              <a:srgbClr val="7A6A55">
+                <a:alpha val="12000"/>
               </a:srgbClr>
             </a:outerShdw>
           </a:effectLst>
@@ -6784,9 +6801,14 @@
             <a:avLst/>
           </a:prstGeom>
           <a:solidFill>
-            <a:srgbClr val="16314F"/>
+            <a:srgbClr val="EADFD0"/>
           </a:solidFill>
-          <a:ln/>
+          <a:ln w="9525">
+            <a:solidFill>
+              <a:srgbClr val="E3D9CC"/>
+            </a:solidFill>
+            <a:prstDash val="solid"/>
+          </a:ln>
         </p:spPr>
       </p:sp>
       <p:pic>
@@ -6840,11 +6862,11 @@
             <a:r>
               <a:rPr lang="en-US" sz="1800" b="1" dirty="0">
                 <a:solidFill>
-                  <a:srgbClr val="C9A961"/>
-                </a:solidFill>
-                <a:latin typeface="Bookman Old Style" pitchFamily="34" charset="0"/>
-                <a:ea typeface="Bookman Old Style" pitchFamily="34" charset="-122"/>
-                <a:cs typeface="Bookman Old Style" pitchFamily="34" charset="-120"/>
+                  <a:srgbClr val="B1937E"/>
+                </a:solidFill>
+                <a:latin typeface="Georgia" pitchFamily="34" charset="0"/>
+                <a:ea typeface="Georgia" pitchFamily="34" charset="-122"/>
+                <a:cs typeface="Georgia" pitchFamily="34" charset="-120"/>
               </a:rPr>
               <a:t>Listar serviços</a:t>
             </a:r>
@@ -6879,7 +6901,7 @@
             <a:r>
               <a:rPr lang="en-US" sz="1350" dirty="0">
                 <a:solidFill>
-                  <a:srgbClr val="9FB2C9"/>
+                  <a:srgbClr val="8A7E72"/>
                 </a:solidFill>
                 <a:latin typeface="Calibri" pitchFamily="34" charset="0"/>
                 <a:ea typeface="Calibri" pitchFamily="34" charset="-122"/>
@@ -6908,13 +6930,18 @@
             </a:avLst>
           </a:prstGeom>
           <a:solidFill>
-            <a:srgbClr val="13283F"/>
+            <a:srgbClr val="FFFFFF"/>
           </a:solidFill>
-          <a:ln/>
+          <a:ln w="12700">
+            <a:solidFill>
+              <a:srgbClr val="E3D9CC"/>
+            </a:solidFill>
+            <a:prstDash val="solid"/>
+          </a:ln>
           <a:effectLst>
-            <a:outerShdw sx="100000" sy="100000" kx="0" ky="0" algn="bl" rotWithShape="0" blurRad="127000" dist="38100" dir="5400000">
-              <a:srgbClr val="000000">
-                <a:alpha val="28000"/>
+            <a:outerShdw sx="100000" sy="100000" kx="0" ky="0" algn="bl" rotWithShape="0" blurRad="114300" dist="38100" dir="5400000">
+              <a:srgbClr val="7A6A55">
+                <a:alpha val="12000"/>
               </a:srgbClr>
             </a:outerShdw>
           </a:effectLst>
@@ -6935,9 +6962,14 @@
             <a:avLst/>
           </a:prstGeom>
           <a:solidFill>
-            <a:srgbClr val="16314F"/>
+            <a:srgbClr val="EADFD0"/>
           </a:solidFill>
-          <a:ln/>
+          <a:ln w="9525">
+            <a:solidFill>
+              <a:srgbClr val="E3D9CC"/>
+            </a:solidFill>
+            <a:prstDash val="solid"/>
+          </a:ln>
         </p:spPr>
       </p:sp>
       <p:pic>
@@ -6991,11 +7023,11 @@
             <a:r>
               <a:rPr lang="en-US" sz="1800" b="1" dirty="0">
                 <a:solidFill>
-                  <a:srgbClr val="C9A961"/>
-                </a:solidFill>
-                <a:latin typeface="Bookman Old Style" pitchFamily="34" charset="0"/>
-                <a:ea typeface="Bookman Old Style" pitchFamily="34" charset="-122"/>
-                <a:cs typeface="Bookman Old Style" pitchFamily="34" charset="-120"/>
+                  <a:srgbClr val="B1937E"/>
+                </a:solidFill>
+                <a:latin typeface="Georgia" pitchFamily="34" charset="0"/>
+                <a:ea typeface="Georgia" pitchFamily="34" charset="-122"/>
+                <a:cs typeface="Georgia" pitchFamily="34" charset="-120"/>
               </a:rPr>
               <a:t>Proposta igual para todos</a:t>
             </a:r>
@@ -7030,7 +7062,7 @@
             <a:r>
               <a:rPr lang="en-US" sz="1350" dirty="0">
                 <a:solidFill>
-                  <a:srgbClr val="9FB2C9"/>
+                  <a:srgbClr val="8A7E72"/>
                 </a:solidFill>
                 <a:latin typeface="Calibri" pitchFamily="34" charset="0"/>
                 <a:ea typeface="Calibri" pitchFamily="34" charset="-122"/>
@@ -7059,13 +7091,18 @@
             </a:avLst>
           </a:prstGeom>
           <a:solidFill>
-            <a:srgbClr val="13283F"/>
+            <a:srgbClr val="FFFFFF"/>
           </a:solidFill>
-          <a:ln/>
+          <a:ln w="12700">
+            <a:solidFill>
+              <a:srgbClr val="E3D9CC"/>
+            </a:solidFill>
+            <a:prstDash val="solid"/>
+          </a:ln>
           <a:effectLst>
-            <a:outerShdw sx="100000" sy="100000" kx="0" ky="0" algn="bl" rotWithShape="0" blurRad="127000" dist="38100" dir="5400000">
-              <a:srgbClr val="000000">
-                <a:alpha val="28000"/>
+            <a:outerShdw sx="100000" sy="100000" kx="0" ky="0" algn="bl" rotWithShape="0" blurRad="114300" dist="38100" dir="5400000">
+              <a:srgbClr val="7A6A55">
+                <a:alpha val="12000"/>
               </a:srgbClr>
             </a:outerShdw>
           </a:effectLst>
@@ -7086,9 +7123,14 @@
             <a:avLst/>
           </a:prstGeom>
           <a:solidFill>
-            <a:srgbClr val="16314F"/>
+            <a:srgbClr val="EADFD0"/>
           </a:solidFill>
-          <a:ln/>
+          <a:ln w="9525">
+            <a:solidFill>
+              <a:srgbClr val="E3D9CC"/>
+            </a:solidFill>
+            <a:prstDash val="solid"/>
+          </a:ln>
         </p:spPr>
       </p:sp>
       <p:pic>
@@ -7142,11 +7184,11 @@
             <a:r>
               <a:rPr lang="en-US" sz="1800" b="1" dirty="0">
                 <a:solidFill>
-                  <a:srgbClr val="C9A961"/>
-                </a:solidFill>
-                <a:latin typeface="Bookman Old Style" pitchFamily="34" charset="0"/>
-                <a:ea typeface="Bookman Old Style" pitchFamily="34" charset="-122"/>
-                <a:cs typeface="Bookman Old Style" pitchFamily="34" charset="-120"/>
+                  <a:srgbClr val="B1937E"/>
+                </a:solidFill>
+                <a:latin typeface="Georgia" pitchFamily="34" charset="0"/>
+                <a:ea typeface="Georgia" pitchFamily="34" charset="-122"/>
+                <a:cs typeface="Georgia" pitchFamily="34" charset="-120"/>
               </a:rPr>
               <a:t>Não pedir a decisão</a:t>
             </a:r>
@@ -7181,7 +7223,7 @@
             <a:r>
               <a:rPr lang="en-US" sz="1350" dirty="0">
                 <a:solidFill>
-                  <a:srgbClr val="9FB2C9"/>
+                  <a:srgbClr val="8A7E72"/>
                 </a:solidFill>
                 <a:latin typeface="Calibri" pitchFamily="34" charset="0"/>
                 <a:ea typeface="Calibri" pitchFamily="34" charset="-122"/>
@@ -7210,7 +7252,7 @@
           <a:noFill/>
           <a:ln w="9525">
             <a:solidFill>
-              <a:srgbClr val="5C708A">
+              <a:srgbClr val="A89A86">
                 <a:alpha val="60000"/>
               </a:srgbClr>
             </a:solidFill>
@@ -7245,7 +7287,7 @@
             <a:r>
               <a:rPr lang="en-US" sz="900" dirty="0">
                 <a:solidFill>
-                  <a:srgbClr val="5C708A"/>
+                  <a:srgbClr val="A89A86"/>
                 </a:solidFill>
                 <a:latin typeface="Calibri" pitchFamily="34" charset="0"/>
                 <a:ea typeface="Calibri" pitchFamily="34" charset="-122"/>
@@ -7284,7 +7326,7 @@
             <a:r>
               <a:rPr lang="en-US" sz="900" dirty="0">
                 <a:solidFill>
-                  <a:srgbClr val="5C708A"/>
+                  <a:srgbClr val="A89A86"/>
                 </a:solidFill>
                 <a:latin typeface="Calibri" pitchFamily="34" charset="0"/>
                 <a:ea typeface="Calibri" pitchFamily="34" charset="-122"/>
@@ -7310,7 +7352,7 @@
     <p:bg>
       <p:bgPr>
         <a:solidFill>
-          <a:srgbClr val="0B1D33"/>
+          <a:srgbClr val="F8F6F3"/>
         </a:solidFill>
       </p:bgPr>
     </p:bg>
@@ -7330,51 +7372,7 @@
       </p:grpSpPr>
       <p:sp>
         <p:nvSpPr>
-          <p:cNvPr id="2" name="Shape 0"/>
-          <p:cNvSpPr/>
-          <p:nvPr/>
-        </p:nvSpPr>
-        <p:spPr>
-          <a:xfrm>
-            <a:off x="7772400" y="-1371600"/>
-            <a:ext cx="5486400" cy="5486400"/>
-          </a:xfrm>
-          <a:prstGeom prst="ellipse">
-            <a:avLst/>
-          </a:prstGeom>
-          <a:solidFill>
-            <a:srgbClr val="4A9EFF">
-              <a:alpha val="10000"/>
-            </a:srgbClr>
-          </a:solidFill>
-          <a:ln/>
-        </p:spPr>
-      </p:sp>
-      <p:sp>
-        <p:nvSpPr>
-          <p:cNvPr id="3" name="Shape 1"/>
-          <p:cNvSpPr/>
-          <p:nvPr/>
-        </p:nvSpPr>
-        <p:spPr>
-          <a:xfrm>
-            <a:off x="-1371600" y="4114800"/>
-            <a:ext cx="4572000" cy="4572000"/>
-          </a:xfrm>
-          <a:prstGeom prst="ellipse">
-            <a:avLst/>
-          </a:prstGeom>
-          <a:solidFill>
-            <a:srgbClr val="C9A961">
-              <a:alpha val="8000"/>
-            </a:srgbClr>
-          </a:solidFill>
-          <a:ln/>
-        </p:spPr>
-      </p:sp>
-      <p:sp>
-        <p:nvSpPr>
-          <p:cNvPr id="4" name="Text 2"/>
+          <p:cNvPr id="2" name="Text 0"/>
           <p:cNvSpPr/>
           <p:nvPr/>
         </p:nvSpPr>
@@ -7399,11 +7397,11 @@
             <a:r>
               <a:rPr lang="en-US" sz="15000" b="1" dirty="0">
                 <a:solidFill>
-                  <a:srgbClr val="16314F"/>
-                </a:solidFill>
-                <a:latin typeface="Bookman Old Style" pitchFamily="34" charset="0"/>
-                <a:ea typeface="Bookman Old Style" pitchFamily="34" charset="-122"/>
-                <a:cs typeface="Bookman Old Style" pitchFamily="34" charset="-120"/>
+                  <a:srgbClr val="EADFD0"/>
+                </a:solidFill>
+                <a:latin typeface="Georgia" pitchFamily="34" charset="0"/>
+                <a:ea typeface="Georgia" pitchFamily="34" charset="-122"/>
+                <a:cs typeface="Georgia" pitchFamily="34" charset="-120"/>
               </a:rPr>
               <a:t>C</a:t>
             </a:r>
@@ -7413,7 +7411,7 @@
       </p:sp>
       <p:sp>
         <p:nvSpPr>
-          <p:cNvPr id="5" name="Text 3"/>
+          <p:cNvPr id="3" name="Text 1"/>
           <p:cNvSpPr/>
           <p:nvPr/>
         </p:nvSpPr>
@@ -7438,7 +7436,7 @@
             <a:r>
               <a:rPr lang="en-US" sz="1300" b="1" spc="400" kern="0" dirty="0">
                 <a:solidFill>
-                  <a:srgbClr val="C9A961"/>
+                  <a:srgbClr val="B1937E"/>
                 </a:solidFill>
                 <a:latin typeface="Calibri" pitchFamily="34" charset="0"/>
                 <a:ea typeface="Calibri" pitchFamily="34" charset="-122"/>
@@ -7452,7 +7450,7 @@
       </p:sp>
       <p:sp>
         <p:nvSpPr>
-          <p:cNvPr id="6" name="Text 4"/>
+          <p:cNvPr id="4" name="Text 2"/>
           <p:cNvSpPr/>
           <p:nvPr/>
         </p:nvSpPr>
@@ -7478,23 +7476,23 @@
               <a:buNone/>
             </a:pPr>
             <a:r>
-              <a:rPr lang="en-US" sz="4400" b="1" dirty="0">
-                <a:solidFill>
-                  <a:srgbClr val="EAF1FA"/>
-                </a:solidFill>
-                <a:latin typeface="Bookman Old Style" pitchFamily="34" charset="0"/>
-                <a:ea typeface="Bookman Old Style" pitchFamily="34" charset="-122"/>
-                <a:cs typeface="Bookman Old Style" pitchFamily="34" charset="-120"/>
+              <a:rPr lang="en-US" sz="4000" b="1" dirty="0">
+                <a:solidFill>
+                  <a:srgbClr val="33302B"/>
+                </a:solidFill>
+                <a:latin typeface="Georgia" pitchFamily="34" charset="0"/>
+                <a:ea typeface="Georgia" pitchFamily="34" charset="-122"/>
+                <a:cs typeface="Georgia" pitchFamily="34" charset="-120"/>
               </a:rPr>
               <a:t>O Trabalho desta Semana</a:t>
             </a:r>
-            <a:endParaRPr lang="en-US" sz="4400" dirty="0"/>
-          </a:p>
-        </p:txBody>
-      </p:sp>
-      <p:sp>
-        <p:nvSpPr>
-          <p:cNvPr id="7" name="Text 5"/>
+            <a:endParaRPr lang="en-US" sz="4000" dirty="0"/>
+          </a:p>
+        </p:txBody>
+      </p:sp>
+      <p:sp>
+        <p:nvSpPr>
+          <p:cNvPr id="5" name="Text 3"/>
           <p:cNvSpPr/>
           <p:nvPr/>
         </p:nvSpPr>
@@ -7519,7 +7517,7 @@
             <a:r>
               <a:rPr lang="en-US" sz="1600" dirty="0">
                 <a:solidFill>
-                  <a:srgbClr val="9FB2C9"/>
+                  <a:srgbClr val="8A7E72"/>
                 </a:solidFill>
                 <a:latin typeface="Calibri" pitchFamily="34" charset="0"/>
                 <a:ea typeface="Calibri" pitchFamily="34" charset="-122"/>
@@ -7533,7 +7531,7 @@
       </p:sp>
       <p:sp>
         <p:nvSpPr>
-          <p:cNvPr id="8" name="Shape 6"/>
+          <p:cNvPr id="6" name="Shape 4"/>
           <p:cNvSpPr/>
           <p:nvPr/>
         </p:nvSpPr>
@@ -7548,7 +7546,7 @@
           <a:noFill/>
           <a:ln w="9525">
             <a:solidFill>
-              <a:srgbClr val="5C708A">
+              <a:srgbClr val="A89A86">
                 <a:alpha val="60000"/>
               </a:srgbClr>
             </a:solidFill>
@@ -7558,7 +7556,7 @@
       </p:sp>
       <p:sp>
         <p:nvSpPr>
-          <p:cNvPr id="9" name="Text 7"/>
+          <p:cNvPr id="7" name="Text 5"/>
           <p:cNvSpPr/>
           <p:nvPr/>
         </p:nvSpPr>
@@ -7583,7 +7581,7 @@
             <a:r>
               <a:rPr lang="en-US" sz="900" dirty="0">
                 <a:solidFill>
-                  <a:srgbClr val="5C708A"/>
+                  <a:srgbClr val="A89A86"/>
                 </a:solidFill>
                 <a:latin typeface="Calibri" pitchFamily="34" charset="0"/>
                 <a:ea typeface="Calibri" pitchFamily="34" charset="-122"/>
@@ -7597,7 +7595,7 @@
       </p:sp>
       <p:sp>
         <p:nvSpPr>
-          <p:cNvPr id="10" name="Text 8"/>
+          <p:cNvPr id="8" name="Text 6"/>
           <p:cNvSpPr/>
           <p:nvPr/>
         </p:nvSpPr>
@@ -7622,7 +7620,7 @@
             <a:r>
               <a:rPr lang="en-US" sz="900" dirty="0">
                 <a:solidFill>
-                  <a:srgbClr val="5C708A"/>
+                  <a:srgbClr val="A89A86"/>
                 </a:solidFill>
                 <a:latin typeface="Calibri" pitchFamily="34" charset="0"/>
                 <a:ea typeface="Calibri" pitchFamily="34" charset="-122"/>
@@ -7648,7 +7646,7 @@
     <p:bg>
       <p:bgPr>
         <a:solidFill>
-          <a:srgbClr val="0B1D33"/>
+          <a:srgbClr val="F8F6F3"/>
         </a:solidFill>
       </p:bgPr>
     </p:bg>
@@ -7693,7 +7691,7 @@
             <a:r>
               <a:rPr lang="en-US" sz="1200" b="1" spc="300" kern="0" dirty="0">
                 <a:solidFill>
-                  <a:srgbClr val="4A9EFF"/>
+                  <a:srgbClr val="9A7B66"/>
                 </a:solidFill>
                 <a:latin typeface="Calibri" pitchFamily="34" charset="0"/>
                 <a:ea typeface="Calibri" pitchFamily="34" charset="-122"/>
@@ -7735,11 +7733,11 @@
             <a:r>
               <a:rPr lang="en-US" sz="3400" b="1" dirty="0">
                 <a:solidFill>
-                  <a:srgbClr val="EAF1FA"/>
-                </a:solidFill>
-                <a:latin typeface="Bookman Old Style" pitchFamily="34" charset="0"/>
-                <a:ea typeface="Bookman Old Style" pitchFamily="34" charset="-122"/>
-                <a:cs typeface="Bookman Old Style" pitchFamily="34" charset="-120"/>
+                  <a:srgbClr val="33302B"/>
+                </a:solidFill>
+                <a:latin typeface="Georgia" pitchFamily="34" charset="0"/>
+                <a:ea typeface="Georgia" pitchFamily="34" charset="-122"/>
+                <a:cs typeface="Georgia" pitchFamily="34" charset="-120"/>
               </a:rPr>
               <a:t>Três peças para fechar mais</a:t>
             </a:r>
@@ -7764,13 +7762,18 @@
             </a:avLst>
           </a:prstGeom>
           <a:solidFill>
-            <a:srgbClr val="13283F"/>
+            <a:srgbClr val="FFFFFF"/>
           </a:solidFill>
-          <a:ln/>
+          <a:ln w="12700">
+            <a:solidFill>
+              <a:srgbClr val="E3D9CC"/>
+            </a:solidFill>
+            <a:prstDash val="solid"/>
+          </a:ln>
           <a:effectLst>
-            <a:outerShdw sx="100000" sy="100000" kx="0" ky="0" algn="bl" rotWithShape="0" blurRad="127000" dist="38100" dir="5400000">
-              <a:srgbClr val="000000">
-                <a:alpha val="28000"/>
+            <a:outerShdw sx="100000" sy="100000" kx="0" ky="0" algn="bl" rotWithShape="0" blurRad="114300" dist="38100" dir="5400000">
+              <a:srgbClr val="7A6A55">
+                <a:alpha val="12000"/>
               </a:srgbClr>
             </a:outerShdw>
           </a:effectLst>
@@ -7803,11 +7806,11 @@
             <a:r>
               <a:rPr lang="en-US" sz="3600" b="1" dirty="0">
                 <a:solidFill>
-                  <a:srgbClr val="C9A961"/>
-                </a:solidFill>
-                <a:latin typeface="Bookman Old Style" pitchFamily="34" charset="0"/>
-                <a:ea typeface="Bookman Old Style" pitchFamily="34" charset="-122"/>
-                <a:cs typeface="Bookman Old Style" pitchFamily="34" charset="-120"/>
+                  <a:srgbClr val="B1937E"/>
+                </a:solidFill>
+                <a:latin typeface="Georgia" pitchFamily="34" charset="0"/>
+                <a:ea typeface="Georgia" pitchFamily="34" charset="-122"/>
+                <a:cs typeface="Georgia" pitchFamily="34" charset="-120"/>
               </a:rPr>
               <a:t>01</a:t>
             </a:r>
@@ -7830,9 +7833,14 @@
             <a:avLst/>
           </a:prstGeom>
           <a:solidFill>
-            <a:srgbClr val="16314F"/>
+            <a:srgbClr val="EADFD0"/>
           </a:solidFill>
-          <a:ln/>
+          <a:ln w="9525">
+            <a:solidFill>
+              <a:srgbClr val="E3D9CC"/>
+            </a:solidFill>
+            <a:prstDash val="solid"/>
+          </a:ln>
         </p:spPr>
       </p:sp>
       <p:pic>
@@ -7886,11 +7894,11 @@
             <a:r>
               <a:rPr lang="en-US" sz="1900" b="1" dirty="0">
                 <a:solidFill>
-                  <a:srgbClr val="EAF1FA"/>
-                </a:solidFill>
-                <a:latin typeface="Bookman Old Style" pitchFamily="34" charset="0"/>
-                <a:ea typeface="Bookman Old Style" pitchFamily="34" charset="-122"/>
-                <a:cs typeface="Bookman Old Style" pitchFamily="34" charset="-120"/>
+                  <a:srgbClr val="33302B"/>
+                </a:solidFill>
+                <a:latin typeface="Georgia" pitchFamily="34" charset="0"/>
+                <a:ea typeface="Georgia" pitchFamily="34" charset="-122"/>
+                <a:cs typeface="Georgia" pitchFamily="34" charset="-120"/>
               </a:rPr>
               <a:t>Constrói o teu guião</a:t>
             </a:r>
@@ -7925,7 +7933,7 @@
             <a:r>
               <a:rPr lang="en-US" sz="1300" dirty="0">
                 <a:solidFill>
-                  <a:srgbClr val="9FB2C9"/>
+                  <a:srgbClr val="8A7E72"/>
                 </a:solidFill>
                 <a:latin typeface="Calibri" pitchFamily="34" charset="0"/>
                 <a:ea typeface="Calibri" pitchFamily="34" charset="-122"/>
@@ -7954,13 +7962,18 @@
             </a:avLst>
           </a:prstGeom>
           <a:solidFill>
-            <a:srgbClr val="13283F"/>
+            <a:srgbClr val="FFFFFF"/>
           </a:solidFill>
-          <a:ln/>
+          <a:ln w="12700">
+            <a:solidFill>
+              <a:srgbClr val="E3D9CC"/>
+            </a:solidFill>
+            <a:prstDash val="solid"/>
+          </a:ln>
           <a:effectLst>
-            <a:outerShdw sx="100000" sy="100000" kx="0" ky="0" algn="bl" rotWithShape="0" blurRad="127000" dist="38100" dir="5400000">
-              <a:srgbClr val="000000">
-                <a:alpha val="28000"/>
+            <a:outerShdw sx="100000" sy="100000" kx="0" ky="0" algn="bl" rotWithShape="0" blurRad="114300" dist="38100" dir="5400000">
+              <a:srgbClr val="7A6A55">
+                <a:alpha val="12000"/>
               </a:srgbClr>
             </a:outerShdw>
           </a:effectLst>
@@ -7993,11 +8006,11 @@
             <a:r>
               <a:rPr lang="en-US" sz="3600" b="1" dirty="0">
                 <a:solidFill>
-                  <a:srgbClr val="C9A961"/>
-                </a:solidFill>
-                <a:latin typeface="Bookman Old Style" pitchFamily="34" charset="0"/>
-                <a:ea typeface="Bookman Old Style" pitchFamily="34" charset="-122"/>
-                <a:cs typeface="Bookman Old Style" pitchFamily="34" charset="-120"/>
+                  <a:srgbClr val="B1937E"/>
+                </a:solidFill>
+                <a:latin typeface="Georgia" pitchFamily="34" charset="0"/>
+                <a:ea typeface="Georgia" pitchFamily="34" charset="-122"/>
+                <a:cs typeface="Georgia" pitchFamily="34" charset="-120"/>
               </a:rPr>
               <a:t>02</a:t>
             </a:r>
@@ -8020,9 +8033,14 @@
             <a:avLst/>
           </a:prstGeom>
           <a:solidFill>
-            <a:srgbClr val="16314F"/>
+            <a:srgbClr val="EADFD0"/>
           </a:solidFill>
-          <a:ln/>
+          <a:ln w="9525">
+            <a:solidFill>
+              <a:srgbClr val="E3D9CC"/>
+            </a:solidFill>
+            <a:prstDash val="solid"/>
+          </a:ln>
         </p:spPr>
       </p:sp>
       <p:pic>
@@ -8076,11 +8094,11 @@
             <a:r>
               <a:rPr lang="en-US" sz="1900" b="1" dirty="0">
                 <a:solidFill>
-                  <a:srgbClr val="EAF1FA"/>
-                </a:solidFill>
-                <a:latin typeface="Bookman Old Style" pitchFamily="34" charset="0"/>
-                <a:ea typeface="Bookman Old Style" pitchFamily="34" charset="-122"/>
-                <a:cs typeface="Bookman Old Style" pitchFamily="34" charset="-120"/>
+                  <a:srgbClr val="33302B"/>
+                </a:solidFill>
+                <a:latin typeface="Georgia" pitchFamily="34" charset="0"/>
+                <a:ea typeface="Georgia" pitchFamily="34" charset="-122"/>
+                <a:cs typeface="Georgia" pitchFamily="34" charset="-120"/>
               </a:rPr>
               <a:t>Lista as perguntas</a:t>
             </a:r>
@@ -8115,7 +8133,7 @@
             <a:r>
               <a:rPr lang="en-US" sz="1300" dirty="0">
                 <a:solidFill>
-                  <a:srgbClr val="9FB2C9"/>
+                  <a:srgbClr val="8A7E72"/>
                 </a:solidFill>
                 <a:latin typeface="Calibri" pitchFamily="34" charset="0"/>
                 <a:ea typeface="Calibri" pitchFamily="34" charset="-122"/>
@@ -8144,13 +8162,18 @@
             </a:avLst>
           </a:prstGeom>
           <a:solidFill>
-            <a:srgbClr val="13283F"/>
+            <a:srgbClr val="FFFFFF"/>
           </a:solidFill>
-          <a:ln/>
+          <a:ln w="12700">
+            <a:solidFill>
+              <a:srgbClr val="E3D9CC"/>
+            </a:solidFill>
+            <a:prstDash val="solid"/>
+          </a:ln>
           <a:effectLst>
-            <a:outerShdw sx="100000" sy="100000" kx="0" ky="0" algn="bl" rotWithShape="0" blurRad="127000" dist="38100" dir="5400000">
-              <a:srgbClr val="000000">
-                <a:alpha val="28000"/>
+            <a:outerShdw sx="100000" sy="100000" kx="0" ky="0" algn="bl" rotWithShape="0" blurRad="114300" dist="38100" dir="5400000">
+              <a:srgbClr val="7A6A55">
+                <a:alpha val="12000"/>
               </a:srgbClr>
             </a:outerShdw>
           </a:effectLst>
@@ -8183,11 +8206,11 @@
             <a:r>
               <a:rPr lang="en-US" sz="3600" b="1" dirty="0">
                 <a:solidFill>
-                  <a:srgbClr val="C9A961"/>
-                </a:solidFill>
-                <a:latin typeface="Bookman Old Style" pitchFamily="34" charset="0"/>
-                <a:ea typeface="Bookman Old Style" pitchFamily="34" charset="-122"/>
-                <a:cs typeface="Bookman Old Style" pitchFamily="34" charset="-120"/>
+                  <a:srgbClr val="B1937E"/>
+                </a:solidFill>
+                <a:latin typeface="Georgia" pitchFamily="34" charset="0"/>
+                <a:ea typeface="Georgia" pitchFamily="34" charset="-122"/>
+                <a:cs typeface="Georgia" pitchFamily="34" charset="-120"/>
               </a:rPr>
               <a:t>03</a:t>
             </a:r>
@@ -8210,9 +8233,14 @@
             <a:avLst/>
           </a:prstGeom>
           <a:solidFill>
-            <a:srgbClr val="16314F"/>
+            <a:srgbClr val="EADFD0"/>
           </a:solidFill>
-          <a:ln/>
+          <a:ln w="9525">
+            <a:solidFill>
+              <a:srgbClr val="E3D9CC"/>
+            </a:solidFill>
+            <a:prstDash val="solid"/>
+          </a:ln>
         </p:spPr>
       </p:sp>
       <p:pic>
@@ -8266,11 +8294,11 @@
             <a:r>
               <a:rPr lang="en-US" sz="1900" b="1" dirty="0">
                 <a:solidFill>
-                  <a:srgbClr val="EAF1FA"/>
-                </a:solidFill>
-                <a:latin typeface="Bookman Old Style" pitchFamily="34" charset="0"/>
-                <a:ea typeface="Bookman Old Style" pitchFamily="34" charset="-122"/>
-                <a:cs typeface="Bookman Old Style" pitchFamily="34" charset="-120"/>
+                  <a:srgbClr val="33302B"/>
+                </a:solidFill>
+                <a:latin typeface="Georgia" pitchFamily="34" charset="0"/>
+                <a:ea typeface="Georgia" pitchFamily="34" charset="-122"/>
+                <a:cs typeface="Georgia" pitchFamily="34" charset="-120"/>
               </a:rPr>
               <a:t>Traduz 3 entregáveis</a:t>
             </a:r>
@@ -8305,7 +8333,7 @@
             <a:r>
               <a:rPr lang="en-US" sz="1300" dirty="0">
                 <a:solidFill>
-                  <a:srgbClr val="9FB2C9"/>
+                  <a:srgbClr val="8A7E72"/>
                 </a:solidFill>
                 <a:latin typeface="Calibri" pitchFamily="34" charset="0"/>
                 <a:ea typeface="Calibri" pitchFamily="34" charset="-122"/>
@@ -8334,7 +8362,7 @@
           <a:noFill/>
           <a:ln w="9525">
             <a:solidFill>
-              <a:srgbClr val="5C708A">
+              <a:srgbClr val="A89A86">
                 <a:alpha val="60000"/>
               </a:srgbClr>
             </a:solidFill>
@@ -8369,7 +8397,7 @@
             <a:r>
               <a:rPr lang="en-US" sz="900" dirty="0">
                 <a:solidFill>
-                  <a:srgbClr val="5C708A"/>
+                  <a:srgbClr val="A89A86"/>
                 </a:solidFill>
                 <a:latin typeface="Calibri" pitchFamily="34" charset="0"/>
                 <a:ea typeface="Calibri" pitchFamily="34" charset="-122"/>
@@ -8408,7 +8436,7 @@
             <a:r>
               <a:rPr lang="en-US" sz="900" dirty="0">
                 <a:solidFill>
-                  <a:srgbClr val="5C708A"/>
+                  <a:srgbClr val="A89A86"/>
                 </a:solidFill>
                 <a:latin typeface="Calibri" pitchFamily="34" charset="0"/>
                 <a:ea typeface="Calibri" pitchFamily="34" charset="-122"/>
@@ -8434,7 +8462,7 @@
     <p:bg>
       <p:bgPr>
         <a:solidFill>
-          <a:srgbClr val="102844"/>
+          <a:srgbClr val="EFE7DE"/>
         </a:solidFill>
       </p:bgPr>
     </p:bg>
@@ -8479,7 +8507,7 @@
             <a:r>
               <a:rPr lang="en-US" sz="1200" b="1" spc="300" kern="0" dirty="0">
                 <a:solidFill>
-                  <a:srgbClr val="C9A961"/>
+                  <a:srgbClr val="B1937E"/>
                 </a:solidFill>
                 <a:latin typeface="Calibri" pitchFamily="34" charset="0"/>
                 <a:ea typeface="Calibri" pitchFamily="34" charset="-122"/>
@@ -8521,11 +8549,11 @@
             <a:r>
               <a:rPr lang="en-US" sz="3200" b="1" dirty="0">
                 <a:solidFill>
-                  <a:srgbClr val="EAF1FA"/>
-                </a:solidFill>
-                <a:latin typeface="Bookman Old Style" pitchFamily="34" charset="0"/>
-                <a:ea typeface="Bookman Old Style" pitchFamily="34" charset="-122"/>
-                <a:cs typeface="Bookman Old Style" pitchFamily="34" charset="-120"/>
+                  <a:srgbClr val="33302B"/>
+                </a:solidFill>
+                <a:latin typeface="Georgia" pitchFamily="34" charset="0"/>
+                <a:ea typeface="Georgia" pitchFamily="34" charset="-122"/>
+                <a:cs typeface="Georgia" pitchFamily="34" charset="-120"/>
               </a:rPr>
               <a:t>O que trazes à próxima sessão</a:t>
             </a:r>
@@ -8550,18 +8578,18 @@
             </a:avLst>
           </a:prstGeom>
           <a:solidFill>
-            <a:srgbClr val="13283F"/>
+            <a:srgbClr val="FFFFFF"/>
           </a:solidFill>
           <a:ln w="19050">
             <a:solidFill>
-              <a:srgbClr val="C9A961"/>
+              <a:srgbClr val="B1937E"/>
             </a:solidFill>
             <a:prstDash val="solid"/>
           </a:ln>
           <a:effectLst>
-            <a:outerShdw sx="100000" sy="100000" kx="0" ky="0" algn="bl" rotWithShape="0" blurRad="127000" dist="38100" dir="5400000">
-              <a:srgbClr val="000000">
-                <a:alpha val="28000"/>
+            <a:outerShdw sx="100000" sy="100000" kx="0" ky="0" algn="bl" rotWithShape="0" blurRad="114300" dist="38100" dir="5400000">
+              <a:srgbClr val="7A6A55">
+                <a:alpha val="12000"/>
               </a:srgbClr>
             </a:outerShdw>
           </a:effectLst>
@@ -8594,11 +8622,11 @@
             <a:r>
               <a:rPr lang="en-US" sz="2300" b="1" dirty="0">
                 <a:solidFill>
-                  <a:srgbClr val="C9A961"/>
-                </a:solidFill>
-                <a:latin typeface="Bookman Old Style" pitchFamily="34" charset="0"/>
-                <a:ea typeface="Bookman Old Style" pitchFamily="34" charset="-122"/>
-                <a:cs typeface="Bookman Old Style" pitchFamily="34" charset="-120"/>
+                  <a:srgbClr val="B1937E"/>
+                </a:solidFill>
+                <a:latin typeface="Georgia" pitchFamily="34" charset="0"/>
+                <a:ea typeface="Georgia" pitchFamily="34" charset="-122"/>
+                <a:cs typeface="Georgia" pitchFamily="34" charset="-120"/>
               </a:rPr>
               <a:t>Guião de Reunião de Venda</a:t>
             </a:r>
@@ -8657,7 +8685,7 @@
             <a:r>
               <a:rPr lang="en-US" sz="1550" dirty="0">
                 <a:solidFill>
-                  <a:srgbClr val="EAF1FA"/>
+                  <a:srgbClr val="33302B"/>
                 </a:solidFill>
                 <a:latin typeface="Calibri" pitchFamily="34" charset="0"/>
                 <a:ea typeface="Calibri" pitchFamily="34" charset="-122"/>
@@ -8720,7 +8748,7 @@
             <a:r>
               <a:rPr lang="en-US" sz="1550" dirty="0">
                 <a:solidFill>
-                  <a:srgbClr val="EAF1FA"/>
+                  <a:srgbClr val="33302B"/>
                 </a:solidFill>
                 <a:latin typeface="Calibri" pitchFamily="34" charset="0"/>
                 <a:ea typeface="Calibri" pitchFamily="34" charset="-122"/>
@@ -8783,7 +8811,7 @@
             <a:r>
               <a:rPr lang="en-US" sz="1550" dirty="0">
                 <a:solidFill>
-                  <a:srgbClr val="EAF1FA"/>
+                  <a:srgbClr val="33302B"/>
                 </a:solidFill>
                 <a:latin typeface="Calibri" pitchFamily="34" charset="0"/>
                 <a:ea typeface="Calibri" pitchFamily="34" charset="-122"/>
@@ -8822,7 +8850,7 @@
             <a:r>
               <a:rPr lang="en-US" sz="1500" i="1" dirty="0">
                 <a:solidFill>
-                  <a:srgbClr val="9FB2C9"/>
+                  <a:srgbClr val="8A7E72"/>
                 </a:solidFill>
                 <a:latin typeface="Calibri" pitchFamily="34" charset="0"/>
                 <a:ea typeface="Calibri" pitchFamily="34" charset="-122"/>
@@ -8851,7 +8879,7 @@
           <a:noFill/>
           <a:ln w="9525">
             <a:solidFill>
-              <a:srgbClr val="5C708A">
+              <a:srgbClr val="A89A86">
                 <a:alpha val="60000"/>
               </a:srgbClr>
             </a:solidFill>
@@ -8886,7 +8914,7 @@
             <a:r>
               <a:rPr lang="en-US" sz="900" dirty="0">
                 <a:solidFill>
-                  <a:srgbClr val="5C708A"/>
+                  <a:srgbClr val="A89A86"/>
                 </a:solidFill>
                 <a:latin typeface="Calibri" pitchFamily="34" charset="0"/>
                 <a:ea typeface="Calibri" pitchFamily="34" charset="-122"/>
@@ -8925,7 +8953,7 @@
             <a:r>
               <a:rPr lang="en-US" sz="900" dirty="0">
                 <a:solidFill>
-                  <a:srgbClr val="5C708A"/>
+                  <a:srgbClr val="A89A86"/>
                 </a:solidFill>
                 <a:latin typeface="Calibri" pitchFamily="34" charset="0"/>
                 <a:ea typeface="Calibri" pitchFamily="34" charset="-122"/>
@@ -8951,7 +8979,7 @@
     <p:bg>
       <p:bgPr>
         <a:solidFill>
-          <a:srgbClr val="0B1D33"/>
+          <a:srgbClr val="F8F6F3"/>
         </a:solidFill>
       </p:bgPr>
     </p:bg>
@@ -8996,7 +9024,7 @@
             <a:r>
               <a:rPr lang="en-US" sz="1200" b="1" spc="300" kern="0" dirty="0">
                 <a:solidFill>
-                  <a:srgbClr val="4A9EFF"/>
+                  <a:srgbClr val="9A7B66"/>
                 </a:solidFill>
                 <a:latin typeface="Calibri" pitchFamily="34" charset="0"/>
                 <a:ea typeface="Calibri" pitchFamily="34" charset="-122"/>
@@ -9038,11 +9066,11 @@
             <a:r>
               <a:rPr lang="en-US" sz="3600" b="1" dirty="0">
                 <a:solidFill>
-                  <a:srgbClr val="EAF1FA"/>
-                </a:solidFill>
-                <a:latin typeface="Bookman Old Style" pitchFamily="34" charset="0"/>
-                <a:ea typeface="Bookman Old Style" pitchFamily="34" charset="-122"/>
-                <a:cs typeface="Bookman Old Style" pitchFamily="34" charset="-120"/>
+                  <a:srgbClr val="33302B"/>
+                </a:solidFill>
+                <a:latin typeface="Georgia" pitchFamily="34" charset="0"/>
+                <a:ea typeface="Georgia" pitchFamily="34" charset="-122"/>
+                <a:cs typeface="Georgia" pitchFamily="34" charset="-120"/>
               </a:rPr>
               <a:t>Da conversa ao sim</a:t>
             </a:r>
@@ -9067,13 +9095,18 @@
             </a:avLst>
           </a:prstGeom>
           <a:solidFill>
-            <a:srgbClr val="13283F"/>
+            <a:srgbClr val="FFFFFF"/>
           </a:solidFill>
-          <a:ln/>
+          <a:ln w="12700">
+            <a:solidFill>
+              <a:srgbClr val="E3D9CC"/>
+            </a:solidFill>
+            <a:prstDash val="solid"/>
+          </a:ln>
           <a:effectLst>
-            <a:outerShdw sx="100000" sy="100000" kx="0" ky="0" algn="bl" rotWithShape="0" blurRad="127000" dist="38100" dir="5400000">
-              <a:srgbClr val="000000">
-                <a:alpha val="28000"/>
+            <a:outerShdw sx="100000" sy="100000" kx="0" ky="0" algn="bl" rotWithShape="0" blurRad="114300" dist="38100" dir="5400000">
+              <a:srgbClr val="7A6A55">
+                <a:alpha val="12000"/>
               </a:srgbClr>
             </a:outerShdw>
           </a:effectLst>
@@ -9094,9 +9127,14 @@
             <a:avLst/>
           </a:prstGeom>
           <a:solidFill>
-            <a:srgbClr val="16314F"/>
+            <a:srgbClr val="EADFD0"/>
           </a:solidFill>
-          <a:ln/>
+          <a:ln w="9525">
+            <a:solidFill>
+              <a:srgbClr val="E3D9CC"/>
+            </a:solidFill>
+            <a:prstDash val="solid"/>
+          </a:ln>
         </p:spPr>
       </p:sp>
       <p:pic>
@@ -9150,11 +9188,11 @@
             <a:r>
               <a:rPr lang="en-US" sz="2800" b="1" dirty="0">
                 <a:solidFill>
-                  <a:srgbClr val="C9A961"/>
-                </a:solidFill>
-                <a:latin typeface="Bookman Old Style" pitchFamily="34" charset="0"/>
-                <a:ea typeface="Bookman Old Style" pitchFamily="34" charset="-122"/>
-                <a:cs typeface="Bookman Old Style" pitchFamily="34" charset="-120"/>
+                  <a:srgbClr val="B1937E"/>
+                </a:solidFill>
+                <a:latin typeface="Georgia" pitchFamily="34" charset="0"/>
+                <a:ea typeface="Georgia" pitchFamily="34" charset="-122"/>
+                <a:cs typeface="Georgia" pitchFamily="34" charset="-120"/>
               </a:rPr>
               <a:t>01</a:t>
             </a:r>
@@ -9189,7 +9227,7 @@
             <a:r>
               <a:rPr lang="en-US" sz="1800" b="1" dirty="0">
                 <a:solidFill>
-                  <a:srgbClr val="EAF1FA"/>
+                  <a:srgbClr val="33302B"/>
                 </a:solidFill>
                 <a:latin typeface="Calibri" pitchFamily="34" charset="0"/>
                 <a:ea typeface="Calibri" pitchFamily="34" charset="-122"/>
@@ -9228,7 +9266,7 @@
             <a:r>
               <a:rPr lang="en-US" sz="1300" dirty="0">
                 <a:solidFill>
-                  <a:srgbClr val="9FB2C9"/>
+                  <a:srgbClr val="8A7E72"/>
                 </a:solidFill>
                 <a:latin typeface="Calibri" pitchFamily="34" charset="0"/>
                 <a:ea typeface="Calibri" pitchFamily="34" charset="-122"/>
@@ -9257,13 +9295,18 @@
             </a:avLst>
           </a:prstGeom>
           <a:solidFill>
-            <a:srgbClr val="13283F"/>
+            <a:srgbClr val="FFFFFF"/>
           </a:solidFill>
-          <a:ln/>
+          <a:ln w="12700">
+            <a:solidFill>
+              <a:srgbClr val="E3D9CC"/>
+            </a:solidFill>
+            <a:prstDash val="solid"/>
+          </a:ln>
           <a:effectLst>
-            <a:outerShdw sx="100000" sy="100000" kx="0" ky="0" algn="bl" rotWithShape="0" blurRad="127000" dist="38100" dir="5400000">
-              <a:srgbClr val="000000">
-                <a:alpha val="28000"/>
+            <a:outerShdw sx="100000" sy="100000" kx="0" ky="0" algn="bl" rotWithShape="0" blurRad="114300" dist="38100" dir="5400000">
+              <a:srgbClr val="7A6A55">
+                <a:alpha val="12000"/>
               </a:srgbClr>
             </a:outerShdw>
           </a:effectLst>
@@ -9284,9 +9327,14 @@
             <a:avLst/>
           </a:prstGeom>
           <a:solidFill>
-            <a:srgbClr val="16314F"/>
+            <a:srgbClr val="EADFD0"/>
           </a:solidFill>
-          <a:ln/>
+          <a:ln w="9525">
+            <a:solidFill>
+              <a:srgbClr val="E3D9CC"/>
+            </a:solidFill>
+            <a:prstDash val="solid"/>
+          </a:ln>
         </p:spPr>
       </p:sp>
       <p:pic>
@@ -9340,11 +9388,11 @@
             <a:r>
               <a:rPr lang="en-US" sz="2800" b="1" dirty="0">
                 <a:solidFill>
-                  <a:srgbClr val="C9A961"/>
-                </a:solidFill>
-                <a:latin typeface="Bookman Old Style" pitchFamily="34" charset="0"/>
-                <a:ea typeface="Bookman Old Style" pitchFamily="34" charset="-122"/>
-                <a:cs typeface="Bookman Old Style" pitchFamily="34" charset="-120"/>
+                  <a:srgbClr val="B1937E"/>
+                </a:solidFill>
+                <a:latin typeface="Georgia" pitchFamily="34" charset="0"/>
+                <a:ea typeface="Georgia" pitchFamily="34" charset="-122"/>
+                <a:cs typeface="Georgia" pitchFamily="34" charset="-120"/>
               </a:rPr>
               <a:t>02</a:t>
             </a:r>
@@ -9379,7 +9427,7 @@
             <a:r>
               <a:rPr lang="en-US" sz="1800" b="1" dirty="0">
                 <a:solidFill>
-                  <a:srgbClr val="EAF1FA"/>
+                  <a:srgbClr val="33302B"/>
                 </a:solidFill>
                 <a:latin typeface="Calibri" pitchFamily="34" charset="0"/>
                 <a:ea typeface="Calibri" pitchFamily="34" charset="-122"/>
@@ -9418,7 +9466,7 @@
             <a:r>
               <a:rPr lang="en-US" sz="1300" dirty="0">
                 <a:solidFill>
-                  <a:srgbClr val="9FB2C9"/>
+                  <a:srgbClr val="8A7E72"/>
                 </a:solidFill>
                 <a:latin typeface="Calibri" pitchFamily="34" charset="0"/>
                 <a:ea typeface="Calibri" pitchFamily="34" charset="-122"/>
@@ -9447,13 +9495,18 @@
             </a:avLst>
           </a:prstGeom>
           <a:solidFill>
-            <a:srgbClr val="13283F"/>
+            <a:srgbClr val="FFFFFF"/>
           </a:solidFill>
-          <a:ln/>
+          <a:ln w="12700">
+            <a:solidFill>
+              <a:srgbClr val="E3D9CC"/>
+            </a:solidFill>
+            <a:prstDash val="solid"/>
+          </a:ln>
           <a:effectLst>
-            <a:outerShdw sx="100000" sy="100000" kx="0" ky="0" algn="bl" rotWithShape="0" blurRad="127000" dist="38100" dir="5400000">
-              <a:srgbClr val="000000">
-                <a:alpha val="28000"/>
+            <a:outerShdw sx="100000" sy="100000" kx="0" ky="0" algn="bl" rotWithShape="0" blurRad="114300" dist="38100" dir="5400000">
+              <a:srgbClr val="7A6A55">
+                <a:alpha val="12000"/>
               </a:srgbClr>
             </a:outerShdw>
           </a:effectLst>
@@ -9474,9 +9527,14 @@
             <a:avLst/>
           </a:prstGeom>
           <a:solidFill>
-            <a:srgbClr val="16314F"/>
+            <a:srgbClr val="EADFD0"/>
           </a:solidFill>
-          <a:ln/>
+          <a:ln w="9525">
+            <a:solidFill>
+              <a:srgbClr val="E3D9CC"/>
+            </a:solidFill>
+            <a:prstDash val="solid"/>
+          </a:ln>
         </p:spPr>
       </p:sp>
       <p:pic>
@@ -9530,11 +9588,11 @@
             <a:r>
               <a:rPr lang="en-US" sz="2800" b="1" dirty="0">
                 <a:solidFill>
-                  <a:srgbClr val="C9A961"/>
-                </a:solidFill>
-                <a:latin typeface="Bookman Old Style" pitchFamily="34" charset="0"/>
-                <a:ea typeface="Bookman Old Style" pitchFamily="34" charset="-122"/>
-                <a:cs typeface="Bookman Old Style" pitchFamily="34" charset="-120"/>
+                  <a:srgbClr val="B1937E"/>
+                </a:solidFill>
+                <a:latin typeface="Georgia" pitchFamily="34" charset="0"/>
+                <a:ea typeface="Georgia" pitchFamily="34" charset="-122"/>
+                <a:cs typeface="Georgia" pitchFamily="34" charset="-120"/>
               </a:rPr>
               <a:t>03</a:t>
             </a:r>
@@ -9569,7 +9627,7 @@
             <a:r>
               <a:rPr lang="en-US" sz="1800" b="1" dirty="0">
                 <a:solidFill>
-                  <a:srgbClr val="EAF1FA"/>
+                  <a:srgbClr val="33302B"/>
                 </a:solidFill>
                 <a:latin typeface="Calibri" pitchFamily="34" charset="0"/>
                 <a:ea typeface="Calibri" pitchFamily="34" charset="-122"/>
@@ -9608,7 +9666,7 @@
             <a:r>
               <a:rPr lang="en-US" sz="1300" dirty="0">
                 <a:solidFill>
-                  <a:srgbClr val="9FB2C9"/>
+                  <a:srgbClr val="8A7E72"/>
                 </a:solidFill>
                 <a:latin typeface="Calibri" pitchFamily="34" charset="0"/>
                 <a:ea typeface="Calibri" pitchFamily="34" charset="-122"/>
@@ -9637,13 +9695,18 @@
             </a:avLst>
           </a:prstGeom>
           <a:solidFill>
-            <a:srgbClr val="13283F"/>
+            <a:srgbClr val="FFFFFF"/>
           </a:solidFill>
-          <a:ln/>
+          <a:ln w="12700">
+            <a:solidFill>
+              <a:srgbClr val="E3D9CC"/>
+            </a:solidFill>
+            <a:prstDash val="solid"/>
+          </a:ln>
           <a:effectLst>
-            <a:outerShdw sx="100000" sy="100000" kx="0" ky="0" algn="bl" rotWithShape="0" blurRad="127000" dist="38100" dir="5400000">
-              <a:srgbClr val="000000">
-                <a:alpha val="28000"/>
+            <a:outerShdw sx="100000" sy="100000" kx="0" ky="0" algn="bl" rotWithShape="0" blurRad="114300" dist="38100" dir="5400000">
+              <a:srgbClr val="7A6A55">
+                <a:alpha val="12000"/>
               </a:srgbClr>
             </a:outerShdw>
           </a:effectLst>
@@ -9664,9 +9727,14 @@
             <a:avLst/>
           </a:prstGeom>
           <a:solidFill>
-            <a:srgbClr val="16314F"/>
+            <a:srgbClr val="EADFD0"/>
           </a:solidFill>
-          <a:ln/>
+          <a:ln w="9525">
+            <a:solidFill>
+              <a:srgbClr val="E3D9CC"/>
+            </a:solidFill>
+            <a:prstDash val="solid"/>
+          </a:ln>
         </p:spPr>
       </p:sp>
       <p:pic>
@@ -9720,11 +9788,11 @@
             <a:r>
               <a:rPr lang="en-US" sz="2800" b="1" dirty="0">
                 <a:solidFill>
-                  <a:srgbClr val="C9A961"/>
-                </a:solidFill>
-                <a:latin typeface="Bookman Old Style" pitchFamily="34" charset="0"/>
-                <a:ea typeface="Bookman Old Style" pitchFamily="34" charset="-122"/>
-                <a:cs typeface="Bookman Old Style" pitchFamily="34" charset="-120"/>
+                  <a:srgbClr val="B1937E"/>
+                </a:solidFill>
+                <a:latin typeface="Georgia" pitchFamily="34" charset="0"/>
+                <a:ea typeface="Georgia" pitchFamily="34" charset="-122"/>
+                <a:cs typeface="Georgia" pitchFamily="34" charset="-120"/>
               </a:rPr>
               <a:t>04</a:t>
             </a:r>
@@ -9759,7 +9827,7 @@
             <a:r>
               <a:rPr lang="en-US" sz="1800" b="1" dirty="0">
                 <a:solidFill>
-                  <a:srgbClr val="EAF1FA"/>
+                  <a:srgbClr val="33302B"/>
                 </a:solidFill>
                 <a:latin typeface="Calibri" pitchFamily="34" charset="0"/>
                 <a:ea typeface="Calibri" pitchFamily="34" charset="-122"/>
@@ -9798,7 +9866,7 @@
             <a:r>
               <a:rPr lang="en-US" sz="1300" dirty="0">
                 <a:solidFill>
-                  <a:srgbClr val="9FB2C9"/>
+                  <a:srgbClr val="8A7E72"/>
                 </a:solidFill>
                 <a:latin typeface="Calibri" pitchFamily="34" charset="0"/>
                 <a:ea typeface="Calibri" pitchFamily="34" charset="-122"/>
@@ -9827,7 +9895,7 @@
           <a:noFill/>
           <a:ln w="9525">
             <a:solidFill>
-              <a:srgbClr val="5C708A">
+              <a:srgbClr val="A89A86">
                 <a:alpha val="60000"/>
               </a:srgbClr>
             </a:solidFill>
@@ -9862,7 +9930,7 @@
             <a:r>
               <a:rPr lang="en-US" sz="900" dirty="0">
                 <a:solidFill>
-                  <a:srgbClr val="5C708A"/>
+                  <a:srgbClr val="A89A86"/>
                 </a:solidFill>
                 <a:latin typeface="Calibri" pitchFamily="34" charset="0"/>
                 <a:ea typeface="Calibri" pitchFamily="34" charset="-122"/>
@@ -9901,7 +9969,7 @@
             <a:r>
               <a:rPr lang="en-US" sz="900" dirty="0">
                 <a:solidFill>
-                  <a:srgbClr val="5C708A"/>
+                  <a:srgbClr val="A89A86"/>
                 </a:solidFill>
                 <a:latin typeface="Calibri" pitchFamily="34" charset="0"/>
                 <a:ea typeface="Calibri" pitchFamily="34" charset="-122"/>
@@ -9927,7 +9995,7 @@
     <p:bg>
       <p:bgPr>
         <a:solidFill>
-          <a:srgbClr val="0B1D33"/>
+          <a:srgbClr val="F8F6F3"/>
         </a:solidFill>
       </p:bgPr>
     </p:bg>
@@ -9947,51 +10015,7 @@
       </p:grpSpPr>
       <p:sp>
         <p:nvSpPr>
-          <p:cNvPr id="2" name="Shape 0"/>
-          <p:cNvSpPr/>
-          <p:nvPr/>
-        </p:nvSpPr>
-        <p:spPr>
-          <a:xfrm>
-            <a:off x="8046720" y="-1645920"/>
-            <a:ext cx="5943600" cy="5943600"/>
-          </a:xfrm>
-          <a:prstGeom prst="ellipse">
-            <a:avLst/>
-          </a:prstGeom>
-          <a:solidFill>
-            <a:srgbClr val="4A9EFF">
-              <a:alpha val="14000"/>
-            </a:srgbClr>
-          </a:solidFill>
-          <a:ln/>
-        </p:spPr>
-      </p:sp>
-      <p:sp>
-        <p:nvSpPr>
-          <p:cNvPr id="3" name="Shape 1"/>
-          <p:cNvSpPr/>
-          <p:nvPr/>
-        </p:nvSpPr>
-        <p:spPr>
-          <a:xfrm>
-            <a:off x="-1828800" y="4389120"/>
-            <a:ext cx="5029200" cy="5029200"/>
-          </a:xfrm>
-          <a:prstGeom prst="ellipse">
-            <a:avLst/>
-          </a:prstGeom>
-          <a:solidFill>
-            <a:srgbClr val="C9A961">
-              <a:alpha val="10000"/>
-            </a:srgbClr>
-          </a:solidFill>
-          <a:ln/>
-        </p:spPr>
-      </p:sp>
-      <p:sp>
-        <p:nvSpPr>
-          <p:cNvPr id="4" name="Text 2"/>
+          <p:cNvPr id="2" name="Text 0"/>
           <p:cNvSpPr/>
           <p:nvPr/>
         </p:nvSpPr>
@@ -10016,7 +10040,7 @@
             <a:r>
               <a:rPr lang="en-US" sz="1400" b="1" spc="500" kern="0" dirty="0">
                 <a:solidFill>
-                  <a:srgbClr val="C9A961"/>
+                  <a:srgbClr val="B1937E"/>
                 </a:solidFill>
                 <a:latin typeface="Calibri" pitchFamily="34" charset="0"/>
                 <a:ea typeface="Calibri" pitchFamily="34" charset="-122"/>
@@ -10030,7 +10054,7 @@
       </p:sp>
       <p:sp>
         <p:nvSpPr>
-          <p:cNvPr id="5" name="Text 3"/>
+          <p:cNvPr id="3" name="Text 1"/>
           <p:cNvSpPr/>
           <p:nvPr/>
         </p:nvSpPr>
@@ -10056,17 +10080,17 @@
               <a:buNone/>
             </a:pPr>
             <a:r>
-              <a:rPr lang="en-US" sz="4200" b="1" dirty="0">
-                <a:solidFill>
-                  <a:srgbClr val="EAF1FA"/>
-                </a:solidFill>
-                <a:latin typeface="Bookman Old Style" pitchFamily="34" charset="0"/>
-                <a:ea typeface="Bookman Old Style" pitchFamily="34" charset="-122"/>
-                <a:cs typeface="Bookman Old Style" pitchFamily="34" charset="-120"/>
+              <a:rPr lang="en-US" sz="3800" b="1" dirty="0">
+                <a:solidFill>
+                  <a:srgbClr val="33302B"/>
+                </a:solidFill>
+                <a:latin typeface="Georgia" pitchFamily="34" charset="0"/>
+                <a:ea typeface="Georgia" pitchFamily="34" charset="-122"/>
+                <a:cs typeface="Georgia" pitchFamily="34" charset="-120"/>
               </a:rPr>
               <a:t>Sessão 05:</a:t>
             </a:r>
-            <a:endParaRPr lang="en-US" sz="4200" dirty="0"/>
+            <a:endParaRPr lang="en-US" sz="3800" dirty="0"/>
           </a:p>
           <a:p>
             <a:pPr indent="0" marL="0">
@@ -10076,23 +10100,23 @@
               <a:buNone/>
             </a:pPr>
             <a:r>
-              <a:rPr lang="en-US" sz="4200" b="1" dirty="0">
-                <a:solidFill>
-                  <a:srgbClr val="EAF1FA"/>
-                </a:solidFill>
-                <a:latin typeface="Bookman Old Style" pitchFamily="34" charset="0"/>
-                <a:ea typeface="Bookman Old Style" pitchFamily="34" charset="-122"/>
-                <a:cs typeface="Bookman Old Style" pitchFamily="34" charset="-120"/>
+              <a:rPr lang="en-US" sz="3800" b="1" dirty="0">
+                <a:solidFill>
+                  <a:srgbClr val="33302B"/>
+                </a:solidFill>
+                <a:latin typeface="Georgia" pitchFamily="34" charset="0"/>
+                <a:ea typeface="Georgia" pitchFamily="34" charset="-122"/>
+                <a:cs typeface="Georgia" pitchFamily="34" charset="-120"/>
               </a:rPr>
               <a:t>Proposta e Pricing</a:t>
             </a:r>
-            <a:endParaRPr lang="en-US" sz="4200" dirty="0"/>
-          </a:p>
-        </p:txBody>
-      </p:sp>
-      <p:sp>
-        <p:nvSpPr>
-          <p:cNvPr id="6" name="Text 4"/>
+            <a:endParaRPr lang="en-US" sz="3800" dirty="0"/>
+          </a:p>
+        </p:txBody>
+      </p:sp>
+      <p:sp>
+        <p:nvSpPr>
+          <p:cNvPr id="4" name="Text 2"/>
           <p:cNvSpPr/>
           <p:nvPr/>
         </p:nvSpPr>
@@ -10117,7 +10141,7 @@
             <a:r>
               <a:rPr lang="en-US" sz="1700" dirty="0">
                 <a:solidFill>
-                  <a:srgbClr val="9FB2C9"/>
+                  <a:srgbClr val="8A7E72"/>
                 </a:solidFill>
                 <a:latin typeface="Calibri" pitchFamily="34" charset="0"/>
                 <a:ea typeface="Calibri" pitchFamily="34" charset="-122"/>
@@ -10131,7 +10155,7 @@
       </p:sp>
       <p:sp>
         <p:nvSpPr>
-          <p:cNvPr id="7" name="Shape 5"/>
+          <p:cNvPr id="5" name="Shape 3"/>
           <p:cNvSpPr/>
           <p:nvPr/>
         </p:nvSpPr>
@@ -10146,51 +10170,36 @@
           <a:noFill/>
           <a:ln w="31750">
             <a:solidFill>
-              <a:srgbClr val="C9A961"/>
+              <a:srgbClr val="B1937E"/>
             </a:solidFill>
             <a:prstDash val="solid"/>
           </a:ln>
         </p:spPr>
       </p:sp>
-      <p:sp>
-        <p:nvSpPr>
-          <p:cNvPr id="8" name="Text 6"/>
-          <p:cNvSpPr/>
-          <p:nvPr/>
-        </p:nvSpPr>
-        <p:spPr>
-          <a:xfrm>
-            <a:off x="640080" y="5943600"/>
-            <a:ext cx="7315200" cy="365760"/>
-          </a:xfrm>
-          <a:prstGeom prst="rect">
-            <a:avLst/>
-          </a:prstGeom>
-          <a:noFill/>
-          <a:ln/>
-        </p:spPr>
-        <p:txBody>
-          <a:bodyPr wrap="square" lIns="0" tIns="0" rIns="0" bIns="0" rtlCol="0" anchor="ctr"/>
-          <a:lstStyle/>
-          <a:p>
-            <a:pPr indent="0" marL="0">
-              <a:buNone/>
-            </a:pPr>
-            <a:r>
-              <a:rPr lang="en-US" sz="1200" spc="400" kern="0" dirty="0">
-                <a:solidFill>
-                  <a:srgbClr val="5C708A"/>
-                </a:solidFill>
-                <a:latin typeface="Calibri" pitchFamily="34" charset="0"/>
-                <a:ea typeface="Calibri" pitchFamily="34" charset="-122"/>
-                <a:cs typeface="Calibri" pitchFamily="34" charset="-120"/>
-              </a:rPr>
-              <a:t>MENTORIA · RL</a:t>
-            </a:r>
-            <a:endParaRPr lang="en-US" sz="1200" dirty="0"/>
-          </a:p>
-        </p:txBody>
-      </p:sp>
+      <p:pic>
+        <p:nvPicPr>
+          <p:cNvPr id="6" name="Image 0" descr="preencoded.png">    </p:cNvPr>
+          <p:cNvPicPr>
+            <a:picLocks noChangeAspect="1"/>
+          </p:cNvPicPr>
+          <p:nvPr/>
+        </p:nvPicPr>
+        <p:blipFill>
+          <a:blip r:embed="rId1"/>
+          <a:stretch>
+            <a:fillRect/>
+          </a:stretch>
+        </p:blipFill>
+        <p:spPr>
+          <a:xfrm>
+            <a:off x="640080" y="502920"/>
+            <a:ext cx="1280160" cy="1320800"/>
+          </a:xfrm>
+          <a:prstGeom prst="rect">
+            <a:avLst/>
+          </a:prstGeom>
+        </p:spPr>
+      </p:pic>
     </p:spTree>
   </p:cSld>
   <p:clrMapOvr>
@@ -10205,7 +10214,7 @@
     <p:bg>
       <p:bgPr>
         <a:solidFill>
-          <a:srgbClr val="0B1D33"/>
+          <a:srgbClr val="F8F6F3"/>
         </a:solidFill>
       </p:bgPr>
     </p:bg>
@@ -10225,51 +10234,7 @@
       </p:grpSpPr>
       <p:sp>
         <p:nvSpPr>
-          <p:cNvPr id="2" name="Shape 0"/>
-          <p:cNvSpPr/>
-          <p:nvPr/>
-        </p:nvSpPr>
-        <p:spPr>
-          <a:xfrm>
-            <a:off x="7772400" y="-1371600"/>
-            <a:ext cx="5486400" cy="5486400"/>
-          </a:xfrm>
-          <a:prstGeom prst="ellipse">
-            <a:avLst/>
-          </a:prstGeom>
-          <a:solidFill>
-            <a:srgbClr val="4A9EFF">
-              <a:alpha val="10000"/>
-            </a:srgbClr>
-          </a:solidFill>
-          <a:ln/>
-        </p:spPr>
-      </p:sp>
-      <p:sp>
-        <p:nvSpPr>
-          <p:cNvPr id="3" name="Shape 1"/>
-          <p:cNvSpPr/>
-          <p:nvPr/>
-        </p:nvSpPr>
-        <p:spPr>
-          <a:xfrm>
-            <a:off x="-1371600" y="4114800"/>
-            <a:ext cx="4572000" cy="4572000"/>
-          </a:xfrm>
-          <a:prstGeom prst="ellipse">
-            <a:avLst/>
-          </a:prstGeom>
-          <a:solidFill>
-            <a:srgbClr val="C9A961">
-              <a:alpha val="8000"/>
-            </a:srgbClr>
-          </a:solidFill>
-          <a:ln/>
-        </p:spPr>
-      </p:sp>
-      <p:sp>
-        <p:nvSpPr>
-          <p:cNvPr id="4" name="Text 2"/>
+          <p:cNvPr id="2" name="Text 0"/>
           <p:cNvSpPr/>
           <p:nvPr/>
         </p:nvSpPr>
@@ -10294,11 +10259,11 @@
             <a:r>
               <a:rPr lang="en-US" sz="15000" b="1" dirty="0">
                 <a:solidFill>
-                  <a:srgbClr val="16314F"/>
-                </a:solidFill>
-                <a:latin typeface="Bookman Old Style" pitchFamily="34" charset="0"/>
-                <a:ea typeface="Bookman Old Style" pitchFamily="34" charset="-122"/>
-                <a:cs typeface="Bookman Old Style" pitchFamily="34" charset="-120"/>
+                  <a:srgbClr val="EADFD0"/>
+                </a:solidFill>
+                <a:latin typeface="Georgia" pitchFamily="34" charset="0"/>
+                <a:ea typeface="Georgia" pitchFamily="34" charset="-122"/>
+                <a:cs typeface="Georgia" pitchFamily="34" charset="-120"/>
               </a:rPr>
               <a:t>A</a:t>
             </a:r>
@@ -10308,7 +10273,7 @@
       </p:sp>
       <p:sp>
         <p:nvSpPr>
-          <p:cNvPr id="5" name="Text 3"/>
+          <p:cNvPr id="3" name="Text 1"/>
           <p:cNvSpPr/>
           <p:nvPr/>
         </p:nvSpPr>
@@ -10333,7 +10298,7 @@
             <a:r>
               <a:rPr lang="en-US" sz="1300" b="1" spc="400" kern="0" dirty="0">
                 <a:solidFill>
-                  <a:srgbClr val="C9A961"/>
+                  <a:srgbClr val="B1937E"/>
                 </a:solidFill>
                 <a:latin typeface="Calibri" pitchFamily="34" charset="0"/>
                 <a:ea typeface="Calibri" pitchFamily="34" charset="-122"/>
@@ -10347,7 +10312,7 @@
       </p:sp>
       <p:sp>
         <p:nvSpPr>
-          <p:cNvPr id="6" name="Text 4"/>
+          <p:cNvPr id="4" name="Text 2"/>
           <p:cNvSpPr/>
           <p:nvPr/>
         </p:nvSpPr>
@@ -10373,23 +10338,23 @@
               <a:buNone/>
             </a:pPr>
             <a:r>
-              <a:rPr lang="en-US" sz="4400" b="1" dirty="0">
-                <a:solidFill>
-                  <a:srgbClr val="EAF1FA"/>
-                </a:solidFill>
-                <a:latin typeface="Bookman Old Style" pitchFamily="34" charset="0"/>
-                <a:ea typeface="Bookman Old Style" pitchFamily="34" charset="-122"/>
-                <a:cs typeface="Bookman Old Style" pitchFamily="34" charset="-120"/>
+              <a:rPr lang="en-US" sz="4000" b="1" dirty="0">
+                <a:solidFill>
+                  <a:srgbClr val="33302B"/>
+                </a:solidFill>
+                <a:latin typeface="Georgia" pitchFamily="34" charset="0"/>
+                <a:ea typeface="Georgia" pitchFamily="34" charset="-122"/>
+                <a:cs typeface="Georgia" pitchFamily="34" charset="-120"/>
               </a:rPr>
               <a:t>A Anatomia de uma Reunião que Fecha</a:t>
             </a:r>
-            <a:endParaRPr lang="en-US" sz="4400" dirty="0"/>
-          </a:p>
-        </p:txBody>
-      </p:sp>
-      <p:sp>
-        <p:nvSpPr>
-          <p:cNvPr id="7" name="Text 5"/>
+            <a:endParaRPr lang="en-US" sz="4000" dirty="0"/>
+          </a:p>
+        </p:txBody>
+      </p:sp>
+      <p:sp>
+        <p:nvSpPr>
+          <p:cNvPr id="5" name="Text 3"/>
           <p:cNvSpPr/>
           <p:nvPr/>
         </p:nvSpPr>
@@ -10414,7 +10379,7 @@
             <a:r>
               <a:rPr lang="en-US" sz="1600" dirty="0">
                 <a:solidFill>
-                  <a:srgbClr val="9FB2C9"/>
+                  <a:srgbClr val="8A7E72"/>
                 </a:solidFill>
                 <a:latin typeface="Calibri" pitchFamily="34" charset="0"/>
                 <a:ea typeface="Calibri" pitchFamily="34" charset="-122"/>
@@ -10428,7 +10393,7 @@
       </p:sp>
       <p:sp>
         <p:nvSpPr>
-          <p:cNvPr id="8" name="Shape 6"/>
+          <p:cNvPr id="6" name="Shape 4"/>
           <p:cNvSpPr/>
           <p:nvPr/>
         </p:nvSpPr>
@@ -10443,7 +10408,7 @@
           <a:noFill/>
           <a:ln w="9525">
             <a:solidFill>
-              <a:srgbClr val="5C708A">
+              <a:srgbClr val="A89A86">
                 <a:alpha val="60000"/>
               </a:srgbClr>
             </a:solidFill>
@@ -10453,7 +10418,7 @@
       </p:sp>
       <p:sp>
         <p:nvSpPr>
-          <p:cNvPr id="9" name="Text 7"/>
+          <p:cNvPr id="7" name="Text 5"/>
           <p:cNvSpPr/>
           <p:nvPr/>
         </p:nvSpPr>
@@ -10478,7 +10443,7 @@
             <a:r>
               <a:rPr lang="en-US" sz="900" dirty="0">
                 <a:solidFill>
-                  <a:srgbClr val="5C708A"/>
+                  <a:srgbClr val="A89A86"/>
                 </a:solidFill>
                 <a:latin typeface="Calibri" pitchFamily="34" charset="0"/>
                 <a:ea typeface="Calibri" pitchFamily="34" charset="-122"/>
@@ -10492,7 +10457,7 @@
       </p:sp>
       <p:sp>
         <p:nvSpPr>
-          <p:cNvPr id="10" name="Text 8"/>
+          <p:cNvPr id="8" name="Text 6"/>
           <p:cNvSpPr/>
           <p:nvPr/>
         </p:nvSpPr>
@@ -10517,7 +10482,7 @@
             <a:r>
               <a:rPr lang="en-US" sz="900" dirty="0">
                 <a:solidFill>
-                  <a:srgbClr val="5C708A"/>
+                  <a:srgbClr val="A89A86"/>
                 </a:solidFill>
                 <a:latin typeface="Calibri" pitchFamily="34" charset="0"/>
                 <a:ea typeface="Calibri" pitchFamily="34" charset="-122"/>
@@ -10543,7 +10508,7 @@
     <p:bg>
       <p:bgPr>
         <a:solidFill>
-          <a:srgbClr val="0B1D33"/>
+          <a:srgbClr val="F8F6F3"/>
         </a:solidFill>
       </p:bgPr>
     </p:bg>
@@ -10563,51 +10528,7 @@
       </p:grpSpPr>
       <p:sp>
         <p:nvSpPr>
-          <p:cNvPr id="2" name="Shape 0"/>
-          <p:cNvSpPr/>
-          <p:nvPr/>
-        </p:nvSpPr>
-        <p:spPr>
-          <a:xfrm>
-            <a:off x="8229600" y="-1463040"/>
-            <a:ext cx="5486400" cy="5486400"/>
-          </a:xfrm>
-          <a:prstGeom prst="ellipse">
-            <a:avLst/>
-          </a:prstGeom>
-          <a:solidFill>
-            <a:srgbClr val="4A9EFF">
-              <a:alpha val="10000"/>
-            </a:srgbClr>
-          </a:solidFill>
-          <a:ln/>
-        </p:spPr>
-      </p:sp>
-      <p:sp>
-        <p:nvSpPr>
-          <p:cNvPr id="3" name="Shape 1"/>
-          <p:cNvSpPr/>
-          <p:nvPr/>
-        </p:nvSpPr>
-        <p:spPr>
-          <a:xfrm>
-            <a:off x="-1463040" y="4206240"/>
-            <a:ext cx="4572000" cy="4572000"/>
-          </a:xfrm>
-          <a:prstGeom prst="ellipse">
-            <a:avLst/>
-          </a:prstGeom>
-          <a:solidFill>
-            <a:srgbClr val="C9A961">
-              <a:alpha val="8000"/>
-            </a:srgbClr>
-          </a:solidFill>
-          <a:ln/>
-        </p:spPr>
-      </p:sp>
-      <p:sp>
-        <p:nvSpPr>
-          <p:cNvPr id="4" name="Text 2"/>
+          <p:cNvPr id="2" name="Text 0"/>
           <p:cNvSpPr/>
           <p:nvPr/>
         </p:nvSpPr>
@@ -10632,7 +10553,7 @@
             <a:r>
               <a:rPr lang="en-US" sz="1200" b="1" spc="300" kern="0" dirty="0">
                 <a:solidFill>
-                  <a:srgbClr val="4A9EFF"/>
+                  <a:srgbClr val="9A7B66"/>
                 </a:solidFill>
                 <a:latin typeface="Calibri" pitchFamily="34" charset="0"/>
                 <a:ea typeface="Calibri" pitchFamily="34" charset="-122"/>
@@ -10646,7 +10567,7 @@
       </p:sp>
       <p:sp>
         <p:nvSpPr>
-          <p:cNvPr id="5" name="Shape 3"/>
+          <p:cNvPr id="3" name="Shape 1"/>
           <p:cNvSpPr/>
           <p:nvPr/>
         </p:nvSpPr>
@@ -10659,14 +10580,19 @@
             <a:avLst/>
           </a:prstGeom>
           <a:solidFill>
-            <a:srgbClr val="16314F"/>
+            <a:srgbClr val="EADFD0"/>
           </a:solidFill>
-          <a:ln/>
+          <a:ln w="9525">
+            <a:solidFill>
+              <a:srgbClr val="E3D9CC"/>
+            </a:solidFill>
+            <a:prstDash val="solid"/>
+          </a:ln>
         </p:spPr>
       </p:sp>
       <p:pic>
         <p:nvPicPr>
-          <p:cNvPr id="6" name="Image 0" descr="preencoded.png">    </p:cNvPr>
+          <p:cNvPr id="4" name="Image 0" descr="preencoded.png">    </p:cNvPr>
           <p:cNvPicPr>
             <a:picLocks noChangeAspect="1"/>
           </p:cNvPicPr>
@@ -10690,7 +10616,7 @@
       </p:pic>
       <p:sp>
         <p:nvSpPr>
-          <p:cNvPr id="7" name="Text 4"/>
+          <p:cNvPr id="5" name="Text 2"/>
           <p:cNvSpPr/>
           <p:nvPr/>
         </p:nvSpPr>
@@ -10718,11 +10644,11 @@
             <a:r>
               <a:rPr lang="en-US" sz="3000" b="1" i="1" dirty="0">
                 <a:solidFill>
-                  <a:srgbClr val="EAF1FA"/>
-                </a:solidFill>
-                <a:latin typeface="Bookman Old Style" pitchFamily="34" charset="0"/>
-                <a:ea typeface="Bookman Old Style" pitchFamily="34" charset="-122"/>
-                <a:cs typeface="Bookman Old Style" pitchFamily="34" charset="-120"/>
+                  <a:srgbClr val="33302B"/>
+                </a:solidFill>
+                <a:latin typeface="Georgia" pitchFamily="34" charset="0"/>
+                <a:ea typeface="Georgia" pitchFamily="34" charset="-122"/>
+                <a:cs typeface="Georgia" pitchFamily="34" charset="-120"/>
               </a:rPr>
               <a:t>Quem improvisa vende por sorte. Quem tem método, repete.</a:t>
             </a:r>
@@ -10732,7 +10658,7 @@
       </p:sp>
       <p:sp>
         <p:nvSpPr>
-          <p:cNvPr id="8" name="Text 5"/>
+          <p:cNvPr id="6" name="Text 3"/>
           <p:cNvSpPr/>
           <p:nvPr/>
         </p:nvSpPr>
@@ -10757,7 +10683,7 @@
             <a:r>
               <a:rPr lang="en-US" sz="1600" dirty="0">
                 <a:solidFill>
-                  <a:srgbClr val="9FB2C9"/>
+                  <a:srgbClr val="8A7E72"/>
                 </a:solidFill>
                 <a:latin typeface="Calibri" pitchFamily="34" charset="0"/>
                 <a:ea typeface="Calibri" pitchFamily="34" charset="-122"/>
@@ -10771,7 +10697,7 @@
       </p:sp>
       <p:sp>
         <p:nvSpPr>
-          <p:cNvPr id="9" name="Shape 6"/>
+          <p:cNvPr id="7" name="Shape 4"/>
           <p:cNvSpPr/>
           <p:nvPr/>
         </p:nvSpPr>
@@ -10786,7 +10712,7 @@
           <a:noFill/>
           <a:ln w="9525">
             <a:solidFill>
-              <a:srgbClr val="5C708A">
+              <a:srgbClr val="A89A86">
                 <a:alpha val="60000"/>
               </a:srgbClr>
             </a:solidFill>
@@ -10796,7 +10722,7 @@
       </p:sp>
       <p:sp>
         <p:nvSpPr>
-          <p:cNvPr id="10" name="Text 7"/>
+          <p:cNvPr id="8" name="Text 5"/>
           <p:cNvSpPr/>
           <p:nvPr/>
         </p:nvSpPr>
@@ -10821,7 +10747,7 @@
             <a:r>
               <a:rPr lang="en-US" sz="900" dirty="0">
                 <a:solidFill>
-                  <a:srgbClr val="5C708A"/>
+                  <a:srgbClr val="A89A86"/>
                 </a:solidFill>
                 <a:latin typeface="Calibri" pitchFamily="34" charset="0"/>
                 <a:ea typeface="Calibri" pitchFamily="34" charset="-122"/>
@@ -10835,7 +10761,7 @@
       </p:sp>
       <p:sp>
         <p:nvSpPr>
-          <p:cNvPr id="11" name="Text 8"/>
+          <p:cNvPr id="9" name="Text 6"/>
           <p:cNvSpPr/>
           <p:nvPr/>
         </p:nvSpPr>
@@ -10860,7 +10786,7 @@
             <a:r>
               <a:rPr lang="en-US" sz="900" dirty="0">
                 <a:solidFill>
-                  <a:srgbClr val="5C708A"/>
+                  <a:srgbClr val="A89A86"/>
                 </a:solidFill>
                 <a:latin typeface="Calibri" pitchFamily="34" charset="0"/>
                 <a:ea typeface="Calibri" pitchFamily="34" charset="-122"/>
@@ -10886,7 +10812,7 @@
     <p:bg>
       <p:bgPr>
         <a:solidFill>
-          <a:srgbClr val="0B1D33"/>
+          <a:srgbClr val="F8F6F3"/>
         </a:solidFill>
       </p:bgPr>
     </p:bg>
@@ -10931,7 +10857,7 @@
             <a:r>
               <a:rPr lang="en-US" sz="1200" b="1" spc="300" kern="0" dirty="0">
                 <a:solidFill>
-                  <a:srgbClr val="4A9EFF"/>
+                  <a:srgbClr val="9A7B66"/>
                 </a:solidFill>
                 <a:latin typeface="Calibri" pitchFamily="34" charset="0"/>
                 <a:ea typeface="Calibri" pitchFamily="34" charset="-122"/>
@@ -10973,11 +10899,11 @@
             <a:r>
               <a:rPr lang="en-US" sz="3000" b="1" dirty="0">
                 <a:solidFill>
-                  <a:srgbClr val="EAF1FA"/>
-                </a:solidFill>
-                <a:latin typeface="Bookman Old Style" pitchFamily="34" charset="0"/>
-                <a:ea typeface="Bookman Old Style" pitchFamily="34" charset="-122"/>
-                <a:cs typeface="Bookman Old Style" pitchFamily="34" charset="-120"/>
+                  <a:srgbClr val="33302B"/>
+                </a:solidFill>
+                <a:latin typeface="Georgia" pitchFamily="34" charset="0"/>
+                <a:ea typeface="Georgia" pitchFamily="34" charset="-122"/>
+                <a:cs typeface="Georgia" pitchFamily="34" charset="-120"/>
               </a:rPr>
               <a:t>As quatro fases</a:t>
             </a:r>
@@ -11002,13 +10928,18 @@
             </a:avLst>
           </a:prstGeom>
           <a:solidFill>
-            <a:srgbClr val="13283F"/>
+            <a:srgbClr val="FFFFFF"/>
           </a:solidFill>
-          <a:ln/>
+          <a:ln w="12700">
+            <a:solidFill>
+              <a:srgbClr val="E3D9CC"/>
+            </a:solidFill>
+            <a:prstDash val="solid"/>
+          </a:ln>
           <a:effectLst>
-            <a:outerShdw sx="100000" sy="100000" kx="0" ky="0" algn="bl" rotWithShape="0" blurRad="127000" dist="38100" dir="5400000">
-              <a:srgbClr val="000000">
-                <a:alpha val="28000"/>
+            <a:outerShdw sx="100000" sy="100000" kx="0" ky="0" algn="bl" rotWithShape="0" blurRad="114300" dist="38100" dir="5400000">
+              <a:srgbClr val="7A6A55">
+                <a:alpha val="12000"/>
               </a:srgbClr>
             </a:outerShdw>
           </a:effectLst>
@@ -11029,9 +10960,14 @@
             <a:avLst/>
           </a:prstGeom>
           <a:solidFill>
-            <a:srgbClr val="16314F"/>
+            <a:srgbClr val="EADFD0"/>
           </a:solidFill>
-          <a:ln/>
+          <a:ln w="9525">
+            <a:solidFill>
+              <a:srgbClr val="E3D9CC"/>
+            </a:solidFill>
+            <a:prstDash val="solid"/>
+          </a:ln>
         </p:spPr>
       </p:sp>
       <p:pic>
@@ -11085,11 +11021,11 @@
             <a:r>
               <a:rPr lang="en-US" sz="1700" b="1" dirty="0">
                 <a:solidFill>
-                  <a:srgbClr val="EAF1FA"/>
-                </a:solidFill>
-                <a:latin typeface="Bookman Old Style" pitchFamily="34" charset="0"/>
-                <a:ea typeface="Bookman Old Style" pitchFamily="34" charset="-122"/>
-                <a:cs typeface="Bookman Old Style" pitchFamily="34" charset="-120"/>
+                  <a:srgbClr val="33302B"/>
+                </a:solidFill>
+                <a:latin typeface="Georgia" pitchFamily="34" charset="0"/>
+                <a:ea typeface="Georgia" pitchFamily="34" charset="-122"/>
+                <a:cs typeface="Georgia" pitchFamily="34" charset="-120"/>
               </a:rPr>
               <a:t>Ligação</a:t>
             </a:r>
@@ -11124,7 +11060,7 @@
             <a:r>
               <a:rPr lang="en-US" sz="1250" dirty="0">
                 <a:solidFill>
-                  <a:srgbClr val="9FB2C9"/>
+                  <a:srgbClr val="8A7E72"/>
                 </a:solidFill>
                 <a:latin typeface="Calibri" pitchFamily="34" charset="0"/>
                 <a:ea typeface="Calibri" pitchFamily="34" charset="-122"/>
@@ -11177,13 +11113,18 @@
             </a:avLst>
           </a:prstGeom>
           <a:solidFill>
-            <a:srgbClr val="13283F"/>
+            <a:srgbClr val="FFFFFF"/>
           </a:solidFill>
-          <a:ln/>
+          <a:ln w="12700">
+            <a:solidFill>
+              <a:srgbClr val="E3D9CC"/>
+            </a:solidFill>
+            <a:prstDash val="solid"/>
+          </a:ln>
           <a:effectLst>
-            <a:outerShdw sx="100000" sy="100000" kx="0" ky="0" algn="bl" rotWithShape="0" blurRad="127000" dist="38100" dir="5400000">
-              <a:srgbClr val="000000">
-                <a:alpha val="28000"/>
+            <a:outerShdw sx="100000" sy="100000" kx="0" ky="0" algn="bl" rotWithShape="0" blurRad="114300" dist="38100" dir="5400000">
+              <a:srgbClr val="7A6A55">
+                <a:alpha val="12000"/>
               </a:srgbClr>
             </a:outerShdw>
           </a:effectLst>
@@ -11204,9 +11145,14 @@
             <a:avLst/>
           </a:prstGeom>
           <a:solidFill>
-            <a:srgbClr val="16314F"/>
+            <a:srgbClr val="EADFD0"/>
           </a:solidFill>
-          <a:ln/>
+          <a:ln w="9525">
+            <a:solidFill>
+              <a:srgbClr val="E3D9CC"/>
+            </a:solidFill>
+            <a:prstDash val="solid"/>
+          </a:ln>
         </p:spPr>
       </p:sp>
       <p:pic>
@@ -11260,11 +11206,11 @@
             <a:r>
               <a:rPr lang="en-US" sz="1700" b="1" dirty="0">
                 <a:solidFill>
-                  <a:srgbClr val="EAF1FA"/>
-                </a:solidFill>
-                <a:latin typeface="Bookman Old Style" pitchFamily="34" charset="0"/>
-                <a:ea typeface="Bookman Old Style" pitchFamily="34" charset="-122"/>
-                <a:cs typeface="Bookman Old Style" pitchFamily="34" charset="-120"/>
+                  <a:srgbClr val="33302B"/>
+                </a:solidFill>
+                <a:latin typeface="Georgia" pitchFamily="34" charset="0"/>
+                <a:ea typeface="Georgia" pitchFamily="34" charset="-122"/>
+                <a:cs typeface="Georgia" pitchFamily="34" charset="-120"/>
               </a:rPr>
               <a:t>Descoberta</a:t>
             </a:r>
@@ -11299,7 +11245,7 @@
             <a:r>
               <a:rPr lang="en-US" sz="1250" dirty="0">
                 <a:solidFill>
-                  <a:srgbClr val="9FB2C9"/>
+                  <a:srgbClr val="8A7E72"/>
                 </a:solidFill>
                 <a:latin typeface="Calibri" pitchFamily="34" charset="0"/>
                 <a:ea typeface="Calibri" pitchFamily="34" charset="-122"/>
@@ -11352,13 +11298,18 @@
             </a:avLst>
           </a:prstGeom>
           <a:solidFill>
-            <a:srgbClr val="13283F"/>
+            <a:srgbClr val="FFFFFF"/>
           </a:solidFill>
-          <a:ln/>
+          <a:ln w="12700">
+            <a:solidFill>
+              <a:srgbClr val="E3D9CC"/>
+            </a:solidFill>
+            <a:prstDash val="solid"/>
+          </a:ln>
           <a:effectLst>
-            <a:outerShdw sx="100000" sy="100000" kx="0" ky="0" algn="bl" rotWithShape="0" blurRad="127000" dist="38100" dir="5400000">
-              <a:srgbClr val="000000">
-                <a:alpha val="28000"/>
+            <a:outerShdw sx="100000" sy="100000" kx="0" ky="0" algn="bl" rotWithShape="0" blurRad="114300" dist="38100" dir="5400000">
+              <a:srgbClr val="7A6A55">
+                <a:alpha val="12000"/>
               </a:srgbClr>
             </a:outerShdw>
           </a:effectLst>
@@ -11379,9 +11330,14 @@
             <a:avLst/>
           </a:prstGeom>
           <a:solidFill>
-            <a:srgbClr val="16314F"/>
+            <a:srgbClr val="EADFD0"/>
           </a:solidFill>
-          <a:ln/>
+          <a:ln w="9525">
+            <a:solidFill>
+              <a:srgbClr val="E3D9CC"/>
+            </a:solidFill>
+            <a:prstDash val="solid"/>
+          </a:ln>
         </p:spPr>
       </p:sp>
       <p:pic>
@@ -11435,11 +11391,11 @@
             <a:r>
               <a:rPr lang="en-US" sz="1700" b="1" dirty="0">
                 <a:solidFill>
-                  <a:srgbClr val="EAF1FA"/>
-                </a:solidFill>
-                <a:latin typeface="Bookman Old Style" pitchFamily="34" charset="0"/>
-                <a:ea typeface="Bookman Old Style" pitchFamily="34" charset="-122"/>
-                <a:cs typeface="Bookman Old Style" pitchFamily="34" charset="-120"/>
+                  <a:srgbClr val="33302B"/>
+                </a:solidFill>
+                <a:latin typeface="Georgia" pitchFamily="34" charset="0"/>
+                <a:ea typeface="Georgia" pitchFamily="34" charset="-122"/>
+                <a:cs typeface="Georgia" pitchFamily="34" charset="-120"/>
               </a:rPr>
               <a:t>Apresentação</a:t>
             </a:r>
@@ -11474,7 +11430,7 @@
             <a:r>
               <a:rPr lang="en-US" sz="1250" dirty="0">
                 <a:solidFill>
-                  <a:srgbClr val="9FB2C9"/>
+                  <a:srgbClr val="8A7E72"/>
                 </a:solidFill>
                 <a:latin typeface="Calibri" pitchFamily="34" charset="0"/>
                 <a:ea typeface="Calibri" pitchFamily="34" charset="-122"/>
@@ -11527,13 +11483,18 @@
             </a:avLst>
           </a:prstGeom>
           <a:solidFill>
-            <a:srgbClr val="13283F"/>
+            <a:srgbClr val="FFFFFF"/>
           </a:solidFill>
-          <a:ln/>
+          <a:ln w="12700">
+            <a:solidFill>
+              <a:srgbClr val="E3D9CC"/>
+            </a:solidFill>
+            <a:prstDash val="solid"/>
+          </a:ln>
           <a:effectLst>
-            <a:outerShdw sx="100000" sy="100000" kx="0" ky="0" algn="bl" rotWithShape="0" blurRad="127000" dist="38100" dir="5400000">
-              <a:srgbClr val="000000">
-                <a:alpha val="28000"/>
+            <a:outerShdw sx="100000" sy="100000" kx="0" ky="0" algn="bl" rotWithShape="0" blurRad="114300" dist="38100" dir="5400000">
+              <a:srgbClr val="7A6A55">
+                <a:alpha val="12000"/>
               </a:srgbClr>
             </a:outerShdw>
           </a:effectLst>
@@ -11554,9 +11515,14 @@
             <a:avLst/>
           </a:prstGeom>
           <a:solidFill>
-            <a:srgbClr val="16314F"/>
+            <a:srgbClr val="EADFD0"/>
           </a:solidFill>
-          <a:ln/>
+          <a:ln w="9525">
+            <a:solidFill>
+              <a:srgbClr val="E3D9CC"/>
+            </a:solidFill>
+            <a:prstDash val="solid"/>
+          </a:ln>
         </p:spPr>
       </p:sp>
       <p:pic>
@@ -11610,11 +11576,11 @@
             <a:r>
               <a:rPr lang="en-US" sz="1700" b="1" dirty="0">
                 <a:solidFill>
-                  <a:srgbClr val="EAF1FA"/>
-                </a:solidFill>
-                <a:latin typeface="Bookman Old Style" pitchFamily="34" charset="0"/>
-                <a:ea typeface="Bookman Old Style" pitchFamily="34" charset="-122"/>
-                <a:cs typeface="Bookman Old Style" pitchFamily="34" charset="-120"/>
+                  <a:srgbClr val="33302B"/>
+                </a:solidFill>
+                <a:latin typeface="Georgia" pitchFamily="34" charset="0"/>
+                <a:ea typeface="Georgia" pitchFamily="34" charset="-122"/>
+                <a:cs typeface="Georgia" pitchFamily="34" charset="-120"/>
               </a:rPr>
               <a:t>Fecho</a:t>
             </a:r>
@@ -11649,7 +11615,7 @@
             <a:r>
               <a:rPr lang="en-US" sz="1250" dirty="0">
                 <a:solidFill>
-                  <a:srgbClr val="9FB2C9"/>
+                  <a:srgbClr val="8A7E72"/>
                 </a:solidFill>
                 <a:latin typeface="Calibri" pitchFamily="34" charset="0"/>
                 <a:ea typeface="Calibri" pitchFamily="34" charset="-122"/>
@@ -11688,7 +11654,7 @@
             <a:r>
               <a:rPr lang="en-US" sz="1500" i="1" dirty="0">
                 <a:solidFill>
-                  <a:srgbClr val="C9A961"/>
+                  <a:srgbClr val="B1937E"/>
                 </a:solidFill>
                 <a:latin typeface="Calibri" pitchFamily="34" charset="0"/>
                 <a:ea typeface="Calibri" pitchFamily="34" charset="-122"/>
@@ -11717,7 +11683,7 @@
           <a:noFill/>
           <a:ln w="9525">
             <a:solidFill>
-              <a:srgbClr val="5C708A">
+              <a:srgbClr val="A89A86">
                 <a:alpha val="60000"/>
               </a:srgbClr>
             </a:solidFill>
@@ -11752,7 +11718,7 @@
             <a:r>
               <a:rPr lang="en-US" sz="900" dirty="0">
                 <a:solidFill>
-                  <a:srgbClr val="5C708A"/>
+                  <a:srgbClr val="A89A86"/>
                 </a:solidFill>
                 <a:latin typeface="Calibri" pitchFamily="34" charset="0"/>
                 <a:ea typeface="Calibri" pitchFamily="34" charset="-122"/>
@@ -11791,7 +11757,7 @@
             <a:r>
               <a:rPr lang="en-US" sz="900" dirty="0">
                 <a:solidFill>
-                  <a:srgbClr val="5C708A"/>
+                  <a:srgbClr val="A89A86"/>
                 </a:solidFill>
                 <a:latin typeface="Calibri" pitchFamily="34" charset="0"/>
                 <a:ea typeface="Calibri" pitchFamily="34" charset="-122"/>
@@ -11817,7 +11783,7 @@
     <p:bg>
       <p:bgPr>
         <a:solidFill>
-          <a:srgbClr val="0B1D33"/>
+          <a:srgbClr val="F8F6F3"/>
         </a:solidFill>
       </p:bgPr>
     </p:bg>
@@ -11862,7 +11828,7 @@
             <a:r>
               <a:rPr lang="en-US" sz="1200" b="1" spc="300" kern="0" dirty="0">
                 <a:solidFill>
-                  <a:srgbClr val="4A9EFF"/>
+                  <a:srgbClr val="9A7B66"/>
                 </a:solidFill>
                 <a:latin typeface="Calibri" pitchFamily="34" charset="0"/>
                 <a:ea typeface="Calibri" pitchFamily="34" charset="-122"/>
@@ -11904,11 +11870,11 @@
             <a:r>
               <a:rPr lang="en-US" sz="3200" b="1" dirty="0">
                 <a:solidFill>
-                  <a:srgbClr val="EAF1FA"/>
-                </a:solidFill>
-                <a:latin typeface="Bookman Old Style" pitchFamily="34" charset="0"/>
-                <a:ea typeface="Bookman Old Style" pitchFamily="34" charset="-122"/>
-                <a:cs typeface="Bookman Old Style" pitchFamily="34" charset="-120"/>
+                  <a:srgbClr val="33302B"/>
+                </a:solidFill>
+                <a:latin typeface="Georgia" pitchFamily="34" charset="0"/>
+                <a:ea typeface="Georgia" pitchFamily="34" charset="-122"/>
+                <a:cs typeface="Georgia" pitchFamily="34" charset="-120"/>
               </a:rPr>
               <a:t>Ligação: a confiança vem primeiro</a:t>
             </a:r>
@@ -11933,13 +11899,18 @@
             </a:avLst>
           </a:prstGeom>
           <a:solidFill>
-            <a:srgbClr val="13283F"/>
+            <a:srgbClr val="FFFFFF"/>
           </a:solidFill>
-          <a:ln/>
+          <a:ln w="12700">
+            <a:solidFill>
+              <a:srgbClr val="E3D9CC"/>
+            </a:solidFill>
+            <a:prstDash val="solid"/>
+          </a:ln>
           <a:effectLst>
-            <a:outerShdw sx="100000" sy="100000" kx="0" ky="0" algn="bl" rotWithShape="0" blurRad="127000" dist="38100" dir="5400000">
-              <a:srgbClr val="000000">
-                <a:alpha val="28000"/>
+            <a:outerShdw sx="100000" sy="100000" kx="0" ky="0" algn="bl" rotWithShape="0" blurRad="114300" dist="38100" dir="5400000">
+              <a:srgbClr val="7A6A55">
+                <a:alpha val="12000"/>
               </a:srgbClr>
             </a:outerShdw>
           </a:effectLst>
@@ -11960,9 +11931,14 @@
             <a:avLst/>
           </a:prstGeom>
           <a:solidFill>
-            <a:srgbClr val="16314F"/>
+            <a:srgbClr val="EADFD0"/>
           </a:solidFill>
-          <a:ln/>
+          <a:ln w="9525">
+            <a:solidFill>
+              <a:srgbClr val="E3D9CC"/>
+            </a:solidFill>
+            <a:prstDash val="solid"/>
+          </a:ln>
         </p:spPr>
       </p:sp>
       <p:pic>
@@ -12016,11 +11992,11 @@
             <a:r>
               <a:rPr lang="en-US" sz="1900" b="1" dirty="0">
                 <a:solidFill>
-                  <a:srgbClr val="C9A961"/>
-                </a:solidFill>
-                <a:latin typeface="Bookman Old Style" pitchFamily="34" charset="0"/>
-                <a:ea typeface="Bookman Old Style" pitchFamily="34" charset="-122"/>
-                <a:cs typeface="Bookman Old Style" pitchFamily="34" charset="-120"/>
+                  <a:srgbClr val="B1937E"/>
+                </a:solidFill>
+                <a:latin typeface="Georgia" pitchFamily="34" charset="0"/>
+                <a:ea typeface="Georgia" pitchFamily="34" charset="-122"/>
+                <a:cs typeface="Georgia" pitchFamily="34" charset="-120"/>
               </a:rPr>
               <a:t>Quebrar o gelo</a:t>
             </a:r>
@@ -12055,7 +12031,7 @@
             <a:r>
               <a:rPr lang="en-US" sz="1400" dirty="0">
                 <a:solidFill>
-                  <a:srgbClr val="9FB2C9"/>
+                  <a:srgbClr val="8A7E72"/>
                 </a:solidFill>
                 <a:latin typeface="Calibri" pitchFamily="34" charset="0"/>
                 <a:ea typeface="Calibri" pitchFamily="34" charset="-122"/>
@@ -12084,13 +12060,18 @@
             </a:avLst>
           </a:prstGeom>
           <a:solidFill>
-            <a:srgbClr val="13283F"/>
+            <a:srgbClr val="FFFFFF"/>
           </a:solidFill>
-          <a:ln/>
+          <a:ln w="12700">
+            <a:solidFill>
+              <a:srgbClr val="E3D9CC"/>
+            </a:solidFill>
+            <a:prstDash val="solid"/>
+          </a:ln>
           <a:effectLst>
-            <a:outerShdw sx="100000" sy="100000" kx="0" ky="0" algn="bl" rotWithShape="0" blurRad="127000" dist="38100" dir="5400000">
-              <a:srgbClr val="000000">
-                <a:alpha val="28000"/>
+            <a:outerShdw sx="100000" sy="100000" kx="0" ky="0" algn="bl" rotWithShape="0" blurRad="114300" dist="38100" dir="5400000">
+              <a:srgbClr val="7A6A55">
+                <a:alpha val="12000"/>
               </a:srgbClr>
             </a:outerShdw>
           </a:effectLst>
@@ -12111,9 +12092,14 @@
             <a:avLst/>
           </a:prstGeom>
           <a:solidFill>
-            <a:srgbClr val="16314F"/>
+            <a:srgbClr val="EADFD0"/>
           </a:solidFill>
-          <a:ln/>
+          <a:ln w="9525">
+            <a:solidFill>
+              <a:srgbClr val="E3D9CC"/>
+            </a:solidFill>
+            <a:prstDash val="solid"/>
+          </a:ln>
         </p:spPr>
       </p:sp>
       <p:pic>
@@ -12167,11 +12153,11 @@
             <a:r>
               <a:rPr lang="en-US" sz="1900" b="1" dirty="0">
                 <a:solidFill>
-                  <a:srgbClr val="C9A961"/>
-                </a:solidFill>
-                <a:latin typeface="Bookman Old Style" pitchFamily="34" charset="0"/>
-                <a:ea typeface="Bookman Old Style" pitchFamily="34" charset="-122"/>
-                <a:cs typeface="Bookman Old Style" pitchFamily="34" charset="-120"/>
+                  <a:srgbClr val="B1937E"/>
+                </a:solidFill>
+                <a:latin typeface="Georgia" pitchFamily="34" charset="0"/>
+                <a:ea typeface="Georgia" pitchFamily="34" charset="-122"/>
+                <a:cs typeface="Georgia" pitchFamily="34" charset="-120"/>
               </a:rPr>
               <a:t>Mostrar interesse</a:t>
             </a:r>
@@ -12206,7 +12192,7 @@
             <a:r>
               <a:rPr lang="en-US" sz="1400" dirty="0">
                 <a:solidFill>
-                  <a:srgbClr val="9FB2C9"/>
+                  <a:srgbClr val="8A7E72"/>
                 </a:solidFill>
                 <a:latin typeface="Calibri" pitchFamily="34" charset="0"/>
                 <a:ea typeface="Calibri" pitchFamily="34" charset="-122"/>
@@ -12235,13 +12221,18 @@
             </a:avLst>
           </a:prstGeom>
           <a:solidFill>
-            <a:srgbClr val="13283F"/>
+            <a:srgbClr val="FFFFFF"/>
           </a:solidFill>
-          <a:ln/>
+          <a:ln w="12700">
+            <a:solidFill>
+              <a:srgbClr val="E3D9CC"/>
+            </a:solidFill>
+            <a:prstDash val="solid"/>
+          </a:ln>
           <a:effectLst>
-            <a:outerShdw sx="100000" sy="100000" kx="0" ky="0" algn="bl" rotWithShape="0" blurRad="127000" dist="38100" dir="5400000">
-              <a:srgbClr val="000000">
-                <a:alpha val="28000"/>
+            <a:outerShdw sx="100000" sy="100000" kx="0" ky="0" algn="bl" rotWithShape="0" blurRad="114300" dist="38100" dir="5400000">
+              <a:srgbClr val="7A6A55">
+                <a:alpha val="12000"/>
               </a:srgbClr>
             </a:outerShdw>
           </a:effectLst>
@@ -12262,9 +12253,14 @@
             <a:avLst/>
           </a:prstGeom>
           <a:solidFill>
-            <a:srgbClr val="16314F"/>
+            <a:srgbClr val="EADFD0"/>
           </a:solidFill>
-          <a:ln/>
+          <a:ln w="9525">
+            <a:solidFill>
+              <a:srgbClr val="E3D9CC"/>
+            </a:solidFill>
+            <a:prstDash val="solid"/>
+          </a:ln>
         </p:spPr>
       </p:sp>
       <p:pic>
@@ -12318,11 +12314,11 @@
             <a:r>
               <a:rPr lang="en-US" sz="1900" b="1" dirty="0">
                 <a:solidFill>
-                  <a:srgbClr val="C9A961"/>
-                </a:solidFill>
-                <a:latin typeface="Bookman Old Style" pitchFamily="34" charset="0"/>
-                <a:ea typeface="Bookman Old Style" pitchFamily="34" charset="-122"/>
-                <a:cs typeface="Bookman Old Style" pitchFamily="34" charset="-120"/>
+                  <a:srgbClr val="B1937E"/>
+                </a:solidFill>
+                <a:latin typeface="Georgia" pitchFamily="34" charset="0"/>
+                <a:ea typeface="Georgia" pitchFamily="34" charset="-122"/>
+                <a:cs typeface="Georgia" pitchFamily="34" charset="-120"/>
               </a:rPr>
               <a:t>Ler o casal</a:t>
             </a:r>
@@ -12357,7 +12353,7 @@
             <a:r>
               <a:rPr lang="en-US" sz="1400" dirty="0">
                 <a:solidFill>
-                  <a:srgbClr val="9FB2C9"/>
+                  <a:srgbClr val="8A7E72"/>
                 </a:solidFill>
                 <a:latin typeface="Calibri" pitchFamily="34" charset="0"/>
                 <a:ea typeface="Calibri" pitchFamily="34" charset="-122"/>
@@ -12386,7 +12382,7 @@
           <a:noFill/>
           <a:ln w="9525">
             <a:solidFill>
-              <a:srgbClr val="5C708A">
+              <a:srgbClr val="A89A86">
                 <a:alpha val="60000"/>
               </a:srgbClr>
             </a:solidFill>
@@ -12421,7 +12417,7 @@
             <a:r>
               <a:rPr lang="en-US" sz="900" dirty="0">
                 <a:solidFill>
-                  <a:srgbClr val="5C708A"/>
+                  <a:srgbClr val="A89A86"/>
                 </a:solidFill>
                 <a:latin typeface="Calibri" pitchFamily="34" charset="0"/>
                 <a:ea typeface="Calibri" pitchFamily="34" charset="-122"/>
@@ -12460,7 +12456,7 @@
             <a:r>
               <a:rPr lang="en-US" sz="900" dirty="0">
                 <a:solidFill>
-                  <a:srgbClr val="5C708A"/>
+                  <a:srgbClr val="A89A86"/>
                 </a:solidFill>
                 <a:latin typeface="Calibri" pitchFamily="34" charset="0"/>
                 <a:ea typeface="Calibri" pitchFamily="34" charset="-122"/>
@@ -12486,7 +12482,7 @@
     <p:bg>
       <p:bgPr>
         <a:solidFill>
-          <a:srgbClr val="0B1D33"/>
+          <a:srgbClr val="F8F6F3"/>
         </a:solidFill>
       </p:bgPr>
     </p:bg>
@@ -12531,7 +12527,7 @@
             <a:r>
               <a:rPr lang="en-US" sz="1200" b="1" spc="300" kern="0" dirty="0">
                 <a:solidFill>
-                  <a:srgbClr val="4A9EFF"/>
+                  <a:srgbClr val="9A7B66"/>
                 </a:solidFill>
                 <a:latin typeface="Calibri" pitchFamily="34" charset="0"/>
                 <a:ea typeface="Calibri" pitchFamily="34" charset="-122"/>
@@ -12573,11 +12569,11 @@
             <a:r>
               <a:rPr lang="en-US" sz="3200" b="1" dirty="0">
                 <a:solidFill>
-                  <a:srgbClr val="EAF1FA"/>
-                </a:solidFill>
-                <a:latin typeface="Bookman Old Style" pitchFamily="34" charset="0"/>
-                <a:ea typeface="Bookman Old Style" pitchFamily="34" charset="-122"/>
-                <a:cs typeface="Bookman Old Style" pitchFamily="34" charset="-120"/>
+                  <a:srgbClr val="33302B"/>
+                </a:solidFill>
+                <a:latin typeface="Georgia" pitchFamily="34" charset="0"/>
+                <a:ea typeface="Georgia" pitchFamily="34" charset="-122"/>
+                <a:cs typeface="Georgia" pitchFamily="34" charset="-120"/>
               </a:rPr>
               <a:t>Descoberta: quem pergunta, comanda</a:t>
             </a:r>
@@ -12602,13 +12598,18 @@
             </a:avLst>
           </a:prstGeom>
           <a:solidFill>
-            <a:srgbClr val="13283F"/>
+            <a:srgbClr val="FFFFFF"/>
           </a:solidFill>
-          <a:ln/>
+          <a:ln w="12700">
+            <a:solidFill>
+              <a:srgbClr val="E3D9CC"/>
+            </a:solidFill>
+            <a:prstDash val="solid"/>
+          </a:ln>
           <a:effectLst>
-            <a:outerShdw sx="100000" sy="100000" kx="0" ky="0" algn="bl" rotWithShape="0" blurRad="127000" dist="38100" dir="5400000">
-              <a:srgbClr val="000000">
-                <a:alpha val="28000"/>
+            <a:outerShdw sx="100000" sy="100000" kx="0" ky="0" algn="bl" rotWithShape="0" blurRad="114300" dist="38100" dir="5400000">
+              <a:srgbClr val="7A6A55">
+                <a:alpha val="12000"/>
               </a:srgbClr>
             </a:outerShdw>
           </a:effectLst>
@@ -12629,9 +12630,14 @@
             <a:avLst/>
           </a:prstGeom>
           <a:solidFill>
-            <a:srgbClr val="16314F"/>
+            <a:srgbClr val="EADFD0"/>
           </a:solidFill>
-          <a:ln/>
+          <a:ln w="9525">
+            <a:solidFill>
+              <a:srgbClr val="E3D9CC"/>
+            </a:solidFill>
+            <a:prstDash val="solid"/>
+          </a:ln>
         </p:spPr>
       </p:sp>
       <p:pic>
@@ -12685,11 +12691,11 @@
             <a:r>
               <a:rPr lang="en-US" sz="1900" b="1" dirty="0">
                 <a:solidFill>
-                  <a:srgbClr val="C9A961"/>
-                </a:solidFill>
-                <a:latin typeface="Bookman Old Style" pitchFamily="34" charset="0"/>
-                <a:ea typeface="Bookman Old Style" pitchFamily="34" charset="-122"/>
-                <a:cs typeface="Bookman Old Style" pitchFamily="34" charset="-120"/>
+                  <a:srgbClr val="B1937E"/>
+                </a:solidFill>
+                <a:latin typeface="Georgia" pitchFamily="34" charset="0"/>
+                <a:ea typeface="Georgia" pitchFamily="34" charset="-122"/>
+                <a:cs typeface="Georgia" pitchFamily="34" charset="-120"/>
               </a:rPr>
               <a:t>Ouvir mais que falar</a:t>
             </a:r>
@@ -12724,7 +12730,7 @@
             <a:r>
               <a:rPr lang="en-US" sz="1400" dirty="0">
                 <a:solidFill>
-                  <a:srgbClr val="9FB2C9"/>
+                  <a:srgbClr val="8A7E72"/>
                 </a:solidFill>
                 <a:latin typeface="Calibri" pitchFamily="34" charset="0"/>
                 <a:ea typeface="Calibri" pitchFamily="34" charset="-122"/>
@@ -12753,13 +12759,18 @@
             </a:avLst>
           </a:prstGeom>
           <a:solidFill>
-            <a:srgbClr val="13283F"/>
+            <a:srgbClr val="FFFFFF"/>
           </a:solidFill>
-          <a:ln/>
+          <a:ln w="12700">
+            <a:solidFill>
+              <a:srgbClr val="E3D9CC"/>
+            </a:solidFill>
+            <a:prstDash val="solid"/>
+          </a:ln>
           <a:effectLst>
-            <a:outerShdw sx="100000" sy="100000" kx="0" ky="0" algn="bl" rotWithShape="0" blurRad="127000" dist="38100" dir="5400000">
-              <a:srgbClr val="000000">
-                <a:alpha val="28000"/>
+            <a:outerShdw sx="100000" sy="100000" kx="0" ky="0" algn="bl" rotWithShape="0" blurRad="114300" dist="38100" dir="5400000">
+              <a:srgbClr val="7A6A55">
+                <a:alpha val="12000"/>
               </a:srgbClr>
             </a:outerShdw>
           </a:effectLst>
@@ -12780,9 +12791,14 @@
             <a:avLst/>
           </a:prstGeom>
           <a:solidFill>
-            <a:srgbClr val="16314F"/>
+            <a:srgbClr val="EADFD0"/>
           </a:solidFill>
-          <a:ln/>
+          <a:ln w="9525">
+            <a:solidFill>
+              <a:srgbClr val="E3D9CC"/>
+            </a:solidFill>
+            <a:prstDash val="solid"/>
+          </a:ln>
         </p:spPr>
       </p:sp>
       <p:pic>
@@ -12836,11 +12852,11 @@
             <a:r>
               <a:rPr lang="en-US" sz="1900" b="1" dirty="0">
                 <a:solidFill>
-                  <a:srgbClr val="C9A961"/>
-                </a:solidFill>
-                <a:latin typeface="Bookman Old Style" pitchFamily="34" charset="0"/>
-                <a:ea typeface="Bookman Old Style" pitchFamily="34" charset="-122"/>
-                <a:cs typeface="Bookman Old Style" pitchFamily="34" charset="-120"/>
+                  <a:srgbClr val="B1937E"/>
+                </a:solidFill>
+                <a:latin typeface="Georgia" pitchFamily="34" charset="0"/>
+                <a:ea typeface="Georgia" pitchFamily="34" charset="-122"/>
+                <a:cs typeface="Georgia" pitchFamily="34" charset="-120"/>
               </a:rPr>
               <a:t>Perguntas que abrem</a:t>
             </a:r>
@@ -12875,7 +12891,7 @@
             <a:r>
               <a:rPr lang="en-US" sz="1400" dirty="0">
                 <a:solidFill>
-                  <a:srgbClr val="9FB2C9"/>
+                  <a:srgbClr val="8A7E72"/>
                 </a:solidFill>
                 <a:latin typeface="Calibri" pitchFamily="34" charset="0"/>
                 <a:ea typeface="Calibri" pitchFamily="34" charset="-122"/>
@@ -12904,13 +12920,18 @@
             </a:avLst>
           </a:prstGeom>
           <a:solidFill>
-            <a:srgbClr val="13283F"/>
+            <a:srgbClr val="FFFFFF"/>
           </a:solidFill>
-          <a:ln/>
+          <a:ln w="12700">
+            <a:solidFill>
+              <a:srgbClr val="E3D9CC"/>
+            </a:solidFill>
+            <a:prstDash val="solid"/>
+          </a:ln>
           <a:effectLst>
-            <a:outerShdw sx="100000" sy="100000" kx="0" ky="0" algn="bl" rotWithShape="0" blurRad="127000" dist="38100" dir="5400000">
-              <a:srgbClr val="000000">
-                <a:alpha val="28000"/>
+            <a:outerShdw sx="100000" sy="100000" kx="0" ky="0" algn="bl" rotWithShape="0" blurRad="114300" dist="38100" dir="5400000">
+              <a:srgbClr val="7A6A55">
+                <a:alpha val="12000"/>
               </a:srgbClr>
             </a:outerShdw>
           </a:effectLst>
@@ -12931,9 +12952,14 @@
             <a:avLst/>
           </a:prstGeom>
           <a:solidFill>
-            <a:srgbClr val="16314F"/>
+            <a:srgbClr val="EADFD0"/>
           </a:solidFill>
-          <a:ln/>
+          <a:ln w="9525">
+            <a:solidFill>
+              <a:srgbClr val="E3D9CC"/>
+            </a:solidFill>
+            <a:prstDash val="solid"/>
+          </a:ln>
         </p:spPr>
       </p:sp>
       <p:pic>
@@ -12987,11 +13013,11 @@
             <a:r>
               <a:rPr lang="en-US" sz="1900" b="1" dirty="0">
                 <a:solidFill>
-                  <a:srgbClr val="C9A961"/>
-                </a:solidFill>
-                <a:latin typeface="Bookman Old Style" pitchFamily="34" charset="0"/>
-                <a:ea typeface="Bookman Old Style" pitchFamily="34" charset="-122"/>
-                <a:cs typeface="Bookman Old Style" pitchFamily="34" charset="-120"/>
+                  <a:srgbClr val="B1937E"/>
+                </a:solidFill>
+                <a:latin typeface="Georgia" pitchFamily="34" charset="0"/>
+                <a:ea typeface="Georgia" pitchFamily="34" charset="-122"/>
+                <a:cs typeface="Georgia" pitchFamily="34" charset="-120"/>
               </a:rPr>
               <a:t>Descobrir o medo</a:t>
             </a:r>
@@ -13026,7 +13052,7 @@
             <a:r>
               <a:rPr lang="en-US" sz="1400" dirty="0">
                 <a:solidFill>
-                  <a:srgbClr val="9FB2C9"/>
+                  <a:srgbClr val="8A7E72"/>
                 </a:solidFill>
                 <a:latin typeface="Calibri" pitchFamily="34" charset="0"/>
                 <a:ea typeface="Calibri" pitchFamily="34" charset="-122"/>
@@ -13055,7 +13081,7 @@
           <a:noFill/>
           <a:ln w="9525">
             <a:solidFill>
-              <a:srgbClr val="5C708A">
+              <a:srgbClr val="A89A86">
                 <a:alpha val="60000"/>
               </a:srgbClr>
             </a:solidFill>
@@ -13090,7 +13116,7 @@
             <a:r>
               <a:rPr lang="en-US" sz="900" dirty="0">
                 <a:solidFill>
-                  <a:srgbClr val="5C708A"/>
+                  <a:srgbClr val="A89A86"/>
                 </a:solidFill>
                 <a:latin typeface="Calibri" pitchFamily="34" charset="0"/>
                 <a:ea typeface="Calibri" pitchFamily="34" charset="-122"/>
@@ -13129,7 +13155,7 @@
             <a:r>
               <a:rPr lang="en-US" sz="900" dirty="0">
                 <a:solidFill>
-                  <a:srgbClr val="5C708A"/>
+                  <a:srgbClr val="A89A86"/>
                 </a:solidFill>
                 <a:latin typeface="Calibri" pitchFamily="34" charset="0"/>
                 <a:ea typeface="Calibri" pitchFamily="34" charset="-122"/>
@@ -13155,7 +13181,7 @@
     <p:bg>
       <p:bgPr>
         <a:solidFill>
-          <a:srgbClr val="0B1D33"/>
+          <a:srgbClr val="F8F6F3"/>
         </a:solidFill>
       </p:bgPr>
     </p:bg>
@@ -13200,7 +13226,7 @@
             <a:r>
               <a:rPr lang="en-US" sz="1200" b="1" spc="300" kern="0" dirty="0">
                 <a:solidFill>
-                  <a:srgbClr val="4A9EFF"/>
+                  <a:srgbClr val="9A7B66"/>
                 </a:solidFill>
                 <a:latin typeface="Calibri" pitchFamily="34" charset="0"/>
                 <a:ea typeface="Calibri" pitchFamily="34" charset="-122"/>
@@ -13242,11 +13268,11 @@
             <a:r>
               <a:rPr lang="en-US" sz="3200" b="1" dirty="0">
                 <a:solidFill>
-                  <a:srgbClr val="EAF1FA"/>
-                </a:solidFill>
-                <a:latin typeface="Bookman Old Style" pitchFamily="34" charset="0"/>
-                <a:ea typeface="Bookman Old Style" pitchFamily="34" charset="-122"/>
-                <a:cs typeface="Bookman Old Style" pitchFamily="34" charset="-120"/>
+                  <a:srgbClr val="33302B"/>
+                </a:solidFill>
+                <a:latin typeface="Georgia" pitchFamily="34" charset="0"/>
+                <a:ea typeface="Georgia" pitchFamily="34" charset="-122"/>
+                <a:cs typeface="Georgia" pitchFamily="34" charset="-120"/>
               </a:rPr>
               <a:t>As perguntas que revelam tudo</a:t>
             </a:r>
@@ -13271,13 +13297,18 @@
             </a:avLst>
           </a:prstGeom>
           <a:solidFill>
-            <a:srgbClr val="13283F"/>
+            <a:srgbClr val="FFFFFF"/>
           </a:solidFill>
-          <a:ln/>
+          <a:ln w="12700">
+            <a:solidFill>
+              <a:srgbClr val="E3D9CC"/>
+            </a:solidFill>
+            <a:prstDash val="solid"/>
+          </a:ln>
           <a:effectLst>
-            <a:outerShdw sx="100000" sy="100000" kx="0" ky="0" algn="bl" rotWithShape="0" blurRad="127000" dist="38100" dir="5400000">
-              <a:srgbClr val="000000">
-                <a:alpha val="28000"/>
+            <a:outerShdw sx="100000" sy="100000" kx="0" ky="0" algn="bl" rotWithShape="0" blurRad="114300" dist="38100" dir="5400000">
+              <a:srgbClr val="7A6A55">
+                <a:alpha val="12000"/>
               </a:srgbClr>
             </a:outerShdw>
           </a:effectLst>
@@ -13298,9 +13329,14 @@
             <a:avLst/>
           </a:prstGeom>
           <a:solidFill>
-            <a:srgbClr val="16314F"/>
+            <a:srgbClr val="EADFD0"/>
           </a:solidFill>
-          <a:ln/>
+          <a:ln w="9525">
+            <a:solidFill>
+              <a:srgbClr val="E3D9CC"/>
+            </a:solidFill>
+            <a:prstDash val="solid"/>
+          </a:ln>
         </p:spPr>
       </p:sp>
       <p:pic>
@@ -13354,11 +13390,11 @@
             <a:r>
               <a:rPr lang="en-US" sz="1800" b="1" dirty="0">
                 <a:solidFill>
-                  <a:srgbClr val="C9A961"/>
-                </a:solidFill>
-                <a:latin typeface="Bookman Old Style" pitchFamily="34" charset="0"/>
-                <a:ea typeface="Bookman Old Style" pitchFamily="34" charset="-122"/>
-                <a:cs typeface="Bookman Old Style" pitchFamily="34" charset="-120"/>
+                  <a:srgbClr val="B1937E"/>
+                </a:solidFill>
+                <a:latin typeface="Georgia" pitchFamily="34" charset="0"/>
+                <a:ea typeface="Georgia" pitchFamily="34" charset="-122"/>
+                <a:cs typeface="Georgia" pitchFamily="34" charset="-120"/>
               </a:rPr>
               <a:t>Sobre o dia</a:t>
             </a:r>
@@ -13393,7 +13429,7 @@
             <a:r>
               <a:rPr lang="en-US" sz="1350" dirty="0">
                 <a:solidFill>
-                  <a:srgbClr val="9FB2C9"/>
+                  <a:srgbClr val="8A7E72"/>
                 </a:solidFill>
                 <a:latin typeface="Calibri" pitchFamily="34" charset="0"/>
                 <a:ea typeface="Calibri" pitchFamily="34" charset="-122"/>
@@ -13422,13 +13458,18 @@
             </a:avLst>
           </a:prstGeom>
           <a:solidFill>
-            <a:srgbClr val="13283F"/>
+            <a:srgbClr val="FFFFFF"/>
           </a:solidFill>
-          <a:ln/>
+          <a:ln w="12700">
+            <a:solidFill>
+              <a:srgbClr val="E3D9CC"/>
+            </a:solidFill>
+            <a:prstDash val="solid"/>
+          </a:ln>
           <a:effectLst>
-            <a:outerShdw sx="100000" sy="100000" kx="0" ky="0" algn="bl" rotWithShape="0" blurRad="127000" dist="38100" dir="5400000">
-              <a:srgbClr val="000000">
-                <a:alpha val="28000"/>
+            <a:outerShdw sx="100000" sy="100000" kx="0" ky="0" algn="bl" rotWithShape="0" blurRad="114300" dist="38100" dir="5400000">
+              <a:srgbClr val="7A6A55">
+                <a:alpha val="12000"/>
               </a:srgbClr>
             </a:outerShdw>
           </a:effectLst>
@@ -13449,9 +13490,14 @@
             <a:avLst/>
           </a:prstGeom>
           <a:solidFill>
-            <a:srgbClr val="16314F"/>
+            <a:srgbClr val="EADFD0"/>
           </a:solidFill>
-          <a:ln/>
+          <a:ln w="9525">
+            <a:solidFill>
+              <a:srgbClr val="E3D9CC"/>
+            </a:solidFill>
+            <a:prstDash val="solid"/>
+          </a:ln>
         </p:spPr>
       </p:sp>
       <p:pic>
@@ -13505,11 +13551,11 @@
             <a:r>
               <a:rPr lang="en-US" sz="1800" b="1" dirty="0">
                 <a:solidFill>
-                  <a:srgbClr val="C9A961"/>
-                </a:solidFill>
-                <a:latin typeface="Bookman Old Style" pitchFamily="34" charset="0"/>
-                <a:ea typeface="Bookman Old Style" pitchFamily="34" charset="-122"/>
-                <a:cs typeface="Bookman Old Style" pitchFamily="34" charset="-120"/>
+                  <a:srgbClr val="B1937E"/>
+                </a:solidFill>
+                <a:latin typeface="Georgia" pitchFamily="34" charset="0"/>
+                <a:ea typeface="Georgia" pitchFamily="34" charset="-122"/>
+                <a:cs typeface="Georgia" pitchFamily="34" charset="-120"/>
               </a:rPr>
               <a:t>Sobre o valor</a:t>
             </a:r>
@@ -13544,7 +13590,7 @@
             <a:r>
               <a:rPr lang="en-US" sz="1350" dirty="0">
                 <a:solidFill>
-                  <a:srgbClr val="9FB2C9"/>
+                  <a:srgbClr val="8A7E72"/>
                 </a:solidFill>
                 <a:latin typeface="Calibri" pitchFamily="34" charset="0"/>
                 <a:ea typeface="Calibri" pitchFamily="34" charset="-122"/>
@@ -13573,13 +13619,18 @@
             </a:avLst>
           </a:prstGeom>
           <a:solidFill>
-            <a:srgbClr val="13283F"/>
+            <a:srgbClr val="FFFFFF"/>
           </a:solidFill>
-          <a:ln/>
+          <a:ln w="12700">
+            <a:solidFill>
+              <a:srgbClr val="E3D9CC"/>
+            </a:solidFill>
+            <a:prstDash val="solid"/>
+          </a:ln>
           <a:effectLst>
-            <a:outerShdw sx="100000" sy="100000" kx="0" ky="0" algn="bl" rotWithShape="0" blurRad="127000" dist="38100" dir="5400000">
-              <a:srgbClr val="000000">
-                <a:alpha val="28000"/>
+            <a:outerShdw sx="100000" sy="100000" kx="0" ky="0" algn="bl" rotWithShape="0" blurRad="114300" dist="38100" dir="5400000">
+              <a:srgbClr val="7A6A55">
+                <a:alpha val="12000"/>
               </a:srgbClr>
             </a:outerShdw>
           </a:effectLst>
@@ -13600,9 +13651,14 @@
             <a:avLst/>
           </a:prstGeom>
           <a:solidFill>
-            <a:srgbClr val="16314F"/>
+            <a:srgbClr val="EADFD0"/>
           </a:solidFill>
-          <a:ln/>
+          <a:ln w="9525">
+            <a:solidFill>
+              <a:srgbClr val="E3D9CC"/>
+            </a:solidFill>
+            <a:prstDash val="solid"/>
+          </a:ln>
         </p:spPr>
       </p:sp>
       <p:pic>
@@ -13656,11 +13712,11 @@
             <a:r>
               <a:rPr lang="en-US" sz="1800" b="1" dirty="0">
                 <a:solidFill>
-                  <a:srgbClr val="C9A961"/>
-                </a:solidFill>
-                <a:latin typeface="Bookman Old Style" pitchFamily="34" charset="0"/>
-                <a:ea typeface="Bookman Old Style" pitchFamily="34" charset="-122"/>
-                <a:cs typeface="Bookman Old Style" pitchFamily="34" charset="-120"/>
+                  <a:srgbClr val="B1937E"/>
+                </a:solidFill>
+                <a:latin typeface="Georgia" pitchFamily="34" charset="0"/>
+                <a:ea typeface="Georgia" pitchFamily="34" charset="-122"/>
+                <a:cs typeface="Georgia" pitchFamily="34" charset="-120"/>
               </a:rPr>
               <a:t>Sobre o medo</a:t>
             </a:r>
@@ -13695,7 +13751,7 @@
             <a:r>
               <a:rPr lang="en-US" sz="1350" dirty="0">
                 <a:solidFill>
-                  <a:srgbClr val="9FB2C9"/>
+                  <a:srgbClr val="8A7E72"/>
                 </a:solidFill>
                 <a:latin typeface="Calibri" pitchFamily="34" charset="0"/>
                 <a:ea typeface="Calibri" pitchFamily="34" charset="-122"/>
@@ -13724,13 +13780,18 @@
             </a:avLst>
           </a:prstGeom>
           <a:solidFill>
-            <a:srgbClr val="13283F"/>
+            <a:srgbClr val="FFFFFF"/>
           </a:solidFill>
-          <a:ln/>
+          <a:ln w="12700">
+            <a:solidFill>
+              <a:srgbClr val="E3D9CC"/>
+            </a:solidFill>
+            <a:prstDash val="solid"/>
+          </a:ln>
           <a:effectLst>
-            <a:outerShdw sx="100000" sy="100000" kx="0" ky="0" algn="bl" rotWithShape="0" blurRad="127000" dist="38100" dir="5400000">
-              <a:srgbClr val="000000">
-                <a:alpha val="28000"/>
+            <a:outerShdw sx="100000" sy="100000" kx="0" ky="0" algn="bl" rotWithShape="0" blurRad="114300" dist="38100" dir="5400000">
+              <a:srgbClr val="7A6A55">
+                <a:alpha val="12000"/>
               </a:srgbClr>
             </a:outerShdw>
           </a:effectLst>
@@ -13751,9 +13812,14 @@
             <a:avLst/>
           </a:prstGeom>
           <a:solidFill>
-            <a:srgbClr val="16314F"/>
+            <a:srgbClr val="EADFD0"/>
           </a:solidFill>
-          <a:ln/>
+          <a:ln w="9525">
+            <a:solidFill>
+              <a:srgbClr val="E3D9CC"/>
+            </a:solidFill>
+            <a:prstDash val="solid"/>
+          </a:ln>
         </p:spPr>
       </p:sp>
       <p:pic>
@@ -13807,11 +13873,11 @@
             <a:r>
               <a:rPr lang="en-US" sz="1800" b="1" dirty="0">
                 <a:solidFill>
-                  <a:srgbClr val="C9A961"/>
-                </a:solidFill>
-                <a:latin typeface="Bookman Old Style" pitchFamily="34" charset="0"/>
-                <a:ea typeface="Bookman Old Style" pitchFamily="34" charset="-122"/>
-                <a:cs typeface="Bookman Old Style" pitchFamily="34" charset="-120"/>
+                  <a:srgbClr val="B1937E"/>
+                </a:solidFill>
+                <a:latin typeface="Georgia" pitchFamily="34" charset="0"/>
+                <a:ea typeface="Georgia" pitchFamily="34" charset="-122"/>
+                <a:cs typeface="Georgia" pitchFamily="34" charset="-120"/>
               </a:rPr>
               <a:t>Sobre a decisão</a:t>
             </a:r>
@@ -13846,7 +13912,7 @@
             <a:r>
               <a:rPr lang="en-US" sz="1350" dirty="0">
                 <a:solidFill>
-                  <a:srgbClr val="9FB2C9"/>
+                  <a:srgbClr val="8A7E72"/>
                 </a:solidFill>
                 <a:latin typeface="Calibri" pitchFamily="34" charset="0"/>
                 <a:ea typeface="Calibri" pitchFamily="34" charset="-122"/>
@@ -13875,7 +13941,7 @@
           <a:noFill/>
           <a:ln w="9525">
             <a:solidFill>
-              <a:srgbClr val="5C708A">
+              <a:srgbClr val="A89A86">
                 <a:alpha val="60000"/>
               </a:srgbClr>
             </a:solidFill>
@@ -13910,7 +13976,7 @@
             <a:r>
               <a:rPr lang="en-US" sz="900" dirty="0">
                 <a:solidFill>
-                  <a:srgbClr val="5C708A"/>
+                  <a:srgbClr val="A89A86"/>
                 </a:solidFill>
                 <a:latin typeface="Calibri" pitchFamily="34" charset="0"/>
                 <a:ea typeface="Calibri" pitchFamily="34" charset="-122"/>
@@ -13949,7 +14015,7 @@
             <a:r>
               <a:rPr lang="en-US" sz="900" dirty="0">
                 <a:solidFill>
-                  <a:srgbClr val="5C708A"/>
+                  <a:srgbClr val="A89A86"/>
                 </a:solidFill>
                 <a:latin typeface="Calibri" pitchFamily="34" charset="0"/>
                 <a:ea typeface="Calibri" pitchFamily="34" charset="-122"/>
@@ -13975,7 +14041,7 @@
     <p:bg>
       <p:bgPr>
         <a:solidFill>
-          <a:srgbClr val="0B1D33"/>
+          <a:srgbClr val="F8F6F3"/>
         </a:solidFill>
       </p:bgPr>
     </p:bg>
@@ -13995,51 +14061,7 @@
       </p:grpSpPr>
       <p:sp>
         <p:nvSpPr>
-          <p:cNvPr id="2" name="Shape 0"/>
-          <p:cNvSpPr/>
-          <p:nvPr/>
-        </p:nvSpPr>
-        <p:spPr>
-          <a:xfrm>
-            <a:off x="7772400" y="-1371600"/>
-            <a:ext cx="5486400" cy="5486400"/>
-          </a:xfrm>
-          <a:prstGeom prst="ellipse">
-            <a:avLst/>
-          </a:prstGeom>
-          <a:solidFill>
-            <a:srgbClr val="4A9EFF">
-              <a:alpha val="10000"/>
-            </a:srgbClr>
-          </a:solidFill>
-          <a:ln/>
-        </p:spPr>
-      </p:sp>
-      <p:sp>
-        <p:nvSpPr>
-          <p:cNvPr id="3" name="Shape 1"/>
-          <p:cNvSpPr/>
-          <p:nvPr/>
-        </p:nvSpPr>
-        <p:spPr>
-          <a:xfrm>
-            <a:off x="-1371600" y="4114800"/>
-            <a:ext cx="4572000" cy="4572000"/>
-          </a:xfrm>
-          <a:prstGeom prst="ellipse">
-            <a:avLst/>
-          </a:prstGeom>
-          <a:solidFill>
-            <a:srgbClr val="C9A961">
-              <a:alpha val="8000"/>
-            </a:srgbClr>
-          </a:solidFill>
-          <a:ln/>
-        </p:spPr>
-      </p:sp>
-      <p:sp>
-        <p:nvSpPr>
-          <p:cNvPr id="4" name="Text 2"/>
+          <p:cNvPr id="2" name="Text 0"/>
           <p:cNvSpPr/>
           <p:nvPr/>
         </p:nvSpPr>
@@ -14064,11 +14086,11 @@
             <a:r>
               <a:rPr lang="en-US" sz="15000" b="1" dirty="0">
                 <a:solidFill>
-                  <a:srgbClr val="16314F"/>
-                </a:solidFill>
-                <a:latin typeface="Bookman Old Style" pitchFamily="34" charset="0"/>
-                <a:ea typeface="Bookman Old Style" pitchFamily="34" charset="-122"/>
-                <a:cs typeface="Bookman Old Style" pitchFamily="34" charset="-120"/>
+                  <a:srgbClr val="EADFD0"/>
+                </a:solidFill>
+                <a:latin typeface="Georgia" pitchFamily="34" charset="0"/>
+                <a:ea typeface="Georgia" pitchFamily="34" charset="-122"/>
+                <a:cs typeface="Georgia" pitchFamily="34" charset="-120"/>
               </a:rPr>
               <a:t>B</a:t>
             </a:r>
@@ -14078,7 +14100,7 @@
       </p:sp>
       <p:sp>
         <p:nvSpPr>
-          <p:cNvPr id="5" name="Text 3"/>
+          <p:cNvPr id="3" name="Text 1"/>
           <p:cNvSpPr/>
           <p:nvPr/>
         </p:nvSpPr>
@@ -14103,7 +14125,7 @@
             <a:r>
               <a:rPr lang="en-US" sz="1300" b="1" spc="400" kern="0" dirty="0">
                 <a:solidFill>
-                  <a:srgbClr val="C9A961"/>
+                  <a:srgbClr val="B1937E"/>
                 </a:solidFill>
                 <a:latin typeface="Calibri" pitchFamily="34" charset="0"/>
                 <a:ea typeface="Calibri" pitchFamily="34" charset="-122"/>
@@ -14117,7 +14139,7 @@
       </p:sp>
       <p:sp>
         <p:nvSpPr>
-          <p:cNvPr id="6" name="Text 4"/>
+          <p:cNvPr id="4" name="Text 2"/>
           <p:cNvSpPr/>
           <p:nvPr/>
         </p:nvSpPr>
@@ -14143,23 +14165,23 @@
               <a:buNone/>
             </a:pPr>
             <a:r>
-              <a:rPr lang="en-US" sz="4400" b="1" dirty="0">
-                <a:solidFill>
-                  <a:srgbClr val="EAF1FA"/>
-                </a:solidFill>
-                <a:latin typeface="Bookman Old Style" pitchFamily="34" charset="0"/>
-                <a:ea typeface="Bookman Old Style" pitchFamily="34" charset="-122"/>
-                <a:cs typeface="Bookman Old Style" pitchFamily="34" charset="-120"/>
+              <a:rPr lang="en-US" sz="4000" b="1" dirty="0">
+                <a:solidFill>
+                  <a:srgbClr val="33302B"/>
+                </a:solidFill>
+                <a:latin typeface="Georgia" pitchFamily="34" charset="0"/>
+                <a:ea typeface="Georgia" pitchFamily="34" charset="-122"/>
+                <a:cs typeface="Georgia" pitchFamily="34" charset="-120"/>
               </a:rPr>
               <a:t>Vender Emoção &amp; Fechar</a:t>
             </a:r>
-            <a:endParaRPr lang="en-US" sz="4400" dirty="0"/>
-          </a:p>
-        </p:txBody>
-      </p:sp>
-      <p:sp>
-        <p:nvSpPr>
-          <p:cNvPr id="7" name="Text 5"/>
+            <a:endParaRPr lang="en-US" sz="4000" dirty="0"/>
+          </a:p>
+        </p:txBody>
+      </p:sp>
+      <p:sp>
+        <p:nvSpPr>
+          <p:cNvPr id="5" name="Text 3"/>
           <p:cNvSpPr/>
           <p:nvPr/>
         </p:nvSpPr>
@@ -14184,7 +14206,7 @@
             <a:r>
               <a:rPr lang="en-US" sz="1600" dirty="0">
                 <a:solidFill>
-                  <a:srgbClr val="9FB2C9"/>
+                  <a:srgbClr val="8A7E72"/>
                 </a:solidFill>
                 <a:latin typeface="Calibri" pitchFamily="34" charset="0"/>
                 <a:ea typeface="Calibri" pitchFamily="34" charset="-122"/>
@@ -14198,7 +14220,7 @@
       </p:sp>
       <p:sp>
         <p:nvSpPr>
-          <p:cNvPr id="8" name="Shape 6"/>
+          <p:cNvPr id="6" name="Shape 4"/>
           <p:cNvSpPr/>
           <p:nvPr/>
         </p:nvSpPr>
@@ -14213,7 +14235,7 @@
           <a:noFill/>
           <a:ln w="9525">
             <a:solidFill>
-              <a:srgbClr val="5C708A">
+              <a:srgbClr val="A89A86">
                 <a:alpha val="60000"/>
               </a:srgbClr>
             </a:solidFill>
@@ -14223,7 +14245,7 @@
       </p:sp>
       <p:sp>
         <p:nvSpPr>
-          <p:cNvPr id="9" name="Text 7"/>
+          <p:cNvPr id="7" name="Text 5"/>
           <p:cNvSpPr/>
           <p:nvPr/>
         </p:nvSpPr>
@@ -14248,7 +14270,7 @@
             <a:r>
               <a:rPr lang="en-US" sz="900" dirty="0">
                 <a:solidFill>
-                  <a:srgbClr val="5C708A"/>
+                  <a:srgbClr val="A89A86"/>
                 </a:solidFill>
                 <a:latin typeface="Calibri" pitchFamily="34" charset="0"/>
                 <a:ea typeface="Calibri" pitchFamily="34" charset="-122"/>
@@ -14262,7 +14284,7 @@
       </p:sp>
       <p:sp>
         <p:nvSpPr>
-          <p:cNvPr id="10" name="Text 8"/>
+          <p:cNvPr id="8" name="Text 6"/>
           <p:cNvSpPr/>
           <p:nvPr/>
         </p:nvSpPr>
@@ -14287,7 +14309,7 @@
             <a:r>
               <a:rPr lang="en-US" sz="900" dirty="0">
                 <a:solidFill>
-                  <a:srgbClr val="5C708A"/>
+                  <a:srgbClr val="A89A86"/>
                 </a:solidFill>
                 <a:latin typeface="Calibri" pitchFamily="34" charset="0"/>
                 <a:ea typeface="Calibri" pitchFamily="34" charset="-122"/>
